--- a/output/wordlabs-return-3day.pptx
+++ b/output/wordlabs-return-3day.pptx
@@ -5622,7 +5622,7 @@
                 <a:ea typeface="Trebuchet MS" pitchFamily="34" charset="-122"/>
                 <a:cs typeface="Trebuchet MS" pitchFamily="34" charset="-120"/>
               </a:rPr>
-              <a:t>0</a:t>
+              <a:t>1</a:t>
             </a:r>
             <a:pPr algn="ctr" indent="0" marL="0">
               <a:buNone/>
@@ -6057,7 +6057,7 @@
                 <a:ea typeface="Calibri" pitchFamily="34" charset="-122"/>
                 <a:cs typeface="Calibri" pitchFamily="34" charset="-120"/>
               </a:rPr>
-              <a:t>returning</a:t>
+              <a:t>returnable</a:t>
             </a:r>
             <a:pPr algn="l" indent="0" marL="0">
               <a:buNone/>
@@ -6071,7 +6071,7 @@
                 <a:ea typeface="Calibri" pitchFamily="34" charset="-122"/>
                 <a:cs typeface="Calibri" pitchFamily="34" charset="-120"/>
               </a:rPr>
-              <a:t> traveller was relieved to find that his lost bag was </a:t>
+              <a:t> bottles were stacked neatly, and the </a:t>
             </a:r>
             <a:pPr algn="l" indent="0" marL="0">
               <a:buNone/>
@@ -6088,7 +6088,7 @@
                 <a:ea typeface="Calibri" pitchFamily="34" charset="-122"/>
                 <a:cs typeface="Calibri" pitchFamily="34" charset="-120"/>
               </a:rPr>
-              <a:t>returnable</a:t>
+              <a:t>returning</a:t>
             </a:r>
             <a:pPr algn="l" indent="0" marL="0">
               <a:buNone/>
@@ -6102,7 +6102,7 @@
                 <a:ea typeface="Calibri" pitchFamily="34" charset="-122"/>
                 <a:cs typeface="Calibri" pitchFamily="34" charset="-120"/>
               </a:rPr>
-              <a:t> from the airport.</a:t>
+              <a:t> students placed them by the door.</a:t>
             </a:r>
             <a:endParaRPr lang="en-US" sz="1800" dirty="0"/>
           </a:p>
@@ -6257,7 +6257,7 @@
                 <a:ea typeface="Trebuchet MS" pitchFamily="34" charset="-122"/>
                 <a:cs typeface="Trebuchet MS" pitchFamily="34" charset="-120"/>
               </a:rPr>
-              <a:t>returning</a:t>
+              <a:t>returnable</a:t>
             </a:r>
             <a:endParaRPr lang="en-US" sz="1400" dirty="0"/>
           </a:p>
@@ -6385,7 +6385,7 @@
                 <a:ea typeface="Trebuchet MS" pitchFamily="34" charset="-122"/>
                 <a:cs typeface="Trebuchet MS" pitchFamily="34" charset="-120"/>
               </a:rPr>
-              <a:t>returnable</a:t>
+              <a:t>returning</a:t>
             </a:r>
             <a:endParaRPr lang="en-US" sz="1400" dirty="0"/>
           </a:p>
@@ -6855,7 +6855,7 @@
                 <a:ea typeface="Trebuchet MS" pitchFamily="34" charset="-122"/>
                 <a:cs typeface="Trebuchet MS" pitchFamily="34" charset="-120"/>
               </a:rPr>
-              <a:t>returning</a:t>
+              <a:t>returnable</a:t>
             </a:r>
             <a:endParaRPr lang="en-US" sz="2800" dirty="0"/>
           </a:p>
@@ -7682,7 +7682,7 @@
                 <a:ea typeface="Trebuchet MS" pitchFamily="34" charset="-122"/>
                 <a:cs typeface="Trebuchet MS" pitchFamily="34" charset="-120"/>
               </a:rPr>
-              <a:t>returning</a:t>
+              <a:t>returnable</a:t>
             </a:r>
             <a:endParaRPr lang="en-US" sz="2800" dirty="0"/>
           </a:p>
@@ -7972,7 +7972,7 @@
                 <a:ea typeface="Calibri" pitchFamily="34" charset="-122"/>
                 <a:cs typeface="Calibri" pitchFamily="34" charset="-120"/>
               </a:rPr>
-              <a:t>to turn, go around</a:t>
+              <a:t>turn, go back</a:t>
             </a:r>
             <a:endParaRPr lang="en-US" sz="850" dirty="0"/>
           </a:p>
@@ -8045,7 +8045,7 @@
                 <a:ea typeface="Trebuchet MS" pitchFamily="34" charset="-122"/>
                 <a:cs typeface="Trebuchet MS" pitchFamily="34" charset="-120"/>
               </a:rPr>
-              <a:t>ing</a:t>
+              <a:t>able</a:t>
             </a:r>
             <a:endParaRPr lang="en-US" sz="1300" dirty="0"/>
           </a:p>
@@ -8084,7 +8084,7 @@
                 <a:ea typeface="Calibri" pitchFamily="34" charset="-122"/>
                 <a:cs typeface="Calibri" pitchFamily="34" charset="-120"/>
               </a:rPr>
-              <a:t>in the process of</a:t>
+              <a:t>able to be</a:t>
             </a:r>
             <a:endParaRPr lang="en-US" sz="850" dirty="0"/>
           </a:p>
@@ -8779,7 +8779,7 @@
                 <a:ea typeface="Trebuchet MS" pitchFamily="34" charset="-122"/>
                 <a:cs typeface="Trebuchet MS" pitchFamily="34" charset="-120"/>
               </a:rPr>
-              <a:t>returning</a:t>
+              <a:t>returnable</a:t>
             </a:r>
             <a:endParaRPr lang="en-US" sz="2800" dirty="0"/>
           </a:p>
@@ -9069,7 +9069,7 @@
                 <a:ea typeface="Calibri" pitchFamily="34" charset="-122"/>
                 <a:cs typeface="Calibri" pitchFamily="34" charset="-120"/>
               </a:rPr>
-              <a:t>to turn, go around</a:t>
+              <a:t>turn, go back</a:t>
             </a:r>
             <a:endParaRPr lang="en-US" sz="850" dirty="0"/>
           </a:p>
@@ -9142,7 +9142,7 @@
                 <a:ea typeface="Trebuchet MS" pitchFamily="34" charset="-122"/>
                 <a:cs typeface="Trebuchet MS" pitchFamily="34" charset="-120"/>
               </a:rPr>
-              <a:t>ing</a:t>
+              <a:t>able</a:t>
             </a:r>
             <a:endParaRPr lang="en-US" sz="1300" dirty="0"/>
           </a:p>
@@ -9181,7 +9181,7 @@
                 <a:ea typeface="Calibri" pitchFamily="34" charset="-122"/>
                 <a:cs typeface="Calibri" pitchFamily="34" charset="-120"/>
               </a:rPr>
-              <a:t>in the process of</a:t>
+              <a:t>able to be</a:t>
             </a:r>
             <a:endParaRPr lang="en-US" sz="850" dirty="0"/>
           </a:p>
@@ -9288,8 +9288,8 @@
         </p:nvSpPr>
         <p:spPr>
           <a:xfrm>
-            <a:off x="2313432" y="3364992"/>
-            <a:ext cx="1645920" cy="475488"/>
+            <a:off x="1975104" y="3364992"/>
+            <a:ext cx="1554480" cy="475488"/>
           </a:xfrm>
           <a:prstGeom prst="rect">
             <a:avLst>
@@ -9315,8 +9315,8 @@
         </p:nvSpPr>
         <p:spPr>
           <a:xfrm>
-            <a:off x="2313432" y="3364992"/>
-            <a:ext cx="1645920" cy="475488"/>
+            <a:off x="1975104" y="3364992"/>
+            <a:ext cx="1554480" cy="475488"/>
           </a:xfrm>
           <a:prstGeom prst="rect">
             <a:avLst/>
@@ -9354,8 +9354,8 @@
         </p:nvSpPr>
         <p:spPr>
           <a:xfrm>
-            <a:off x="3959352" y="3364992"/>
-            <a:ext cx="411480" cy="475488"/>
+            <a:off x="3529584" y="3364992"/>
+            <a:ext cx="73152" cy="475488"/>
           </a:xfrm>
           <a:prstGeom prst="rect">
             <a:avLst/>
@@ -9393,8 +9393,8 @@
         </p:nvSpPr>
         <p:spPr>
           <a:xfrm>
-            <a:off x="4370832" y="3364992"/>
-            <a:ext cx="1645920" cy="475488"/>
+            <a:off x="3602736" y="3364992"/>
+            <a:ext cx="1554480" cy="475488"/>
           </a:xfrm>
           <a:prstGeom prst="rect">
             <a:avLst>
@@ -9420,8 +9420,8 @@
         </p:nvSpPr>
         <p:spPr>
           <a:xfrm>
-            <a:off x="4370832" y="3364992"/>
-            <a:ext cx="1645920" cy="475488"/>
+            <a:off x="3602736" y="3364992"/>
+            <a:ext cx="1554480" cy="475488"/>
           </a:xfrm>
           <a:prstGeom prst="rect">
             <a:avLst/>
@@ -9459,8 +9459,8 @@
         </p:nvSpPr>
         <p:spPr>
           <a:xfrm>
-            <a:off x="6016752" y="3364992"/>
-            <a:ext cx="411480" cy="475488"/>
+            <a:off x="5157216" y="3364992"/>
+            <a:ext cx="73152" cy="475488"/>
           </a:xfrm>
           <a:prstGeom prst="rect">
             <a:avLst/>
@@ -9498,8 +9498,8 @@
         </p:nvSpPr>
         <p:spPr>
           <a:xfrm>
-            <a:off x="6428232" y="3364992"/>
-            <a:ext cx="1645920" cy="475488"/>
+            <a:off x="5230368" y="3364992"/>
+            <a:ext cx="1554480" cy="475488"/>
           </a:xfrm>
           <a:prstGeom prst="rect">
             <a:avLst>
@@ -9525,8 +9525,8 @@
         </p:nvSpPr>
         <p:spPr>
           <a:xfrm>
-            <a:off x="6428232" y="3364992"/>
-            <a:ext cx="1645920" cy="475488"/>
+            <a:off x="5230368" y="3364992"/>
+            <a:ext cx="1554480" cy="475488"/>
           </a:xfrm>
           <a:prstGeom prst="rect">
             <a:avLst/>
@@ -9550,7 +9550,7 @@
                 <a:ea typeface="Trebuchet MS" pitchFamily="34" charset="-122"/>
                 <a:cs typeface="Trebuchet MS" pitchFamily="34" charset="-120"/>
               </a:rPr>
-              <a:t>ing</a:t>
+              <a:t>a</a:t>
             </a:r>
             <a:endParaRPr lang="en-US" sz="1400" dirty="0"/>
           </a:p>
@@ -9558,7 +9558,112 @@
       </p:sp>
       <p:sp>
         <p:nvSpPr>
-          <p:cNvPr id="36" name="Shape 34"/>
+          <p:cNvPr id="36" name="Text 34"/>
+          <p:cNvSpPr/>
+          <p:nvPr/>
+        </p:nvSpPr>
+        <p:spPr>
+          <a:xfrm>
+            <a:off x="6784848" y="3364992"/>
+            <a:ext cx="73152" cy="475488"/>
+          </a:xfrm>
+          <a:prstGeom prst="rect">
+            <a:avLst/>
+          </a:prstGeom>
+          <a:noFill/>
+          <a:ln/>
+        </p:spPr>
+        <p:txBody>
+          <a:bodyPr wrap="square" lIns="0" tIns="0" rIns="0" bIns="0" rtlCol="0" anchor="ctr"/>
+          <a:lstStyle/>
+          <a:p>
+            <a:pPr algn="ctr" indent="0" marL="0">
+              <a:buNone/>
+            </a:pPr>
+            <a:r>
+              <a:rPr lang="en-US" sz="1600" b="1" dirty="0">
+                <a:solidFill>
+                  <a:srgbClr val="0D9488"/>
+                </a:solidFill>
+                <a:latin typeface="Trebuchet MS" pitchFamily="34" charset="0"/>
+                <a:ea typeface="Trebuchet MS" pitchFamily="34" charset="-122"/>
+                <a:cs typeface="Trebuchet MS" pitchFamily="34" charset="-120"/>
+              </a:rPr>
+              <a:t>·</a:t>
+            </a:r>
+            <a:endParaRPr lang="en-US" sz="1600" dirty="0"/>
+          </a:p>
+        </p:txBody>
+      </p:sp>
+      <p:sp>
+        <p:nvSpPr>
+          <p:cNvPr id="37" name="Shape 35"/>
+          <p:cNvSpPr/>
+          <p:nvPr/>
+        </p:nvSpPr>
+        <p:spPr>
+          <a:xfrm>
+            <a:off x="6858000" y="3364992"/>
+            <a:ext cx="1554480" cy="475488"/>
+          </a:xfrm>
+          <a:prstGeom prst="rect">
+            <a:avLst>
+              <a:gd name="adj" fmla="val 9615"/>
+            </a:avLst>
+          </a:prstGeom>
+          <a:solidFill>
+            <a:srgbClr val="FFFFFF"/>
+          </a:solidFill>
+          <a:ln w="12700">
+            <a:solidFill>
+              <a:srgbClr val="0D9488"/>
+            </a:solidFill>
+            <a:prstDash val="solid"/>
+          </a:ln>
+        </p:spPr>
+      </p:sp>
+      <p:sp>
+        <p:nvSpPr>
+          <p:cNvPr id="38" name="Text 36"/>
+          <p:cNvSpPr/>
+          <p:nvPr/>
+        </p:nvSpPr>
+        <p:spPr>
+          <a:xfrm>
+            <a:off x="6858000" y="3364992"/>
+            <a:ext cx="1554480" cy="475488"/>
+          </a:xfrm>
+          <a:prstGeom prst="rect">
+            <a:avLst/>
+          </a:prstGeom>
+          <a:noFill/>
+          <a:ln/>
+        </p:spPr>
+        <p:txBody>
+          <a:bodyPr wrap="square" lIns="0" tIns="0" rIns="0" bIns="0" rtlCol="0" anchor="ctr"/>
+          <a:lstStyle/>
+          <a:p>
+            <a:pPr algn="ctr" indent="0" marL="0">
+              <a:buNone/>
+            </a:pPr>
+            <a:r>
+              <a:rPr lang="en-US" sz="1400" b="1" dirty="0">
+                <a:solidFill>
+                  <a:srgbClr val="0D9488"/>
+                </a:solidFill>
+                <a:latin typeface="Trebuchet MS" pitchFamily="34" charset="0"/>
+                <a:ea typeface="Trebuchet MS" pitchFamily="34" charset="-122"/>
+                <a:cs typeface="Trebuchet MS" pitchFamily="34" charset="-120"/>
+              </a:rPr>
+              <a:t>ble</a:t>
+            </a:r>
+            <a:endParaRPr lang="en-US" sz="1400" dirty="0"/>
+          </a:p>
+        </p:txBody>
+      </p:sp>
+      <p:sp>
+        <p:nvSpPr>
+          <p:cNvPr id="39" name="Shape 37"/>
           <p:cNvSpPr/>
           <p:nvPr/>
         </p:nvSpPr>
@@ -9585,7 +9690,7 @@
       </p:sp>
       <p:sp>
         <p:nvSpPr>
-          <p:cNvPr id="37" name="Text 35"/>
+          <p:cNvPr id="40" name="Text 38"/>
           <p:cNvSpPr/>
           <p:nvPr/>
         </p:nvSpPr>
@@ -9624,7 +9729,7 @@
       </p:sp>
       <p:sp>
         <p:nvSpPr>
-          <p:cNvPr id="38" name="Shape 36"/>
+          <p:cNvPr id="41" name="Shape 39"/>
           <p:cNvSpPr/>
           <p:nvPr/>
         </p:nvSpPr>
@@ -9651,7 +9756,7 @@
       </p:sp>
       <p:sp>
         <p:nvSpPr>
-          <p:cNvPr id="39" name="Text 37"/>
+          <p:cNvPr id="42" name="Text 40"/>
           <p:cNvSpPr/>
           <p:nvPr/>
         </p:nvSpPr>
@@ -10113,7 +10218,7 @@
                 <a:ea typeface="Trebuchet MS" pitchFamily="34" charset="-122"/>
                 <a:cs typeface="Trebuchet MS" pitchFamily="34" charset="-120"/>
               </a:rPr>
-              <a:t>returning</a:t>
+              <a:t>returnable</a:t>
             </a:r>
             <a:endParaRPr lang="en-US" sz="2800" dirty="0"/>
           </a:p>
@@ -10403,7 +10508,7 @@
                 <a:ea typeface="Calibri" pitchFamily="34" charset="-122"/>
                 <a:cs typeface="Calibri" pitchFamily="34" charset="-120"/>
               </a:rPr>
-              <a:t>to turn, go around</a:t>
+              <a:t>turn, go back</a:t>
             </a:r>
             <a:endParaRPr lang="en-US" sz="850" dirty="0"/>
           </a:p>
@@ -10476,7 +10581,7 @@
                 <a:ea typeface="Trebuchet MS" pitchFamily="34" charset="-122"/>
                 <a:cs typeface="Trebuchet MS" pitchFamily="34" charset="-120"/>
               </a:rPr>
-              <a:t>ing</a:t>
+              <a:t>able</a:t>
             </a:r>
             <a:endParaRPr lang="en-US" sz="1300" dirty="0"/>
           </a:p>
@@ -10515,7 +10620,7 @@
                 <a:ea typeface="Calibri" pitchFamily="34" charset="-122"/>
                 <a:cs typeface="Calibri" pitchFamily="34" charset="-120"/>
               </a:rPr>
-              <a:t>in the process of</a:t>
+              <a:t>able to be</a:t>
             </a:r>
             <a:endParaRPr lang="en-US" sz="850" dirty="0"/>
           </a:p>
@@ -10622,8 +10727,8 @@
         </p:nvSpPr>
         <p:spPr>
           <a:xfrm>
-            <a:off x="2313432" y="3364992"/>
-            <a:ext cx="1645920" cy="475488"/>
+            <a:off x="1975104" y="3364992"/>
+            <a:ext cx="1554480" cy="475488"/>
           </a:xfrm>
           <a:prstGeom prst="rect">
             <a:avLst>
@@ -10649,8 +10754,8 @@
         </p:nvSpPr>
         <p:spPr>
           <a:xfrm>
-            <a:off x="2313432" y="3364992"/>
-            <a:ext cx="1645920" cy="475488"/>
+            <a:off x="1975104" y="3364992"/>
+            <a:ext cx="1554480" cy="475488"/>
           </a:xfrm>
           <a:prstGeom prst="rect">
             <a:avLst/>
@@ -10688,8 +10793,8 @@
         </p:nvSpPr>
         <p:spPr>
           <a:xfrm>
-            <a:off x="3959352" y="3364992"/>
-            <a:ext cx="411480" cy="475488"/>
+            <a:off x="3529584" y="3364992"/>
+            <a:ext cx="73152" cy="475488"/>
           </a:xfrm>
           <a:prstGeom prst="rect">
             <a:avLst/>
@@ -10727,8 +10832,8 @@
         </p:nvSpPr>
         <p:spPr>
           <a:xfrm>
-            <a:off x="4370832" y="3364992"/>
-            <a:ext cx="1645920" cy="475488"/>
+            <a:off x="3602736" y="3364992"/>
+            <a:ext cx="1554480" cy="475488"/>
           </a:xfrm>
           <a:prstGeom prst="rect">
             <a:avLst>
@@ -10754,8 +10859,8 @@
         </p:nvSpPr>
         <p:spPr>
           <a:xfrm>
-            <a:off x="4370832" y="3364992"/>
-            <a:ext cx="1645920" cy="475488"/>
+            <a:off x="3602736" y="3364992"/>
+            <a:ext cx="1554480" cy="475488"/>
           </a:xfrm>
           <a:prstGeom prst="rect">
             <a:avLst/>
@@ -10793,8 +10898,8 @@
         </p:nvSpPr>
         <p:spPr>
           <a:xfrm>
-            <a:off x="6016752" y="3364992"/>
-            <a:ext cx="411480" cy="475488"/>
+            <a:off x="5157216" y="3364992"/>
+            <a:ext cx="73152" cy="475488"/>
           </a:xfrm>
           <a:prstGeom prst="rect">
             <a:avLst/>
@@ -10832,8 +10937,8 @@
         </p:nvSpPr>
         <p:spPr>
           <a:xfrm>
-            <a:off x="6428232" y="3364992"/>
-            <a:ext cx="1645920" cy="475488"/>
+            <a:off x="5230368" y="3364992"/>
+            <a:ext cx="1554480" cy="475488"/>
           </a:xfrm>
           <a:prstGeom prst="rect">
             <a:avLst>
@@ -10859,8 +10964,8 @@
         </p:nvSpPr>
         <p:spPr>
           <a:xfrm>
-            <a:off x="6428232" y="3364992"/>
-            <a:ext cx="1645920" cy="475488"/>
+            <a:off x="5230368" y="3364992"/>
+            <a:ext cx="1554480" cy="475488"/>
           </a:xfrm>
           <a:prstGeom prst="rect">
             <a:avLst/>
@@ -10884,7 +10989,7 @@
                 <a:ea typeface="Trebuchet MS" pitchFamily="34" charset="-122"/>
                 <a:cs typeface="Trebuchet MS" pitchFamily="34" charset="-120"/>
               </a:rPr>
-              <a:t>ing</a:t>
+              <a:t>a</a:t>
             </a:r>
             <a:endParaRPr lang="en-US" sz="1400" dirty="0"/>
           </a:p>
@@ -10892,7 +10997,112 @@
       </p:sp>
       <p:sp>
         <p:nvSpPr>
-          <p:cNvPr id="36" name="Shape 34"/>
+          <p:cNvPr id="36" name="Text 34"/>
+          <p:cNvSpPr/>
+          <p:nvPr/>
+        </p:nvSpPr>
+        <p:spPr>
+          <a:xfrm>
+            <a:off x="6784848" y="3364992"/>
+            <a:ext cx="73152" cy="475488"/>
+          </a:xfrm>
+          <a:prstGeom prst="rect">
+            <a:avLst/>
+          </a:prstGeom>
+          <a:noFill/>
+          <a:ln/>
+        </p:spPr>
+        <p:txBody>
+          <a:bodyPr wrap="square" lIns="0" tIns="0" rIns="0" bIns="0" rtlCol="0" anchor="ctr"/>
+          <a:lstStyle/>
+          <a:p>
+            <a:pPr algn="ctr" indent="0" marL="0">
+              <a:buNone/>
+            </a:pPr>
+            <a:r>
+              <a:rPr lang="en-US" sz="1600" b="1" dirty="0">
+                <a:solidFill>
+                  <a:srgbClr val="0D9488"/>
+                </a:solidFill>
+                <a:latin typeface="Trebuchet MS" pitchFamily="34" charset="0"/>
+                <a:ea typeface="Trebuchet MS" pitchFamily="34" charset="-122"/>
+                <a:cs typeface="Trebuchet MS" pitchFamily="34" charset="-120"/>
+              </a:rPr>
+              <a:t>·</a:t>
+            </a:r>
+            <a:endParaRPr lang="en-US" sz="1600" dirty="0"/>
+          </a:p>
+        </p:txBody>
+      </p:sp>
+      <p:sp>
+        <p:nvSpPr>
+          <p:cNvPr id="37" name="Shape 35"/>
+          <p:cNvSpPr/>
+          <p:nvPr/>
+        </p:nvSpPr>
+        <p:spPr>
+          <a:xfrm>
+            <a:off x="6858000" y="3364992"/>
+            <a:ext cx="1554480" cy="475488"/>
+          </a:xfrm>
+          <a:prstGeom prst="rect">
+            <a:avLst>
+              <a:gd name="adj" fmla="val 9615"/>
+            </a:avLst>
+          </a:prstGeom>
+          <a:solidFill>
+            <a:srgbClr val="FFFFFF"/>
+          </a:solidFill>
+          <a:ln w="12700">
+            <a:solidFill>
+              <a:srgbClr val="0D9488"/>
+            </a:solidFill>
+            <a:prstDash val="solid"/>
+          </a:ln>
+        </p:spPr>
+      </p:sp>
+      <p:sp>
+        <p:nvSpPr>
+          <p:cNvPr id="38" name="Text 36"/>
+          <p:cNvSpPr/>
+          <p:nvPr/>
+        </p:nvSpPr>
+        <p:spPr>
+          <a:xfrm>
+            <a:off x="6858000" y="3364992"/>
+            <a:ext cx="1554480" cy="475488"/>
+          </a:xfrm>
+          <a:prstGeom prst="rect">
+            <a:avLst/>
+          </a:prstGeom>
+          <a:noFill/>
+          <a:ln/>
+        </p:spPr>
+        <p:txBody>
+          <a:bodyPr wrap="square" lIns="0" tIns="0" rIns="0" bIns="0" rtlCol="0" anchor="ctr"/>
+          <a:lstStyle/>
+          <a:p>
+            <a:pPr algn="ctr" indent="0" marL="0">
+              <a:buNone/>
+            </a:pPr>
+            <a:r>
+              <a:rPr lang="en-US" sz="1400" b="1" dirty="0">
+                <a:solidFill>
+                  <a:srgbClr val="0D9488"/>
+                </a:solidFill>
+                <a:latin typeface="Trebuchet MS" pitchFamily="34" charset="0"/>
+                <a:ea typeface="Trebuchet MS" pitchFamily="34" charset="-122"/>
+                <a:cs typeface="Trebuchet MS" pitchFamily="34" charset="-120"/>
+              </a:rPr>
+              <a:t>ble</a:t>
+            </a:r>
+            <a:endParaRPr lang="en-US" sz="1400" dirty="0"/>
+          </a:p>
+        </p:txBody>
+      </p:sp>
+      <p:sp>
+        <p:nvSpPr>
+          <p:cNvPr id="39" name="Shape 37"/>
           <p:cNvSpPr/>
           <p:nvPr/>
         </p:nvSpPr>
@@ -10919,7 +11129,7 @@
       </p:sp>
       <p:sp>
         <p:nvSpPr>
-          <p:cNvPr id="37" name="Text 35"/>
+          <p:cNvPr id="40" name="Text 38"/>
           <p:cNvSpPr/>
           <p:nvPr/>
         </p:nvSpPr>
@@ -10958,7 +11168,7 @@
       </p:sp>
       <p:sp>
         <p:nvSpPr>
-          <p:cNvPr id="38" name="Shape 36"/>
+          <p:cNvPr id="41" name="Shape 39"/>
           <p:cNvSpPr/>
           <p:nvPr/>
         </p:nvSpPr>
@@ -10985,13 +11195,13 @@
       </p:sp>
       <p:sp>
         <p:nvSpPr>
-          <p:cNvPr id="39" name="Shape 37"/>
-          <p:cNvSpPr/>
-          <p:nvPr/>
-        </p:nvSpPr>
-        <p:spPr>
-          <a:xfrm>
-            <a:off x="2124837" y="4169664"/>
+          <p:cNvPr id="42" name="Shape 40"/>
+          <p:cNvSpPr/>
+          <p:nvPr/>
+        </p:nvSpPr>
+        <p:spPr>
+          <a:xfrm>
+            <a:off x="2023872" y="4169664"/>
             <a:ext cx="685800" cy="475488"/>
           </a:xfrm>
           <a:prstGeom prst="rect">
@@ -11012,13 +11222,13 @@
       </p:sp>
       <p:sp>
         <p:nvSpPr>
-          <p:cNvPr id="40" name="Text 38"/>
-          <p:cNvSpPr/>
-          <p:nvPr/>
-        </p:nvSpPr>
-        <p:spPr>
-          <a:xfrm>
-            <a:off x="2124837" y="4169664"/>
+          <p:cNvPr id="43" name="Text 41"/>
+          <p:cNvSpPr/>
+          <p:nvPr/>
+        </p:nvSpPr>
+        <p:spPr>
+          <a:xfrm>
+            <a:off x="2023872" y="4169664"/>
             <a:ext cx="685800" cy="475488"/>
           </a:xfrm>
           <a:prstGeom prst="rect">
@@ -11051,13 +11261,13 @@
       </p:sp>
       <p:sp>
         <p:nvSpPr>
-          <p:cNvPr id="41" name="Shape 39"/>
-          <p:cNvSpPr/>
-          <p:nvPr/>
-        </p:nvSpPr>
-        <p:spPr>
-          <a:xfrm>
-            <a:off x="3033522" y="4169664"/>
+          <p:cNvPr id="44" name="Shape 42"/>
+          <p:cNvSpPr/>
+          <p:nvPr/>
+        </p:nvSpPr>
+        <p:spPr>
+          <a:xfrm>
+            <a:off x="2831592" y="4169664"/>
             <a:ext cx="685800" cy="475488"/>
           </a:xfrm>
           <a:prstGeom prst="rect">
@@ -11078,13 +11288,13 @@
       </p:sp>
       <p:sp>
         <p:nvSpPr>
-          <p:cNvPr id="42" name="Text 40"/>
-          <p:cNvSpPr/>
-          <p:nvPr/>
-        </p:nvSpPr>
-        <p:spPr>
-          <a:xfrm>
-            <a:off x="3033522" y="4169664"/>
+          <p:cNvPr id="45" name="Text 43"/>
+          <p:cNvSpPr/>
+          <p:nvPr/>
+        </p:nvSpPr>
+        <p:spPr>
+          <a:xfrm>
+            <a:off x="2831592" y="4169664"/>
             <a:ext cx="685800" cy="475488"/>
           </a:xfrm>
           <a:prstGeom prst="rect">
@@ -11117,13 +11327,13 @@
       </p:sp>
       <p:sp>
         <p:nvSpPr>
-          <p:cNvPr id="43" name="Shape 41"/>
-          <p:cNvSpPr/>
-          <p:nvPr/>
-        </p:nvSpPr>
-        <p:spPr>
-          <a:xfrm>
-            <a:off x="3942207" y="4169664"/>
+          <p:cNvPr id="46" name="Shape 44"/>
+          <p:cNvSpPr/>
+          <p:nvPr/>
+        </p:nvSpPr>
+        <p:spPr>
+          <a:xfrm>
+            <a:off x="3639312" y="4169664"/>
             <a:ext cx="685800" cy="475488"/>
           </a:xfrm>
           <a:prstGeom prst="rect">
@@ -11144,13 +11354,13 @@
       </p:sp>
       <p:sp>
         <p:nvSpPr>
-          <p:cNvPr id="44" name="Text 42"/>
-          <p:cNvSpPr/>
-          <p:nvPr/>
-        </p:nvSpPr>
-        <p:spPr>
-          <a:xfrm>
-            <a:off x="3942207" y="4169664"/>
+          <p:cNvPr id="47" name="Text 45"/>
+          <p:cNvSpPr/>
+          <p:nvPr/>
+        </p:nvSpPr>
+        <p:spPr>
+          <a:xfrm>
+            <a:off x="3639312" y="4169664"/>
             <a:ext cx="685800" cy="475488"/>
           </a:xfrm>
           <a:prstGeom prst="rect">
@@ -11183,13 +11393,13 @@
       </p:sp>
       <p:sp>
         <p:nvSpPr>
-          <p:cNvPr id="45" name="Shape 43"/>
-          <p:cNvSpPr/>
-          <p:nvPr/>
-        </p:nvSpPr>
-        <p:spPr>
-          <a:xfrm>
-            <a:off x="4850892" y="4169664"/>
+          <p:cNvPr id="48" name="Shape 46"/>
+          <p:cNvSpPr/>
+          <p:nvPr/>
+        </p:nvSpPr>
+        <p:spPr>
+          <a:xfrm>
+            <a:off x="4447032" y="4169664"/>
             <a:ext cx="685800" cy="475488"/>
           </a:xfrm>
           <a:prstGeom prst="rect">
@@ -11210,13 +11420,13 @@
       </p:sp>
       <p:sp>
         <p:nvSpPr>
-          <p:cNvPr id="46" name="Text 44"/>
-          <p:cNvSpPr/>
-          <p:nvPr/>
-        </p:nvSpPr>
-        <p:spPr>
-          <a:xfrm>
-            <a:off x="4850892" y="4169664"/>
+          <p:cNvPr id="49" name="Text 47"/>
+          <p:cNvSpPr/>
+          <p:nvPr/>
+        </p:nvSpPr>
+        <p:spPr>
+          <a:xfrm>
+            <a:off x="4447032" y="4169664"/>
             <a:ext cx="685800" cy="475488"/>
           </a:xfrm>
           <a:prstGeom prst="rect">
@@ -11249,13 +11459,13 @@
       </p:sp>
       <p:sp>
         <p:nvSpPr>
-          <p:cNvPr id="47" name="Shape 45"/>
-          <p:cNvSpPr/>
-          <p:nvPr/>
-        </p:nvSpPr>
-        <p:spPr>
-          <a:xfrm>
-            <a:off x="5759577" y="4169664"/>
+          <p:cNvPr id="50" name="Shape 48"/>
+          <p:cNvSpPr/>
+          <p:nvPr/>
+        </p:nvSpPr>
+        <p:spPr>
+          <a:xfrm>
+            <a:off x="5254752" y="4169664"/>
             <a:ext cx="685800" cy="475488"/>
           </a:xfrm>
           <a:prstGeom prst="rect">
@@ -11276,13 +11486,13 @@
       </p:sp>
       <p:sp>
         <p:nvSpPr>
-          <p:cNvPr id="48" name="Text 46"/>
-          <p:cNvSpPr/>
-          <p:nvPr/>
-        </p:nvSpPr>
-        <p:spPr>
-          <a:xfrm>
-            <a:off x="5759577" y="4169664"/>
+          <p:cNvPr id="51" name="Text 49"/>
+          <p:cNvSpPr/>
+          <p:nvPr/>
+        </p:nvSpPr>
+        <p:spPr>
+          <a:xfrm>
+            <a:off x="5254752" y="4169664"/>
             <a:ext cx="685800" cy="475488"/>
           </a:xfrm>
           <a:prstGeom prst="rect">
@@ -11315,13 +11525,13 @@
       </p:sp>
       <p:sp>
         <p:nvSpPr>
-          <p:cNvPr id="49" name="Shape 47"/>
-          <p:cNvSpPr/>
-          <p:nvPr/>
-        </p:nvSpPr>
-        <p:spPr>
-          <a:xfrm>
-            <a:off x="6668262" y="4169664"/>
+          <p:cNvPr id="52" name="Shape 50"/>
+          <p:cNvSpPr/>
+          <p:nvPr/>
+        </p:nvSpPr>
+        <p:spPr>
+          <a:xfrm>
+            <a:off x="6062472" y="4169664"/>
             <a:ext cx="685800" cy="475488"/>
           </a:xfrm>
           <a:prstGeom prst="rect">
@@ -11342,13 +11552,13 @@
       </p:sp>
       <p:sp>
         <p:nvSpPr>
-          <p:cNvPr id="50" name="Text 48"/>
-          <p:cNvSpPr/>
-          <p:nvPr/>
-        </p:nvSpPr>
-        <p:spPr>
-          <a:xfrm>
-            <a:off x="6668262" y="4169664"/>
+          <p:cNvPr id="53" name="Text 51"/>
+          <p:cNvSpPr/>
+          <p:nvPr/>
+        </p:nvSpPr>
+        <p:spPr>
+          <a:xfrm>
+            <a:off x="6062472" y="4169664"/>
             <a:ext cx="685800" cy="475488"/>
           </a:xfrm>
           <a:prstGeom prst="rect">
@@ -11373,7 +11583,7 @@
                 <a:ea typeface="Trebuchet MS" pitchFamily="34" charset="-122"/>
                 <a:cs typeface="Trebuchet MS" pitchFamily="34" charset="-120"/>
               </a:rPr>
-              <a:t>i</a:t>
+              <a:t>a</a:t>
             </a:r>
             <a:endParaRPr lang="en-US" sz="900" dirty="0"/>
           </a:p>
@@ -11381,13 +11591,13 @@
       </p:sp>
       <p:sp>
         <p:nvSpPr>
-          <p:cNvPr id="51" name="Shape 49"/>
-          <p:cNvSpPr/>
-          <p:nvPr/>
-        </p:nvSpPr>
-        <p:spPr>
-          <a:xfrm>
-            <a:off x="7576947" y="4169664"/>
+          <p:cNvPr id="54" name="Shape 52"/>
+          <p:cNvSpPr/>
+          <p:nvPr/>
+        </p:nvSpPr>
+        <p:spPr>
+          <a:xfrm>
+            <a:off x="6870192" y="4169664"/>
             <a:ext cx="685800" cy="475488"/>
           </a:xfrm>
           <a:prstGeom prst="rect">
@@ -11408,13 +11618,13 @@
       </p:sp>
       <p:sp>
         <p:nvSpPr>
-          <p:cNvPr id="52" name="Text 50"/>
-          <p:cNvSpPr/>
-          <p:nvPr/>
-        </p:nvSpPr>
-        <p:spPr>
-          <a:xfrm>
-            <a:off x="7576947" y="4169664"/>
+          <p:cNvPr id="55" name="Text 53"/>
+          <p:cNvSpPr/>
+          <p:nvPr/>
+        </p:nvSpPr>
+        <p:spPr>
+          <a:xfrm>
+            <a:off x="6870192" y="4169664"/>
             <a:ext cx="685800" cy="475488"/>
           </a:xfrm>
           <a:prstGeom prst="rect">
@@ -11439,7 +11649,73 @@
                 <a:ea typeface="Trebuchet MS" pitchFamily="34" charset="-122"/>
                 <a:cs typeface="Trebuchet MS" pitchFamily="34" charset="-120"/>
               </a:rPr>
-              <a:t>ng</a:t>
+              <a:t>b</a:t>
+            </a:r>
+            <a:endParaRPr lang="en-US" sz="900" dirty="0"/>
+          </a:p>
+        </p:txBody>
+      </p:sp>
+      <p:sp>
+        <p:nvSpPr>
+          <p:cNvPr id="56" name="Shape 54"/>
+          <p:cNvSpPr/>
+          <p:nvPr/>
+        </p:nvSpPr>
+        <p:spPr>
+          <a:xfrm>
+            <a:off x="7677912" y="4169664"/>
+            <a:ext cx="685800" cy="475488"/>
+          </a:xfrm>
+          <a:prstGeom prst="rect">
+            <a:avLst>
+              <a:gd name="adj" fmla="val 7692"/>
+            </a:avLst>
+          </a:prstGeom>
+          <a:solidFill>
+            <a:srgbClr val="FFFFFF"/>
+          </a:solidFill>
+          <a:ln w="12700">
+            <a:solidFill>
+              <a:srgbClr val="DB2777"/>
+            </a:solidFill>
+            <a:prstDash val="solid"/>
+          </a:ln>
+        </p:spPr>
+      </p:sp>
+      <p:sp>
+        <p:nvSpPr>
+          <p:cNvPr id="57" name="Text 55"/>
+          <p:cNvSpPr/>
+          <p:nvPr/>
+        </p:nvSpPr>
+        <p:spPr>
+          <a:xfrm>
+            <a:off x="7677912" y="4169664"/>
+            <a:ext cx="685800" cy="475488"/>
+          </a:xfrm>
+          <a:prstGeom prst="rect">
+            <a:avLst/>
+          </a:prstGeom>
+          <a:noFill/>
+          <a:ln/>
+        </p:spPr>
+        <p:txBody>
+          <a:bodyPr wrap="square" lIns="0" tIns="0" rIns="0" bIns="0" rtlCol="0" anchor="ctr"/>
+          <a:lstStyle/>
+          <a:p>
+            <a:pPr algn="ctr" indent="0" marL="0">
+              <a:buNone/>
+            </a:pPr>
+            <a:r>
+              <a:rPr lang="en-US" sz="900" b="1" dirty="0">
+                <a:solidFill>
+                  <a:srgbClr val="9D174D"/>
+                </a:solidFill>
+                <a:latin typeface="Trebuchet MS" pitchFamily="34" charset="0"/>
+                <a:ea typeface="Trebuchet MS" pitchFamily="34" charset="-122"/>
+                <a:cs typeface="Trebuchet MS" pitchFamily="34" charset="-120"/>
+              </a:rPr>
+              <a:t>le</a:t>
             </a:r>
             <a:endParaRPr lang="en-US" sz="900" dirty="0"/>
           </a:p>
@@ -11870,7 +12146,7 @@
                 <a:ea typeface="Trebuchet MS" pitchFamily="34" charset="-122"/>
                 <a:cs typeface="Trebuchet MS" pitchFamily="34" charset="-120"/>
               </a:rPr>
-              <a:t>returnable</a:t>
+              <a:t>returning</a:t>
             </a:r>
             <a:endParaRPr lang="en-US" sz="2800" dirty="0"/>
           </a:p>
@@ -12697,7 +12973,7 @@
                 <a:ea typeface="Trebuchet MS" pitchFamily="34" charset="-122"/>
                 <a:cs typeface="Trebuchet MS" pitchFamily="34" charset="-120"/>
               </a:rPr>
-              <a:t>returnable</a:t>
+              <a:t>returning</a:t>
             </a:r>
             <a:endParaRPr lang="en-US" sz="2800" dirty="0"/>
           </a:p>
@@ -12987,7 +13263,7 @@
                 <a:ea typeface="Calibri" pitchFamily="34" charset="-122"/>
                 <a:cs typeface="Calibri" pitchFamily="34" charset="-120"/>
               </a:rPr>
-              <a:t>to turn, go around</a:t>
+              <a:t>turn, go back</a:t>
             </a:r>
             <a:endParaRPr lang="en-US" sz="850" dirty="0"/>
           </a:p>
@@ -13060,7 +13336,7 @@
                 <a:ea typeface="Trebuchet MS" pitchFamily="34" charset="-122"/>
                 <a:cs typeface="Trebuchet MS" pitchFamily="34" charset="-120"/>
               </a:rPr>
-              <a:t>able</a:t>
+              <a:t>ing</a:t>
             </a:r>
             <a:endParaRPr lang="en-US" sz="1300" dirty="0"/>
           </a:p>
@@ -13099,7 +13375,7 @@
                 <a:ea typeface="Calibri" pitchFamily="34" charset="-122"/>
                 <a:cs typeface="Calibri" pitchFamily="34" charset="-120"/>
               </a:rPr>
-              <a:t>able to be</a:t>
+              <a:t>ongoing action</a:t>
             </a:r>
             <a:endParaRPr lang="en-US" sz="850" dirty="0"/>
           </a:p>
@@ -13794,7 +14070,7 @@
                 <a:ea typeface="Trebuchet MS" pitchFamily="34" charset="-122"/>
                 <a:cs typeface="Trebuchet MS" pitchFamily="34" charset="-120"/>
               </a:rPr>
-              <a:t>returnable</a:t>
+              <a:t>returning</a:t>
             </a:r>
             <a:endParaRPr lang="en-US" sz="2800" dirty="0"/>
           </a:p>
@@ -14084,7 +14360,7 @@
                 <a:ea typeface="Calibri" pitchFamily="34" charset="-122"/>
                 <a:cs typeface="Calibri" pitchFamily="34" charset="-120"/>
               </a:rPr>
-              <a:t>to turn, go around</a:t>
+              <a:t>turn, go back</a:t>
             </a:r>
             <a:endParaRPr lang="en-US" sz="850" dirty="0"/>
           </a:p>
@@ -14157,7 +14433,7 @@
                 <a:ea typeface="Trebuchet MS" pitchFamily="34" charset="-122"/>
                 <a:cs typeface="Trebuchet MS" pitchFamily="34" charset="-120"/>
               </a:rPr>
-              <a:t>able</a:t>
+              <a:t>ing</a:t>
             </a:r>
             <a:endParaRPr lang="en-US" sz="1300" dirty="0"/>
           </a:p>
@@ -14196,7 +14472,7 @@
                 <a:ea typeface="Calibri" pitchFamily="34" charset="-122"/>
                 <a:cs typeface="Calibri" pitchFamily="34" charset="-120"/>
               </a:rPr>
-              <a:t>able to be</a:t>
+              <a:t>ongoing action</a:t>
             </a:r>
             <a:endParaRPr lang="en-US" sz="850" dirty="0"/>
           </a:p>
@@ -14303,8 +14579,8 @@
         </p:nvSpPr>
         <p:spPr>
           <a:xfrm>
-            <a:off x="1975104" y="3364992"/>
-            <a:ext cx="1554480" cy="475488"/>
+            <a:off x="2313432" y="3364992"/>
+            <a:ext cx="1645920" cy="475488"/>
           </a:xfrm>
           <a:prstGeom prst="rect">
             <a:avLst>
@@ -14330,8 +14606,8 @@
         </p:nvSpPr>
         <p:spPr>
           <a:xfrm>
-            <a:off x="1975104" y="3364992"/>
-            <a:ext cx="1554480" cy="475488"/>
+            <a:off x="2313432" y="3364992"/>
+            <a:ext cx="1645920" cy="475488"/>
           </a:xfrm>
           <a:prstGeom prst="rect">
             <a:avLst/>
@@ -14369,8 +14645,8 @@
         </p:nvSpPr>
         <p:spPr>
           <a:xfrm>
-            <a:off x="3529584" y="3364992"/>
-            <a:ext cx="73152" cy="475488"/>
+            <a:off x="3959352" y="3364992"/>
+            <a:ext cx="411480" cy="475488"/>
           </a:xfrm>
           <a:prstGeom prst="rect">
             <a:avLst/>
@@ -14408,8 +14684,8 @@
         </p:nvSpPr>
         <p:spPr>
           <a:xfrm>
-            <a:off x="3602736" y="3364992"/>
-            <a:ext cx="1554480" cy="475488"/>
+            <a:off x="4370832" y="3364992"/>
+            <a:ext cx="1645920" cy="475488"/>
           </a:xfrm>
           <a:prstGeom prst="rect">
             <a:avLst>
@@ -14435,8 +14711,8 @@
         </p:nvSpPr>
         <p:spPr>
           <a:xfrm>
-            <a:off x="3602736" y="3364992"/>
-            <a:ext cx="1554480" cy="475488"/>
+            <a:off x="4370832" y="3364992"/>
+            <a:ext cx="1645920" cy="475488"/>
           </a:xfrm>
           <a:prstGeom prst="rect">
             <a:avLst/>
@@ -14474,8 +14750,8 @@
         </p:nvSpPr>
         <p:spPr>
           <a:xfrm>
-            <a:off x="5157216" y="3364992"/>
-            <a:ext cx="73152" cy="475488"/>
+            <a:off x="6016752" y="3364992"/>
+            <a:ext cx="411480" cy="475488"/>
           </a:xfrm>
           <a:prstGeom prst="rect">
             <a:avLst/>
@@ -14513,8 +14789,8 @@
         </p:nvSpPr>
         <p:spPr>
           <a:xfrm>
-            <a:off x="5230368" y="3364992"/>
-            <a:ext cx="1554480" cy="475488"/>
+            <a:off x="6428232" y="3364992"/>
+            <a:ext cx="1645920" cy="475488"/>
           </a:xfrm>
           <a:prstGeom prst="rect">
             <a:avLst>
@@ -14540,8 +14816,8 @@
         </p:nvSpPr>
         <p:spPr>
           <a:xfrm>
-            <a:off x="5230368" y="3364992"/>
-            <a:ext cx="1554480" cy="475488"/>
+            <a:off x="6428232" y="3364992"/>
+            <a:ext cx="1645920" cy="475488"/>
           </a:xfrm>
           <a:prstGeom prst="rect">
             <a:avLst/>
@@ -14565,7 +14841,7 @@
                 <a:ea typeface="Trebuchet MS" pitchFamily="34" charset="-122"/>
                 <a:cs typeface="Trebuchet MS" pitchFamily="34" charset="-120"/>
               </a:rPr>
-              <a:t>a</a:t>
+              <a:t>ing</a:t>
             </a:r>
             <a:endParaRPr lang="en-US" sz="1400" dirty="0"/>
           </a:p>
@@ -14573,119 +14849,80 @@
       </p:sp>
       <p:sp>
         <p:nvSpPr>
-          <p:cNvPr id="36" name="Text 34"/>
-          <p:cNvSpPr/>
-          <p:nvPr/>
-        </p:nvSpPr>
-        <p:spPr>
-          <a:xfrm>
-            <a:off x="6784848" y="3364992"/>
-            <a:ext cx="73152" cy="475488"/>
-          </a:xfrm>
-          <a:prstGeom prst="rect">
-            <a:avLst/>
-          </a:prstGeom>
-          <a:noFill/>
-          <a:ln/>
-        </p:spPr>
-        <p:txBody>
-          <a:bodyPr wrap="square" lIns="0" tIns="0" rIns="0" bIns="0" rtlCol="0" anchor="ctr"/>
-          <a:lstStyle/>
-          <a:p>
-            <a:pPr algn="ctr" indent="0" marL="0">
-              <a:buNone/>
-            </a:pPr>
-            <a:r>
-              <a:rPr lang="en-US" sz="1600" b="1" dirty="0">
-                <a:solidFill>
-                  <a:srgbClr val="0D9488"/>
+          <p:cNvPr id="36" name="Shape 34"/>
+          <p:cNvSpPr/>
+          <p:nvPr/>
+        </p:nvSpPr>
+        <p:spPr>
+          <a:xfrm>
+            <a:off x="365760" y="4096512"/>
+            <a:ext cx="1371600" cy="804672"/>
+          </a:xfrm>
+          <a:prstGeom prst="rect">
+            <a:avLst>
+              <a:gd name="adj" fmla="val 6818"/>
+            </a:avLst>
+          </a:prstGeom>
+          <a:solidFill>
+            <a:srgbClr val="E2E8F0"/>
+          </a:solidFill>
+          <a:ln w="12700">
+            <a:solidFill>
+              <a:srgbClr val="E2E8F0"/>
+            </a:solidFill>
+            <a:prstDash val="solid"/>
+          </a:ln>
+        </p:spPr>
+      </p:sp>
+      <p:sp>
+        <p:nvSpPr>
+          <p:cNvPr id="37" name="Text 35"/>
+          <p:cNvSpPr/>
+          <p:nvPr/>
+        </p:nvSpPr>
+        <p:spPr>
+          <a:xfrm>
+            <a:off x="365760" y="4096512"/>
+            <a:ext cx="1371600" cy="804672"/>
+          </a:xfrm>
+          <a:prstGeom prst="rect">
+            <a:avLst/>
+          </a:prstGeom>
+          <a:noFill/>
+          <a:ln/>
+        </p:spPr>
+        <p:txBody>
+          <a:bodyPr wrap="square" lIns="0" tIns="0" rIns="0" bIns="0" rtlCol="0" anchor="ctr"/>
+          <a:lstStyle/>
+          <a:p>
+            <a:pPr algn="ctr" indent="0" marL="0">
+              <a:buNone/>
+            </a:pPr>
+            <a:r>
+              <a:rPr lang="en-US" sz="1100" b="1" dirty="0">
+                <a:solidFill>
+                  <a:srgbClr val="475569"/>
                 </a:solidFill>
                 <a:latin typeface="Trebuchet MS" pitchFamily="34" charset="0"/>
                 <a:ea typeface="Trebuchet MS" pitchFamily="34" charset="-122"/>
                 <a:cs typeface="Trebuchet MS" pitchFamily="34" charset="-120"/>
               </a:rPr>
-              <a:t>·</a:t>
-            </a:r>
-            <a:endParaRPr lang="en-US" sz="1600" dirty="0"/>
-          </a:p>
-        </p:txBody>
-      </p:sp>
-      <p:sp>
-        <p:nvSpPr>
-          <p:cNvPr id="37" name="Shape 35"/>
-          <p:cNvSpPr/>
-          <p:nvPr/>
-        </p:nvSpPr>
-        <p:spPr>
-          <a:xfrm>
-            <a:off x="6858000" y="3364992"/>
-            <a:ext cx="1554480" cy="475488"/>
-          </a:xfrm>
-          <a:prstGeom prst="rect">
-            <a:avLst>
-              <a:gd name="adj" fmla="val 9615"/>
-            </a:avLst>
-          </a:prstGeom>
-          <a:solidFill>
-            <a:srgbClr val="FFFFFF"/>
-          </a:solidFill>
-          <a:ln w="12700">
-            <a:solidFill>
-              <a:srgbClr val="0D9488"/>
-            </a:solidFill>
-            <a:prstDash val="solid"/>
-          </a:ln>
-        </p:spPr>
-      </p:sp>
-      <p:sp>
-        <p:nvSpPr>
-          <p:cNvPr id="38" name="Text 36"/>
-          <p:cNvSpPr/>
-          <p:nvPr/>
-        </p:nvSpPr>
-        <p:spPr>
-          <a:xfrm>
-            <a:off x="6858000" y="3364992"/>
-            <a:ext cx="1554480" cy="475488"/>
-          </a:xfrm>
-          <a:prstGeom prst="rect">
-            <a:avLst/>
-          </a:prstGeom>
-          <a:noFill/>
-          <a:ln/>
-        </p:spPr>
-        <p:txBody>
-          <a:bodyPr wrap="square" lIns="0" tIns="0" rIns="0" bIns="0" rtlCol="0" anchor="ctr"/>
-          <a:lstStyle/>
-          <a:p>
-            <a:pPr algn="ctr" indent="0" marL="0">
-              <a:buNone/>
-            </a:pPr>
-            <a:r>
-              <a:rPr lang="en-US" sz="1400" b="1" dirty="0">
-                <a:solidFill>
-                  <a:srgbClr val="0D9488"/>
-                </a:solidFill>
-                <a:latin typeface="Trebuchet MS" pitchFamily="34" charset="0"/>
-                <a:ea typeface="Trebuchet MS" pitchFamily="34" charset="-122"/>
-                <a:cs typeface="Trebuchet MS" pitchFamily="34" charset="-120"/>
-              </a:rPr>
-              <a:t>ble</a:t>
-            </a:r>
-            <a:endParaRPr lang="en-US" sz="1400" dirty="0"/>
-          </a:p>
-        </p:txBody>
-      </p:sp>
-      <p:sp>
-        <p:nvSpPr>
-          <p:cNvPr id="39" name="Shape 37"/>
-          <p:cNvSpPr/>
-          <p:nvPr/>
-        </p:nvSpPr>
-        <p:spPr>
-          <a:xfrm>
-            <a:off x="365760" y="4096512"/>
-            <a:ext cx="1371600" cy="804672"/>
+              <a:t>Phonemes</a:t>
+            </a:r>
+            <a:endParaRPr lang="en-US" sz="1100" dirty="0"/>
+          </a:p>
+        </p:txBody>
+      </p:sp>
+      <p:sp>
+        <p:nvSpPr>
+          <p:cNvPr id="38" name="Shape 36"/>
+          <p:cNvSpPr/>
+          <p:nvPr/>
+        </p:nvSpPr>
+        <p:spPr>
+          <a:xfrm>
+            <a:off x="1874520" y="4096512"/>
+            <a:ext cx="6903720" cy="804672"/>
           </a:xfrm>
           <a:prstGeom prst="rect">
             <a:avLst>
@@ -14693,85 +14930,19 @@
             </a:avLst>
           </a:prstGeom>
           <a:solidFill>
-            <a:srgbClr val="E2E8F0"/>
+            <a:srgbClr val="F8FAFC"/>
           </a:solidFill>
           <a:ln w="12700">
             <a:solidFill>
               <a:srgbClr val="E2E8F0"/>
             </a:solidFill>
-            <a:prstDash val="solid"/>
-          </a:ln>
-        </p:spPr>
-      </p:sp>
-      <p:sp>
-        <p:nvSpPr>
-          <p:cNvPr id="40" name="Text 38"/>
-          <p:cNvSpPr/>
-          <p:nvPr/>
-        </p:nvSpPr>
-        <p:spPr>
-          <a:xfrm>
-            <a:off x="365760" y="4096512"/>
-            <a:ext cx="1371600" cy="804672"/>
-          </a:xfrm>
-          <a:prstGeom prst="rect">
-            <a:avLst/>
-          </a:prstGeom>
-          <a:noFill/>
-          <a:ln/>
-        </p:spPr>
-        <p:txBody>
-          <a:bodyPr wrap="square" lIns="0" tIns="0" rIns="0" bIns="0" rtlCol="0" anchor="ctr"/>
-          <a:lstStyle/>
-          <a:p>
-            <a:pPr algn="ctr" indent="0" marL="0">
-              <a:buNone/>
-            </a:pPr>
-            <a:r>
-              <a:rPr lang="en-US" sz="1100" b="1" dirty="0">
-                <a:solidFill>
-                  <a:srgbClr val="475569"/>
-                </a:solidFill>
-                <a:latin typeface="Trebuchet MS" pitchFamily="34" charset="0"/>
-                <a:ea typeface="Trebuchet MS" pitchFamily="34" charset="-122"/>
-                <a:cs typeface="Trebuchet MS" pitchFamily="34" charset="-120"/>
-              </a:rPr>
-              <a:t>Phonemes</a:t>
-            </a:r>
-            <a:endParaRPr lang="en-US" sz="1100" dirty="0"/>
-          </a:p>
-        </p:txBody>
-      </p:sp>
-      <p:sp>
-        <p:nvSpPr>
-          <p:cNvPr id="41" name="Shape 39"/>
-          <p:cNvSpPr/>
-          <p:nvPr/>
-        </p:nvSpPr>
-        <p:spPr>
-          <a:xfrm>
-            <a:off x="1874520" y="4096512"/>
-            <a:ext cx="6903720" cy="804672"/>
-          </a:xfrm>
-          <a:prstGeom prst="rect">
-            <a:avLst>
-              <a:gd name="adj" fmla="val 6818"/>
-            </a:avLst>
-          </a:prstGeom>
-          <a:solidFill>
-            <a:srgbClr val="F8FAFC"/>
-          </a:solidFill>
-          <a:ln w="12700">
-            <a:solidFill>
-              <a:srgbClr val="E2E8F0"/>
-            </a:solidFill>
             <a:prstDash val="dash"/>
           </a:ln>
         </p:spPr>
       </p:sp>
       <p:sp>
         <p:nvSpPr>
-          <p:cNvPr id="42" name="Text 40"/>
+          <p:cNvPr id="39" name="Text 37"/>
           <p:cNvSpPr/>
           <p:nvPr/>
         </p:nvSpPr>
@@ -15498,7 +15669,7 @@
                 <a:ea typeface="Trebuchet MS" pitchFamily="34" charset="-122"/>
                 <a:cs typeface="Trebuchet MS" pitchFamily="34" charset="-120"/>
               </a:rPr>
-              <a:t>returnable</a:t>
+              <a:t>returning</a:t>
             </a:r>
             <a:endParaRPr lang="en-US" sz="2800" dirty="0"/>
           </a:p>
@@ -15788,7 +15959,7 @@
                 <a:ea typeface="Calibri" pitchFamily="34" charset="-122"/>
                 <a:cs typeface="Calibri" pitchFamily="34" charset="-120"/>
               </a:rPr>
-              <a:t>to turn, go around</a:t>
+              <a:t>turn, go back</a:t>
             </a:r>
             <a:endParaRPr lang="en-US" sz="850" dirty="0"/>
           </a:p>
@@ -15861,7 +16032,7 @@
                 <a:ea typeface="Trebuchet MS" pitchFamily="34" charset="-122"/>
                 <a:cs typeface="Trebuchet MS" pitchFamily="34" charset="-120"/>
               </a:rPr>
-              <a:t>able</a:t>
+              <a:t>ing</a:t>
             </a:r>
             <a:endParaRPr lang="en-US" sz="1300" dirty="0"/>
           </a:p>
@@ -15900,7 +16071,7 @@
                 <a:ea typeface="Calibri" pitchFamily="34" charset="-122"/>
                 <a:cs typeface="Calibri" pitchFamily="34" charset="-120"/>
               </a:rPr>
-              <a:t>able to be</a:t>
+              <a:t>ongoing action</a:t>
             </a:r>
             <a:endParaRPr lang="en-US" sz="850" dirty="0"/>
           </a:p>
@@ -16007,8 +16178,8 @@
         </p:nvSpPr>
         <p:spPr>
           <a:xfrm>
-            <a:off x="1975104" y="3364992"/>
-            <a:ext cx="1554480" cy="475488"/>
+            <a:off x="2313432" y="3364992"/>
+            <a:ext cx="1645920" cy="475488"/>
           </a:xfrm>
           <a:prstGeom prst="rect">
             <a:avLst>
@@ -16034,8 +16205,8 @@
         </p:nvSpPr>
         <p:spPr>
           <a:xfrm>
-            <a:off x="1975104" y="3364992"/>
-            <a:ext cx="1554480" cy="475488"/>
+            <a:off x="2313432" y="3364992"/>
+            <a:ext cx="1645920" cy="475488"/>
           </a:xfrm>
           <a:prstGeom prst="rect">
             <a:avLst/>
@@ -16073,8 +16244,8 @@
         </p:nvSpPr>
         <p:spPr>
           <a:xfrm>
-            <a:off x="3529584" y="3364992"/>
-            <a:ext cx="73152" cy="475488"/>
+            <a:off x="3959352" y="3364992"/>
+            <a:ext cx="411480" cy="475488"/>
           </a:xfrm>
           <a:prstGeom prst="rect">
             <a:avLst/>
@@ -16112,8 +16283,8 @@
         </p:nvSpPr>
         <p:spPr>
           <a:xfrm>
-            <a:off x="3602736" y="3364992"/>
-            <a:ext cx="1554480" cy="475488"/>
+            <a:off x="4370832" y="3364992"/>
+            <a:ext cx="1645920" cy="475488"/>
           </a:xfrm>
           <a:prstGeom prst="rect">
             <a:avLst>
@@ -16139,8 +16310,8 @@
         </p:nvSpPr>
         <p:spPr>
           <a:xfrm>
-            <a:off x="3602736" y="3364992"/>
-            <a:ext cx="1554480" cy="475488"/>
+            <a:off x="4370832" y="3364992"/>
+            <a:ext cx="1645920" cy="475488"/>
           </a:xfrm>
           <a:prstGeom prst="rect">
             <a:avLst/>
@@ -16178,8 +16349,8 @@
         </p:nvSpPr>
         <p:spPr>
           <a:xfrm>
-            <a:off x="5157216" y="3364992"/>
-            <a:ext cx="73152" cy="475488"/>
+            <a:off x="6016752" y="3364992"/>
+            <a:ext cx="411480" cy="475488"/>
           </a:xfrm>
           <a:prstGeom prst="rect">
             <a:avLst/>
@@ -16217,8 +16388,8 @@
         </p:nvSpPr>
         <p:spPr>
           <a:xfrm>
-            <a:off x="5230368" y="3364992"/>
-            <a:ext cx="1554480" cy="475488"/>
+            <a:off x="6428232" y="3364992"/>
+            <a:ext cx="1645920" cy="475488"/>
           </a:xfrm>
           <a:prstGeom prst="rect">
             <a:avLst>
@@ -16244,8 +16415,8 @@
         </p:nvSpPr>
         <p:spPr>
           <a:xfrm>
-            <a:off x="5230368" y="3364992"/>
-            <a:ext cx="1554480" cy="475488"/>
+            <a:off x="6428232" y="3364992"/>
+            <a:ext cx="1645920" cy="475488"/>
           </a:xfrm>
           <a:prstGeom prst="rect">
             <a:avLst/>
@@ -16269,7 +16440,7 @@
                 <a:ea typeface="Trebuchet MS" pitchFamily="34" charset="-122"/>
                 <a:cs typeface="Trebuchet MS" pitchFamily="34" charset="-120"/>
               </a:rPr>
-              <a:t>a</a:t>
+              <a:t>ing</a:t>
             </a:r>
             <a:endParaRPr lang="en-US" sz="1400" dirty="0"/>
           </a:p>
@@ -16277,211 +16448,238 @@
       </p:sp>
       <p:sp>
         <p:nvSpPr>
-          <p:cNvPr id="36" name="Text 34"/>
-          <p:cNvSpPr/>
-          <p:nvPr/>
-        </p:nvSpPr>
-        <p:spPr>
-          <a:xfrm>
-            <a:off x="6784848" y="3364992"/>
-            <a:ext cx="73152" cy="475488"/>
-          </a:xfrm>
-          <a:prstGeom prst="rect">
-            <a:avLst/>
-          </a:prstGeom>
-          <a:noFill/>
-          <a:ln/>
-        </p:spPr>
-        <p:txBody>
-          <a:bodyPr wrap="square" lIns="0" tIns="0" rIns="0" bIns="0" rtlCol="0" anchor="ctr"/>
-          <a:lstStyle/>
-          <a:p>
-            <a:pPr algn="ctr" indent="0" marL="0">
-              <a:buNone/>
-            </a:pPr>
-            <a:r>
-              <a:rPr lang="en-US" sz="1600" b="1" dirty="0">
-                <a:solidFill>
-                  <a:srgbClr val="0D9488"/>
+          <p:cNvPr id="36" name="Shape 34"/>
+          <p:cNvSpPr/>
+          <p:nvPr/>
+        </p:nvSpPr>
+        <p:spPr>
+          <a:xfrm>
+            <a:off x="365760" y="4096512"/>
+            <a:ext cx="1371600" cy="804672"/>
+          </a:xfrm>
+          <a:prstGeom prst="rect">
+            <a:avLst>
+              <a:gd name="adj" fmla="val 6818"/>
+            </a:avLst>
+          </a:prstGeom>
+          <a:solidFill>
+            <a:srgbClr val="E2E8F0"/>
+          </a:solidFill>
+          <a:ln w="12700">
+            <a:solidFill>
+              <a:srgbClr val="E2E8F0"/>
+            </a:solidFill>
+            <a:prstDash val="solid"/>
+          </a:ln>
+        </p:spPr>
+      </p:sp>
+      <p:sp>
+        <p:nvSpPr>
+          <p:cNvPr id="37" name="Text 35"/>
+          <p:cNvSpPr/>
+          <p:nvPr/>
+        </p:nvSpPr>
+        <p:spPr>
+          <a:xfrm>
+            <a:off x="365760" y="4096512"/>
+            <a:ext cx="1371600" cy="804672"/>
+          </a:xfrm>
+          <a:prstGeom prst="rect">
+            <a:avLst/>
+          </a:prstGeom>
+          <a:noFill/>
+          <a:ln/>
+        </p:spPr>
+        <p:txBody>
+          <a:bodyPr wrap="square" lIns="0" tIns="0" rIns="0" bIns="0" rtlCol="0" anchor="ctr"/>
+          <a:lstStyle/>
+          <a:p>
+            <a:pPr algn="ctr" indent="0" marL="0">
+              <a:buNone/>
+            </a:pPr>
+            <a:r>
+              <a:rPr lang="en-US" sz="1100" b="1" dirty="0">
+                <a:solidFill>
+                  <a:srgbClr val="475569"/>
                 </a:solidFill>
                 <a:latin typeface="Trebuchet MS" pitchFamily="34" charset="0"/>
                 <a:ea typeface="Trebuchet MS" pitchFamily="34" charset="-122"/>
                 <a:cs typeface="Trebuchet MS" pitchFamily="34" charset="-120"/>
               </a:rPr>
-              <a:t>·</a:t>
-            </a:r>
-            <a:endParaRPr lang="en-US" sz="1600" dirty="0"/>
-          </a:p>
-        </p:txBody>
-      </p:sp>
-      <p:sp>
-        <p:nvSpPr>
-          <p:cNvPr id="37" name="Shape 35"/>
-          <p:cNvSpPr/>
-          <p:nvPr/>
-        </p:nvSpPr>
-        <p:spPr>
-          <a:xfrm>
-            <a:off x="6858000" y="3364992"/>
-            <a:ext cx="1554480" cy="475488"/>
+              <a:t>Phonemes</a:t>
+            </a:r>
+            <a:endParaRPr lang="en-US" sz="1100" dirty="0"/>
+          </a:p>
+        </p:txBody>
+      </p:sp>
+      <p:sp>
+        <p:nvSpPr>
+          <p:cNvPr id="38" name="Shape 36"/>
+          <p:cNvSpPr/>
+          <p:nvPr/>
+        </p:nvSpPr>
+        <p:spPr>
+          <a:xfrm>
+            <a:off x="1874520" y="4096512"/>
+            <a:ext cx="6903720" cy="658368"/>
           </a:xfrm>
           <a:prstGeom prst="rect">
             <a:avLst>
-              <a:gd name="adj" fmla="val 9615"/>
+              <a:gd name="adj" fmla="val 8333"/>
             </a:avLst>
           </a:prstGeom>
           <a:solidFill>
+            <a:srgbClr val="FCE7F3"/>
+          </a:solidFill>
+          <a:ln w="12700">
+            <a:solidFill>
+              <a:srgbClr val="DB2777"/>
+            </a:solidFill>
+            <a:prstDash val="solid"/>
+          </a:ln>
+        </p:spPr>
+      </p:sp>
+      <p:sp>
+        <p:nvSpPr>
+          <p:cNvPr id="39" name="Shape 37"/>
+          <p:cNvSpPr/>
+          <p:nvPr/>
+        </p:nvSpPr>
+        <p:spPr>
+          <a:xfrm>
+            <a:off x="2124837" y="4169664"/>
+            <a:ext cx="685800" cy="475488"/>
+          </a:xfrm>
+          <a:prstGeom prst="rect">
+            <a:avLst>
+              <a:gd name="adj" fmla="val 7692"/>
+            </a:avLst>
+          </a:prstGeom>
+          <a:solidFill>
             <a:srgbClr val="FFFFFF"/>
           </a:solidFill>
           <a:ln w="12700">
             <a:solidFill>
-              <a:srgbClr val="0D9488"/>
-            </a:solidFill>
-            <a:prstDash val="solid"/>
-          </a:ln>
-        </p:spPr>
-      </p:sp>
-      <p:sp>
-        <p:nvSpPr>
-          <p:cNvPr id="38" name="Text 36"/>
-          <p:cNvSpPr/>
-          <p:nvPr/>
-        </p:nvSpPr>
-        <p:spPr>
-          <a:xfrm>
-            <a:off x="6858000" y="3364992"/>
-            <a:ext cx="1554480" cy="475488"/>
-          </a:xfrm>
-          <a:prstGeom prst="rect">
-            <a:avLst/>
-          </a:prstGeom>
-          <a:noFill/>
-          <a:ln/>
-        </p:spPr>
-        <p:txBody>
-          <a:bodyPr wrap="square" lIns="0" tIns="0" rIns="0" bIns="0" rtlCol="0" anchor="ctr"/>
-          <a:lstStyle/>
-          <a:p>
-            <a:pPr algn="ctr" indent="0" marL="0">
-              <a:buNone/>
-            </a:pPr>
-            <a:r>
-              <a:rPr lang="en-US" sz="1400" b="1" dirty="0">
-                <a:solidFill>
-                  <a:srgbClr val="0D9488"/>
+              <a:srgbClr val="DB2777"/>
+            </a:solidFill>
+            <a:prstDash val="solid"/>
+          </a:ln>
+        </p:spPr>
+      </p:sp>
+      <p:sp>
+        <p:nvSpPr>
+          <p:cNvPr id="40" name="Text 38"/>
+          <p:cNvSpPr/>
+          <p:nvPr/>
+        </p:nvSpPr>
+        <p:spPr>
+          <a:xfrm>
+            <a:off x="2124837" y="4169664"/>
+            <a:ext cx="685800" cy="475488"/>
+          </a:xfrm>
+          <a:prstGeom prst="rect">
+            <a:avLst/>
+          </a:prstGeom>
+          <a:noFill/>
+          <a:ln/>
+        </p:spPr>
+        <p:txBody>
+          <a:bodyPr wrap="square" lIns="0" tIns="0" rIns="0" bIns="0" rtlCol="0" anchor="ctr"/>
+          <a:lstStyle/>
+          <a:p>
+            <a:pPr algn="ctr" indent="0" marL="0">
+              <a:buNone/>
+            </a:pPr>
+            <a:r>
+              <a:rPr lang="en-US" sz="900" b="1" dirty="0">
+                <a:solidFill>
+                  <a:srgbClr val="9D174D"/>
                 </a:solidFill>
                 <a:latin typeface="Trebuchet MS" pitchFamily="34" charset="0"/>
                 <a:ea typeface="Trebuchet MS" pitchFamily="34" charset="-122"/>
                 <a:cs typeface="Trebuchet MS" pitchFamily="34" charset="-120"/>
               </a:rPr>
-              <a:t>ble</a:t>
-            </a:r>
-            <a:endParaRPr lang="en-US" sz="1400" dirty="0"/>
-          </a:p>
-        </p:txBody>
-      </p:sp>
-      <p:sp>
-        <p:nvSpPr>
-          <p:cNvPr id="39" name="Shape 37"/>
-          <p:cNvSpPr/>
-          <p:nvPr/>
-        </p:nvSpPr>
-        <p:spPr>
-          <a:xfrm>
-            <a:off x="365760" y="4096512"/>
-            <a:ext cx="1371600" cy="804672"/>
+              <a:t>r</a:t>
+            </a:r>
+            <a:endParaRPr lang="en-US" sz="900" dirty="0"/>
+          </a:p>
+        </p:txBody>
+      </p:sp>
+      <p:sp>
+        <p:nvSpPr>
+          <p:cNvPr id="41" name="Shape 39"/>
+          <p:cNvSpPr/>
+          <p:nvPr/>
+        </p:nvSpPr>
+        <p:spPr>
+          <a:xfrm>
+            <a:off x="3033522" y="4169664"/>
+            <a:ext cx="685800" cy="475488"/>
           </a:xfrm>
           <a:prstGeom prst="rect">
             <a:avLst>
-              <a:gd name="adj" fmla="val 6818"/>
+              <a:gd name="adj" fmla="val 7692"/>
             </a:avLst>
           </a:prstGeom>
           <a:solidFill>
-            <a:srgbClr val="E2E8F0"/>
-          </a:solidFill>
-          <a:ln w="12700">
-            <a:solidFill>
-              <a:srgbClr val="E2E8F0"/>
-            </a:solidFill>
-            <a:prstDash val="solid"/>
-          </a:ln>
-        </p:spPr>
-      </p:sp>
-      <p:sp>
-        <p:nvSpPr>
-          <p:cNvPr id="40" name="Text 38"/>
-          <p:cNvSpPr/>
-          <p:nvPr/>
-        </p:nvSpPr>
-        <p:spPr>
-          <a:xfrm>
-            <a:off x="365760" y="4096512"/>
-            <a:ext cx="1371600" cy="804672"/>
-          </a:xfrm>
-          <a:prstGeom prst="rect">
-            <a:avLst/>
-          </a:prstGeom>
-          <a:noFill/>
-          <a:ln/>
-        </p:spPr>
-        <p:txBody>
-          <a:bodyPr wrap="square" lIns="0" tIns="0" rIns="0" bIns="0" rtlCol="0" anchor="ctr"/>
-          <a:lstStyle/>
-          <a:p>
-            <a:pPr algn="ctr" indent="0" marL="0">
-              <a:buNone/>
-            </a:pPr>
-            <a:r>
-              <a:rPr lang="en-US" sz="1100" b="1" dirty="0">
-                <a:solidFill>
-                  <a:srgbClr val="475569"/>
+            <a:srgbClr val="FFFFFF"/>
+          </a:solidFill>
+          <a:ln w="12700">
+            <a:solidFill>
+              <a:srgbClr val="DB2777"/>
+            </a:solidFill>
+            <a:prstDash val="solid"/>
+          </a:ln>
+        </p:spPr>
+      </p:sp>
+      <p:sp>
+        <p:nvSpPr>
+          <p:cNvPr id="42" name="Text 40"/>
+          <p:cNvSpPr/>
+          <p:nvPr/>
+        </p:nvSpPr>
+        <p:spPr>
+          <a:xfrm>
+            <a:off x="3033522" y="4169664"/>
+            <a:ext cx="685800" cy="475488"/>
+          </a:xfrm>
+          <a:prstGeom prst="rect">
+            <a:avLst/>
+          </a:prstGeom>
+          <a:noFill/>
+          <a:ln/>
+        </p:spPr>
+        <p:txBody>
+          <a:bodyPr wrap="square" lIns="0" tIns="0" rIns="0" bIns="0" rtlCol="0" anchor="ctr"/>
+          <a:lstStyle/>
+          <a:p>
+            <a:pPr algn="ctr" indent="0" marL="0">
+              <a:buNone/>
+            </a:pPr>
+            <a:r>
+              <a:rPr lang="en-US" sz="900" b="1" dirty="0">
+                <a:solidFill>
+                  <a:srgbClr val="9D174D"/>
                 </a:solidFill>
                 <a:latin typeface="Trebuchet MS" pitchFamily="34" charset="0"/>
                 <a:ea typeface="Trebuchet MS" pitchFamily="34" charset="-122"/>
                 <a:cs typeface="Trebuchet MS" pitchFamily="34" charset="-120"/>
               </a:rPr>
-              <a:t>Phonemes</a:t>
-            </a:r>
-            <a:endParaRPr lang="en-US" sz="1100" dirty="0"/>
-          </a:p>
-        </p:txBody>
-      </p:sp>
-      <p:sp>
-        <p:nvSpPr>
-          <p:cNvPr id="41" name="Shape 39"/>
-          <p:cNvSpPr/>
-          <p:nvPr/>
-        </p:nvSpPr>
-        <p:spPr>
-          <a:xfrm>
-            <a:off x="1874520" y="4096512"/>
-            <a:ext cx="6903720" cy="658368"/>
-          </a:xfrm>
-          <a:prstGeom prst="rect">
-            <a:avLst>
-              <a:gd name="adj" fmla="val 8333"/>
-            </a:avLst>
-          </a:prstGeom>
-          <a:solidFill>
-            <a:srgbClr val="FCE7F3"/>
-          </a:solidFill>
-          <a:ln w="12700">
-            <a:solidFill>
-              <a:srgbClr val="DB2777"/>
-            </a:solidFill>
-            <a:prstDash val="solid"/>
-          </a:ln>
-        </p:spPr>
-      </p:sp>
-      <p:sp>
-        <p:nvSpPr>
-          <p:cNvPr id="42" name="Shape 40"/>
-          <p:cNvSpPr/>
-          <p:nvPr/>
-        </p:nvSpPr>
-        <p:spPr>
-          <a:xfrm>
-            <a:off x="2023872" y="4169664"/>
+              <a:t>e</a:t>
+            </a:r>
+            <a:endParaRPr lang="en-US" sz="900" dirty="0"/>
+          </a:p>
+        </p:txBody>
+      </p:sp>
+      <p:sp>
+        <p:nvSpPr>
+          <p:cNvPr id="43" name="Shape 41"/>
+          <p:cNvSpPr/>
+          <p:nvPr/>
+        </p:nvSpPr>
+        <p:spPr>
+          <a:xfrm>
+            <a:off x="3942207" y="4169664"/>
             <a:ext cx="685800" cy="475488"/>
           </a:xfrm>
           <a:prstGeom prst="rect">
@@ -16502,13 +16700,13 @@
       </p:sp>
       <p:sp>
         <p:nvSpPr>
-          <p:cNvPr id="43" name="Text 41"/>
-          <p:cNvSpPr/>
-          <p:nvPr/>
-        </p:nvSpPr>
-        <p:spPr>
-          <a:xfrm>
-            <a:off x="2023872" y="4169664"/>
+          <p:cNvPr id="44" name="Text 42"/>
+          <p:cNvSpPr/>
+          <p:nvPr/>
+        </p:nvSpPr>
+        <p:spPr>
+          <a:xfrm>
+            <a:off x="3942207" y="4169664"/>
             <a:ext cx="685800" cy="475488"/>
           </a:xfrm>
           <a:prstGeom prst="rect">
@@ -16533,7 +16731,7 @@
                 <a:ea typeface="Trebuchet MS" pitchFamily="34" charset="-122"/>
                 <a:cs typeface="Trebuchet MS" pitchFamily="34" charset="-120"/>
               </a:rPr>
-              <a:t>r</a:t>
+              <a:t>t</a:t>
             </a:r>
             <a:endParaRPr lang="en-US" sz="900" dirty="0"/>
           </a:p>
@@ -16541,13 +16739,13 @@
       </p:sp>
       <p:sp>
         <p:nvSpPr>
-          <p:cNvPr id="44" name="Shape 42"/>
-          <p:cNvSpPr/>
-          <p:nvPr/>
-        </p:nvSpPr>
-        <p:spPr>
-          <a:xfrm>
-            <a:off x="2831592" y="4169664"/>
+          <p:cNvPr id="45" name="Shape 43"/>
+          <p:cNvSpPr/>
+          <p:nvPr/>
+        </p:nvSpPr>
+        <p:spPr>
+          <a:xfrm>
+            <a:off x="4850892" y="4169664"/>
             <a:ext cx="685800" cy="475488"/>
           </a:xfrm>
           <a:prstGeom prst="rect">
@@ -16568,13 +16766,13 @@
       </p:sp>
       <p:sp>
         <p:nvSpPr>
-          <p:cNvPr id="45" name="Text 43"/>
-          <p:cNvSpPr/>
-          <p:nvPr/>
-        </p:nvSpPr>
-        <p:spPr>
-          <a:xfrm>
-            <a:off x="2831592" y="4169664"/>
+          <p:cNvPr id="46" name="Text 44"/>
+          <p:cNvSpPr/>
+          <p:nvPr/>
+        </p:nvSpPr>
+        <p:spPr>
+          <a:xfrm>
+            <a:off x="4850892" y="4169664"/>
             <a:ext cx="685800" cy="475488"/>
           </a:xfrm>
           <a:prstGeom prst="rect">
@@ -16599,7 +16797,7 @@
                 <a:ea typeface="Trebuchet MS" pitchFamily="34" charset="-122"/>
                 <a:cs typeface="Trebuchet MS" pitchFamily="34" charset="-120"/>
               </a:rPr>
-              <a:t>e</a:t>
+              <a:t>ur</a:t>
             </a:r>
             <a:endParaRPr lang="en-US" sz="900" dirty="0"/>
           </a:p>
@@ -16607,13 +16805,13 @@
       </p:sp>
       <p:sp>
         <p:nvSpPr>
-          <p:cNvPr id="46" name="Shape 44"/>
-          <p:cNvSpPr/>
-          <p:nvPr/>
-        </p:nvSpPr>
-        <p:spPr>
-          <a:xfrm>
-            <a:off x="3639312" y="4169664"/>
+          <p:cNvPr id="47" name="Shape 45"/>
+          <p:cNvSpPr/>
+          <p:nvPr/>
+        </p:nvSpPr>
+        <p:spPr>
+          <a:xfrm>
+            <a:off x="5759577" y="4169664"/>
             <a:ext cx="685800" cy="475488"/>
           </a:xfrm>
           <a:prstGeom prst="rect">
@@ -16634,13 +16832,13 @@
       </p:sp>
       <p:sp>
         <p:nvSpPr>
-          <p:cNvPr id="47" name="Text 45"/>
-          <p:cNvSpPr/>
-          <p:nvPr/>
-        </p:nvSpPr>
-        <p:spPr>
-          <a:xfrm>
-            <a:off x="3639312" y="4169664"/>
+          <p:cNvPr id="48" name="Text 46"/>
+          <p:cNvSpPr/>
+          <p:nvPr/>
+        </p:nvSpPr>
+        <p:spPr>
+          <a:xfrm>
+            <a:off x="5759577" y="4169664"/>
             <a:ext cx="685800" cy="475488"/>
           </a:xfrm>
           <a:prstGeom prst="rect">
@@ -16665,7 +16863,7 @@
                 <a:ea typeface="Trebuchet MS" pitchFamily="34" charset="-122"/>
                 <a:cs typeface="Trebuchet MS" pitchFamily="34" charset="-120"/>
               </a:rPr>
-              <a:t>t</a:t>
+              <a:t>n</a:t>
             </a:r>
             <a:endParaRPr lang="en-US" sz="900" dirty="0"/>
           </a:p>
@@ -16673,13 +16871,13 @@
       </p:sp>
       <p:sp>
         <p:nvSpPr>
-          <p:cNvPr id="48" name="Shape 46"/>
-          <p:cNvSpPr/>
-          <p:nvPr/>
-        </p:nvSpPr>
-        <p:spPr>
-          <a:xfrm>
-            <a:off x="4447032" y="4169664"/>
+          <p:cNvPr id="49" name="Shape 47"/>
+          <p:cNvSpPr/>
+          <p:nvPr/>
+        </p:nvSpPr>
+        <p:spPr>
+          <a:xfrm>
+            <a:off x="6668262" y="4169664"/>
             <a:ext cx="685800" cy="475488"/>
           </a:xfrm>
           <a:prstGeom prst="rect">
@@ -16700,13 +16898,13 @@
       </p:sp>
       <p:sp>
         <p:nvSpPr>
-          <p:cNvPr id="49" name="Text 47"/>
-          <p:cNvSpPr/>
-          <p:nvPr/>
-        </p:nvSpPr>
-        <p:spPr>
-          <a:xfrm>
-            <a:off x="4447032" y="4169664"/>
+          <p:cNvPr id="50" name="Text 48"/>
+          <p:cNvSpPr/>
+          <p:nvPr/>
+        </p:nvSpPr>
+        <p:spPr>
+          <a:xfrm>
+            <a:off x="6668262" y="4169664"/>
             <a:ext cx="685800" cy="475488"/>
           </a:xfrm>
           <a:prstGeom prst="rect">
@@ -16731,7 +16929,7 @@
                 <a:ea typeface="Trebuchet MS" pitchFamily="34" charset="-122"/>
                 <a:cs typeface="Trebuchet MS" pitchFamily="34" charset="-120"/>
               </a:rPr>
-              <a:t>ur</a:t>
+              <a:t>i</a:t>
             </a:r>
             <a:endParaRPr lang="en-US" sz="900" dirty="0"/>
           </a:p>
@@ -16739,13 +16937,13 @@
       </p:sp>
       <p:sp>
         <p:nvSpPr>
-          <p:cNvPr id="50" name="Shape 48"/>
-          <p:cNvSpPr/>
-          <p:nvPr/>
-        </p:nvSpPr>
-        <p:spPr>
-          <a:xfrm>
-            <a:off x="5254752" y="4169664"/>
+          <p:cNvPr id="51" name="Shape 49"/>
+          <p:cNvSpPr/>
+          <p:nvPr/>
+        </p:nvSpPr>
+        <p:spPr>
+          <a:xfrm>
+            <a:off x="7576947" y="4169664"/>
             <a:ext cx="685800" cy="475488"/>
           </a:xfrm>
           <a:prstGeom prst="rect">
@@ -16766,13 +16964,13 @@
       </p:sp>
       <p:sp>
         <p:nvSpPr>
-          <p:cNvPr id="51" name="Text 49"/>
-          <p:cNvSpPr/>
-          <p:nvPr/>
-        </p:nvSpPr>
-        <p:spPr>
-          <a:xfrm>
-            <a:off x="5254752" y="4169664"/>
+          <p:cNvPr id="52" name="Text 50"/>
+          <p:cNvSpPr/>
+          <p:nvPr/>
+        </p:nvSpPr>
+        <p:spPr>
+          <a:xfrm>
+            <a:off x="7576947" y="4169664"/>
             <a:ext cx="685800" cy="475488"/>
           </a:xfrm>
           <a:prstGeom prst="rect">
@@ -16797,205 +16995,7 @@
                 <a:ea typeface="Trebuchet MS" pitchFamily="34" charset="-122"/>
                 <a:cs typeface="Trebuchet MS" pitchFamily="34" charset="-120"/>
               </a:rPr>
-              <a:t>n</a:t>
-            </a:r>
-            <a:endParaRPr lang="en-US" sz="900" dirty="0"/>
-          </a:p>
-        </p:txBody>
-      </p:sp>
-      <p:sp>
-        <p:nvSpPr>
-          <p:cNvPr id="52" name="Shape 50"/>
-          <p:cNvSpPr/>
-          <p:nvPr/>
-        </p:nvSpPr>
-        <p:spPr>
-          <a:xfrm>
-            <a:off x="6062472" y="4169664"/>
-            <a:ext cx="685800" cy="475488"/>
-          </a:xfrm>
-          <a:prstGeom prst="rect">
-            <a:avLst>
-              <a:gd name="adj" fmla="val 7692"/>
-            </a:avLst>
-          </a:prstGeom>
-          <a:solidFill>
-            <a:srgbClr val="FFFFFF"/>
-          </a:solidFill>
-          <a:ln w="12700">
-            <a:solidFill>
-              <a:srgbClr val="DB2777"/>
-            </a:solidFill>
-            <a:prstDash val="solid"/>
-          </a:ln>
-        </p:spPr>
-      </p:sp>
-      <p:sp>
-        <p:nvSpPr>
-          <p:cNvPr id="53" name="Text 51"/>
-          <p:cNvSpPr/>
-          <p:nvPr/>
-        </p:nvSpPr>
-        <p:spPr>
-          <a:xfrm>
-            <a:off x="6062472" y="4169664"/>
-            <a:ext cx="685800" cy="475488"/>
-          </a:xfrm>
-          <a:prstGeom prst="rect">
-            <a:avLst/>
-          </a:prstGeom>
-          <a:noFill/>
-          <a:ln/>
-        </p:spPr>
-        <p:txBody>
-          <a:bodyPr wrap="square" lIns="0" tIns="0" rIns="0" bIns="0" rtlCol="0" anchor="ctr"/>
-          <a:lstStyle/>
-          <a:p>
-            <a:pPr algn="ctr" indent="0" marL="0">
-              <a:buNone/>
-            </a:pPr>
-            <a:r>
-              <a:rPr lang="en-US" sz="900" b="1" dirty="0">
-                <a:solidFill>
-                  <a:srgbClr val="9D174D"/>
-                </a:solidFill>
-                <a:latin typeface="Trebuchet MS" pitchFamily="34" charset="0"/>
-                <a:ea typeface="Trebuchet MS" pitchFamily="34" charset="-122"/>
-                <a:cs typeface="Trebuchet MS" pitchFamily="34" charset="-120"/>
-              </a:rPr>
-              <a:t>a</a:t>
-            </a:r>
-            <a:endParaRPr lang="en-US" sz="900" dirty="0"/>
-          </a:p>
-        </p:txBody>
-      </p:sp>
-      <p:sp>
-        <p:nvSpPr>
-          <p:cNvPr id="54" name="Shape 52"/>
-          <p:cNvSpPr/>
-          <p:nvPr/>
-        </p:nvSpPr>
-        <p:spPr>
-          <a:xfrm>
-            <a:off x="6870192" y="4169664"/>
-            <a:ext cx="685800" cy="475488"/>
-          </a:xfrm>
-          <a:prstGeom prst="rect">
-            <a:avLst>
-              <a:gd name="adj" fmla="val 7692"/>
-            </a:avLst>
-          </a:prstGeom>
-          <a:solidFill>
-            <a:srgbClr val="FFFFFF"/>
-          </a:solidFill>
-          <a:ln w="12700">
-            <a:solidFill>
-              <a:srgbClr val="DB2777"/>
-            </a:solidFill>
-            <a:prstDash val="solid"/>
-          </a:ln>
-        </p:spPr>
-      </p:sp>
-      <p:sp>
-        <p:nvSpPr>
-          <p:cNvPr id="55" name="Text 53"/>
-          <p:cNvSpPr/>
-          <p:nvPr/>
-        </p:nvSpPr>
-        <p:spPr>
-          <a:xfrm>
-            <a:off x="6870192" y="4169664"/>
-            <a:ext cx="685800" cy="475488"/>
-          </a:xfrm>
-          <a:prstGeom prst="rect">
-            <a:avLst/>
-          </a:prstGeom>
-          <a:noFill/>
-          <a:ln/>
-        </p:spPr>
-        <p:txBody>
-          <a:bodyPr wrap="square" lIns="0" tIns="0" rIns="0" bIns="0" rtlCol="0" anchor="ctr"/>
-          <a:lstStyle/>
-          <a:p>
-            <a:pPr algn="ctr" indent="0" marL="0">
-              <a:buNone/>
-            </a:pPr>
-            <a:r>
-              <a:rPr lang="en-US" sz="900" b="1" dirty="0">
-                <a:solidFill>
-                  <a:srgbClr val="9D174D"/>
-                </a:solidFill>
-                <a:latin typeface="Trebuchet MS" pitchFamily="34" charset="0"/>
-                <a:ea typeface="Trebuchet MS" pitchFamily="34" charset="-122"/>
-                <a:cs typeface="Trebuchet MS" pitchFamily="34" charset="-120"/>
-              </a:rPr>
-              <a:t>b</a:t>
-            </a:r>
-            <a:endParaRPr lang="en-US" sz="900" dirty="0"/>
-          </a:p>
-        </p:txBody>
-      </p:sp>
-      <p:sp>
-        <p:nvSpPr>
-          <p:cNvPr id="56" name="Shape 54"/>
-          <p:cNvSpPr/>
-          <p:nvPr/>
-        </p:nvSpPr>
-        <p:spPr>
-          <a:xfrm>
-            <a:off x="7677912" y="4169664"/>
-            <a:ext cx="685800" cy="475488"/>
-          </a:xfrm>
-          <a:prstGeom prst="rect">
-            <a:avLst>
-              <a:gd name="adj" fmla="val 7692"/>
-            </a:avLst>
-          </a:prstGeom>
-          <a:solidFill>
-            <a:srgbClr val="FFFFFF"/>
-          </a:solidFill>
-          <a:ln w="12700">
-            <a:solidFill>
-              <a:srgbClr val="DB2777"/>
-            </a:solidFill>
-            <a:prstDash val="solid"/>
-          </a:ln>
-        </p:spPr>
-      </p:sp>
-      <p:sp>
-        <p:nvSpPr>
-          <p:cNvPr id="57" name="Text 55"/>
-          <p:cNvSpPr/>
-          <p:nvPr/>
-        </p:nvSpPr>
-        <p:spPr>
-          <a:xfrm>
-            <a:off x="7677912" y="4169664"/>
-            <a:ext cx="685800" cy="475488"/>
-          </a:xfrm>
-          <a:prstGeom prst="rect">
-            <a:avLst/>
-          </a:prstGeom>
-          <a:noFill/>
-          <a:ln/>
-        </p:spPr>
-        <p:txBody>
-          <a:bodyPr wrap="square" lIns="0" tIns="0" rIns="0" bIns="0" rtlCol="0" anchor="ctr"/>
-          <a:lstStyle/>
-          <a:p>
-            <a:pPr algn="ctr" indent="0" marL="0">
-              <a:buNone/>
-            </a:pPr>
-            <a:r>
-              <a:rPr lang="en-US" sz="900" b="1" dirty="0">
-                <a:solidFill>
-                  <a:srgbClr val="9D174D"/>
-                </a:solidFill>
-                <a:latin typeface="Trebuchet MS" pitchFamily="34" charset="0"/>
-                <a:ea typeface="Trebuchet MS" pitchFamily="34" charset="-122"/>
-                <a:cs typeface="Trebuchet MS" pitchFamily="34" charset="-120"/>
-              </a:rPr>
-              <a:t>le</a:t>
+              <a:t>ng</a:t>
             </a:r>
             <a:endParaRPr lang="en-US" sz="900" dirty="0"/>
           </a:p>
@@ -18338,7 +18338,7 @@
                 <a:ea typeface="Calibri" pitchFamily="34" charset="-122"/>
                 <a:cs typeface="Calibri" pitchFamily="34" charset="-120"/>
               </a:rPr>
-              <a:t>unreturned</a:t>
+              <a:t>returner</a:t>
             </a:r>
             <a:pPr algn="l" indent="0" marL="0">
               <a:buNone/>
@@ -18352,7 +18352,7 @@
                 <a:ea typeface="Calibri" pitchFamily="34" charset="-122"/>
                 <a:cs typeface="Calibri" pitchFamily="34" charset="-120"/>
               </a:rPr>
-              <a:t> library books were a problem, but the </a:t>
+              <a:t> smiled as she unpacked; her </a:t>
             </a:r>
             <a:pPr algn="l" indent="0" marL="0">
               <a:buNone/>
@@ -18369,7 +18369,7 @@
                 <a:ea typeface="Calibri" pitchFamily="34" charset="-122"/>
                 <a:cs typeface="Calibri" pitchFamily="34" charset="-120"/>
               </a:rPr>
-              <a:t>returner</a:t>
+              <a:t>returned</a:t>
             </a:r>
             <a:pPr algn="l" indent="0" marL="0">
               <a:buNone/>
@@ -18383,7 +18383,7 @@
                 <a:ea typeface="Calibri" pitchFamily="34" charset="-122"/>
                 <a:cs typeface="Calibri" pitchFamily="34" charset="-120"/>
               </a:rPr>
-              <a:t> felt embarrassed, and the </a:t>
+              <a:t> luggage was safe, and she was glad the shop's </a:t>
             </a:r>
             <a:pPr algn="l" indent="0" marL="0">
               <a:buNone/>
@@ -18400,7 +18400,7 @@
                 <a:ea typeface="Calibri" pitchFamily="34" charset="-122"/>
                 <a:cs typeface="Calibri" pitchFamily="34" charset="-120"/>
               </a:rPr>
-              <a:t>returning</a:t>
+              <a:t>returns</a:t>
             </a:r>
             <a:pPr algn="l" indent="0" marL="0">
               <a:buNone/>
@@ -18414,7 +18414,7 @@
                 <a:ea typeface="Calibri" pitchFamily="34" charset="-122"/>
                 <a:cs typeface="Calibri" pitchFamily="34" charset="-120"/>
               </a:rPr>
-              <a:t> librarian handled it kindly.</a:t>
+              <a:t> policy had helped her.</a:t>
             </a:r>
             <a:endParaRPr lang="en-US" sz="1800" dirty="0"/>
           </a:p>
@@ -18569,7 +18569,7 @@
                 <a:ea typeface="Trebuchet MS" pitchFamily="34" charset="-122"/>
                 <a:cs typeface="Trebuchet MS" pitchFamily="34" charset="-120"/>
               </a:rPr>
-              <a:t>unreturned</a:t>
+              <a:t>returner</a:t>
             </a:r>
             <a:endParaRPr lang="en-US" sz="1400" dirty="0"/>
           </a:p>
@@ -18697,7 +18697,7 @@
                 <a:ea typeface="Trebuchet MS" pitchFamily="34" charset="-122"/>
                 <a:cs typeface="Trebuchet MS" pitchFamily="34" charset="-120"/>
               </a:rPr>
-              <a:t>returner</a:t>
+              <a:t>returned</a:t>
             </a:r>
             <a:endParaRPr lang="en-US" sz="1400" dirty="0"/>
           </a:p>
@@ -18825,7 +18825,7 @@
                 <a:ea typeface="Trebuchet MS" pitchFamily="34" charset="-122"/>
                 <a:cs typeface="Trebuchet MS" pitchFamily="34" charset="-120"/>
               </a:rPr>
-              <a:t>returning</a:t>
+              <a:t>returns</a:t>
             </a:r>
             <a:endParaRPr lang="en-US" sz="1400" dirty="0"/>
           </a:p>
@@ -19295,7 +19295,7 @@
                 <a:ea typeface="Trebuchet MS" pitchFamily="34" charset="-122"/>
                 <a:cs typeface="Trebuchet MS" pitchFamily="34" charset="-120"/>
               </a:rPr>
-              <a:t>unreturned</a:t>
+              <a:t>returner</a:t>
             </a:r>
             <a:endParaRPr lang="en-US" sz="2800" dirty="0"/>
           </a:p>
@@ -20122,7 +20122,7 @@
                 <a:ea typeface="Trebuchet MS" pitchFamily="34" charset="-122"/>
                 <a:cs typeface="Trebuchet MS" pitchFamily="34" charset="-120"/>
               </a:rPr>
-              <a:t>unreturned</a:t>
+              <a:t>returner</a:t>
             </a:r>
             <a:endParaRPr lang="en-US" sz="2800" dirty="0"/>
           </a:p>
@@ -20202,8 +20202,8 @@
         </p:nvSpPr>
         <p:spPr>
           <a:xfrm>
-            <a:off x="1989734" y="2258568"/>
-            <a:ext cx="1581912" cy="292608"/>
+            <a:off x="2221992" y="2258568"/>
+            <a:ext cx="1828800" cy="292608"/>
           </a:xfrm>
           <a:prstGeom prst="rect">
             <a:avLst>
@@ -20236,8 +20236,8 @@
         </p:nvSpPr>
         <p:spPr>
           <a:xfrm>
-            <a:off x="1989734" y="2258568"/>
-            <a:ext cx="1581912" cy="292608"/>
+            <a:off x="2221992" y="2258568"/>
+            <a:ext cx="1828800" cy="292608"/>
           </a:xfrm>
           <a:prstGeom prst="rect">
             <a:avLst/>
@@ -20261,7 +20261,7 @@
                 <a:ea typeface="Trebuchet MS" pitchFamily="34" charset="-122"/>
                 <a:cs typeface="Trebuchet MS" pitchFamily="34" charset="-120"/>
               </a:rPr>
-              <a:t>un</a:t>
+              <a:t>re</a:t>
             </a:r>
             <a:endParaRPr lang="en-US" sz="1300" dirty="0"/>
           </a:p>
@@ -20275,8 +20275,8 @@
         </p:nvSpPr>
         <p:spPr>
           <a:xfrm>
-            <a:off x="1989734" y="2569464"/>
-            <a:ext cx="1581912" cy="201168"/>
+            <a:off x="2221992" y="2569464"/>
+            <a:ext cx="1828800" cy="201168"/>
           </a:xfrm>
           <a:prstGeom prst="rect">
             <a:avLst/>
@@ -20300,7 +20300,7 @@
                 <a:ea typeface="Calibri" pitchFamily="34" charset="-122"/>
                 <a:cs typeface="Calibri" pitchFamily="34" charset="-120"/>
               </a:rPr>
-              <a:t>not</a:t>
+              <a:t>back, again</a:t>
             </a:r>
             <a:endParaRPr lang="en-US" sz="850" dirty="0"/>
           </a:p>
@@ -20314,8 +20314,8 @@
         </p:nvSpPr>
         <p:spPr>
           <a:xfrm>
-            <a:off x="3659429" y="2258568"/>
-            <a:ext cx="1581912" cy="292608"/>
+            <a:off x="4370832" y="2258568"/>
+            <a:ext cx="1828800" cy="292608"/>
           </a:xfrm>
           <a:prstGeom prst="rect">
             <a:avLst>
@@ -20323,11 +20323,11 @@
             </a:avLst>
           </a:prstGeom>
           <a:solidFill>
-            <a:srgbClr val="DDD6FE"/>
+            <a:srgbClr val="FCE7F3"/>
           </a:solidFill>
           <a:ln w="19050">
             <a:solidFill>
-              <a:srgbClr val="7C3AED"/>
+              <a:srgbClr val="DB2777"/>
             </a:solidFill>
             <a:prstDash val="solid"/>
           </a:ln>
@@ -20348,8 +20348,8 @@
         </p:nvSpPr>
         <p:spPr>
           <a:xfrm>
-            <a:off x="3659429" y="2258568"/>
-            <a:ext cx="1581912" cy="292608"/>
+            <a:off x="4370832" y="2258568"/>
+            <a:ext cx="1828800" cy="292608"/>
           </a:xfrm>
           <a:prstGeom prst="rect">
             <a:avLst/>
@@ -20367,13 +20367,13 @@
             <a:r>
               <a:rPr lang="en-US" sz="1300" b="1" dirty="0">
                 <a:solidFill>
-                  <a:srgbClr val="4C1D95"/>
+                  <a:srgbClr val="9D174D"/>
                 </a:solidFill>
                 <a:latin typeface="Trebuchet MS" pitchFamily="34" charset="0"/>
                 <a:ea typeface="Trebuchet MS" pitchFamily="34" charset="-122"/>
                 <a:cs typeface="Trebuchet MS" pitchFamily="34" charset="-120"/>
               </a:rPr>
-              <a:t>re</a:t>
+              <a:t>turn</a:t>
             </a:r>
             <a:endParaRPr lang="en-US" sz="1300" dirty="0"/>
           </a:p>
@@ -20387,8 +20387,8 @@
         </p:nvSpPr>
         <p:spPr>
           <a:xfrm>
-            <a:off x="3659429" y="2569464"/>
-            <a:ext cx="1581912" cy="201168"/>
+            <a:off x="4370832" y="2569464"/>
+            <a:ext cx="1828800" cy="201168"/>
           </a:xfrm>
           <a:prstGeom prst="rect">
             <a:avLst/>
@@ -20412,7 +20412,7 @@
                 <a:ea typeface="Calibri" pitchFamily="34" charset="-122"/>
                 <a:cs typeface="Calibri" pitchFamily="34" charset="-120"/>
               </a:rPr>
-              <a:t>back, again</a:t>
+              <a:t>turn, go back</a:t>
             </a:r>
             <a:endParaRPr lang="en-US" sz="850" dirty="0"/>
           </a:p>
@@ -20426,8 +20426,8 @@
         </p:nvSpPr>
         <p:spPr>
           <a:xfrm>
-            <a:off x="5329123" y="2258568"/>
-            <a:ext cx="1581912" cy="292608"/>
+            <a:off x="6519672" y="2258568"/>
+            <a:ext cx="1828800" cy="292608"/>
           </a:xfrm>
           <a:prstGeom prst="rect">
             <a:avLst>
@@ -20460,8 +20460,8 @@
         </p:nvSpPr>
         <p:spPr>
           <a:xfrm>
-            <a:off x="5329123" y="2258568"/>
-            <a:ext cx="1581912" cy="292608"/>
+            <a:off x="6519672" y="2258568"/>
+            <a:ext cx="1828800" cy="292608"/>
           </a:xfrm>
           <a:prstGeom prst="rect">
             <a:avLst/>
@@ -20485,7 +20485,7 @@
                 <a:ea typeface="Trebuchet MS" pitchFamily="34" charset="-122"/>
                 <a:cs typeface="Trebuchet MS" pitchFamily="34" charset="-120"/>
               </a:rPr>
-              <a:t>turn</a:t>
+              <a:t>er</a:t>
             </a:r>
             <a:endParaRPr lang="en-US" sz="1300" dirty="0"/>
           </a:p>
@@ -20499,8 +20499,8 @@
         </p:nvSpPr>
         <p:spPr>
           <a:xfrm>
-            <a:off x="5329123" y="2569464"/>
-            <a:ext cx="1581912" cy="201168"/>
+            <a:off x="6519672" y="2569464"/>
+            <a:ext cx="1828800" cy="201168"/>
           </a:xfrm>
           <a:prstGeom prst="rect">
             <a:avLst/>
@@ -20524,7 +20524,7 @@
                 <a:ea typeface="Calibri" pitchFamily="34" charset="-122"/>
                 <a:cs typeface="Calibri" pitchFamily="34" charset="-120"/>
               </a:rPr>
-              <a:t>to turn, go around</a:t>
+              <a:t>a person who does something</a:t>
             </a:r>
             <a:endParaRPr lang="en-US" sz="850" dirty="0"/>
           </a:p>
@@ -20538,30 +20538,23 @@
         </p:nvSpPr>
         <p:spPr>
           <a:xfrm>
-            <a:off x="6998818" y="2258568"/>
-            <a:ext cx="1581912" cy="292608"/>
+            <a:off x="365760" y="3273552"/>
+            <a:ext cx="1371600" cy="658368"/>
           </a:xfrm>
           <a:prstGeom prst="rect">
             <a:avLst>
-              <a:gd name="adj" fmla="val 25000"/>
+              <a:gd name="adj" fmla="val 8333"/>
             </a:avLst>
           </a:prstGeom>
           <a:solidFill>
-            <a:srgbClr val="FCE7F3"/>
-          </a:solidFill>
-          <a:ln w="19050">
-            <a:solidFill>
-              <a:srgbClr val="DB2777"/>
-            </a:solidFill>
-            <a:prstDash val="solid"/>
-          </a:ln>
-          <a:effectLst>
-            <a:outerShdw sx="100000" sy="100000" kx="0" ky="0" algn="bl" rotWithShape="0" blurRad="101600" dist="38100" dir="8100000">
-              <a:srgbClr val="000000">
-                <a:alpha val="12000"/>
-              </a:srgbClr>
-            </a:outerShdw>
-          </a:effectLst>
+            <a:srgbClr val="E2E8F0"/>
+          </a:solidFill>
+          <a:ln w="12700">
+            <a:solidFill>
+              <a:srgbClr val="E2E8F0"/>
+            </a:solidFill>
+            <a:prstDash val="solid"/>
+          </a:ln>
         </p:spPr>
       </p:sp>
       <p:sp>
@@ -20572,90 +20565,117 @@
         </p:nvSpPr>
         <p:spPr>
           <a:xfrm>
-            <a:off x="6998818" y="2258568"/>
-            <a:ext cx="1581912" cy="292608"/>
-          </a:xfrm>
-          <a:prstGeom prst="rect">
-            <a:avLst/>
-          </a:prstGeom>
-          <a:noFill/>
-          <a:ln/>
-        </p:spPr>
-        <p:txBody>
-          <a:bodyPr wrap="square" lIns="0" tIns="0" rIns="0" bIns="0" rtlCol="0" anchor="ctr"/>
-          <a:lstStyle/>
-          <a:p>
-            <a:pPr algn="ctr" indent="0" marL="0">
-              <a:buNone/>
-            </a:pPr>
-            <a:r>
-              <a:rPr lang="en-US" sz="1300" b="1" dirty="0">
-                <a:solidFill>
-                  <a:srgbClr val="9D174D"/>
+            <a:off x="365760" y="3273552"/>
+            <a:ext cx="1371600" cy="658368"/>
+          </a:xfrm>
+          <a:prstGeom prst="rect">
+            <a:avLst/>
+          </a:prstGeom>
+          <a:noFill/>
+          <a:ln/>
+        </p:spPr>
+        <p:txBody>
+          <a:bodyPr wrap="square" lIns="0" tIns="0" rIns="0" bIns="0" rtlCol="0" anchor="ctr"/>
+          <a:lstStyle/>
+          <a:p>
+            <a:pPr algn="ctr" indent="0" marL="0">
+              <a:buNone/>
+            </a:pPr>
+            <a:r>
+              <a:rPr lang="en-US" sz="1100" b="1" dirty="0">
+                <a:solidFill>
+                  <a:srgbClr val="475569"/>
                 </a:solidFill>
                 <a:latin typeface="Trebuchet MS" pitchFamily="34" charset="0"/>
                 <a:ea typeface="Trebuchet MS" pitchFamily="34" charset="-122"/>
                 <a:cs typeface="Trebuchet MS" pitchFamily="34" charset="-120"/>
               </a:rPr>
-              <a:t>ed</a:t>
-            </a:r>
-            <a:endParaRPr lang="en-US" sz="1300" dirty="0"/>
-          </a:p>
-        </p:txBody>
-      </p:sp>
-      <p:sp>
-        <p:nvSpPr>
-          <p:cNvPr id="27" name="Text 25"/>
-          <p:cNvSpPr/>
-          <p:nvPr/>
-        </p:nvSpPr>
-        <p:spPr>
-          <a:xfrm>
-            <a:off x="6998818" y="2569464"/>
-            <a:ext cx="1581912" cy="201168"/>
-          </a:xfrm>
-          <a:prstGeom prst="rect">
-            <a:avLst/>
-          </a:prstGeom>
-          <a:noFill/>
-          <a:ln/>
-        </p:spPr>
-        <p:txBody>
-          <a:bodyPr wrap="square" lIns="0" tIns="0" rIns="0" bIns="0" rtlCol="0" anchor="t"/>
-          <a:lstStyle/>
-          <a:p>
-            <a:pPr algn="ctr" indent="0" marL="0">
-              <a:buNone/>
-            </a:pPr>
-            <a:r>
-              <a:rPr lang="en-US" sz="850" dirty="0">
-                <a:solidFill>
-                  <a:srgbClr val="475569"/>
+              <a:t>Syllables</a:t>
+            </a:r>
+            <a:endParaRPr lang="en-US" sz="1100" dirty="0"/>
+          </a:p>
+        </p:txBody>
+      </p:sp>
+      <p:sp>
+        <p:nvSpPr>
+          <p:cNvPr id="27" name="Shape 25"/>
+          <p:cNvSpPr/>
+          <p:nvPr/>
+        </p:nvSpPr>
+        <p:spPr>
+          <a:xfrm>
+            <a:off x="1874520" y="3273552"/>
+            <a:ext cx="6903720" cy="658368"/>
+          </a:xfrm>
+          <a:prstGeom prst="rect">
+            <a:avLst>
+              <a:gd name="adj" fmla="val 8333"/>
+            </a:avLst>
+          </a:prstGeom>
+          <a:solidFill>
+            <a:srgbClr val="F8FAFC"/>
+          </a:solidFill>
+          <a:ln w="12700">
+            <a:solidFill>
+              <a:srgbClr val="E2E8F0"/>
+            </a:solidFill>
+            <a:prstDash val="dash"/>
+          </a:ln>
+        </p:spPr>
+      </p:sp>
+      <p:sp>
+        <p:nvSpPr>
+          <p:cNvPr id="28" name="Text 26"/>
+          <p:cNvSpPr/>
+          <p:nvPr/>
+        </p:nvSpPr>
+        <p:spPr>
+          <a:xfrm>
+            <a:off x="1874520" y="3273552"/>
+            <a:ext cx="6903720" cy="658368"/>
+          </a:xfrm>
+          <a:prstGeom prst="rect">
+            <a:avLst/>
+          </a:prstGeom>
+          <a:noFill/>
+          <a:ln/>
+        </p:spPr>
+        <p:txBody>
+          <a:bodyPr wrap="square" rtlCol="0" anchor="ctr"/>
+          <a:lstStyle/>
+          <a:p>
+            <a:pPr algn="ctr" indent="0" marL="0">
+              <a:buNone/>
+            </a:pPr>
+            <a:r>
+              <a:rPr lang="en-US" sz="1100" i="1" dirty="0">
+                <a:solidFill>
+                  <a:srgbClr val="CBD5E1"/>
                 </a:solidFill>
                 <a:latin typeface="Calibri" pitchFamily="34" charset="0"/>
                 <a:ea typeface="Calibri" pitchFamily="34" charset="-122"/>
                 <a:cs typeface="Calibri" pitchFamily="34" charset="-120"/>
               </a:rPr>
-              <a:t>in the past</a:t>
-            </a:r>
-            <a:endParaRPr lang="en-US" sz="850" dirty="0"/>
-          </a:p>
-        </p:txBody>
-      </p:sp>
-      <p:sp>
-        <p:nvSpPr>
-          <p:cNvPr id="28" name="Shape 26"/>
-          <p:cNvSpPr/>
-          <p:nvPr/>
-        </p:nvSpPr>
-        <p:spPr>
-          <a:xfrm>
-            <a:off x="365760" y="3273552"/>
-            <a:ext cx="1371600" cy="658368"/>
+              <a:t>Write here...</a:t>
+            </a:r>
+            <a:endParaRPr lang="en-US" sz="1100" dirty="0"/>
+          </a:p>
+        </p:txBody>
+      </p:sp>
+      <p:sp>
+        <p:nvSpPr>
+          <p:cNvPr id="29" name="Shape 27"/>
+          <p:cNvSpPr/>
+          <p:nvPr/>
+        </p:nvSpPr>
+        <p:spPr>
+          <a:xfrm>
+            <a:off x="365760" y="4096512"/>
+            <a:ext cx="1371600" cy="804672"/>
           </a:xfrm>
           <a:prstGeom prst="rect">
             <a:avLst>
-              <a:gd name="adj" fmla="val 8333"/>
+              <a:gd name="adj" fmla="val 6818"/>
             </a:avLst>
           </a:prstGeom>
           <a:solidFill>
@@ -20671,14 +20691,14 @@
       </p:sp>
       <p:sp>
         <p:nvSpPr>
-          <p:cNvPr id="29" name="Text 27"/>
-          <p:cNvSpPr/>
-          <p:nvPr/>
-        </p:nvSpPr>
-        <p:spPr>
-          <a:xfrm>
-            <a:off x="365760" y="3273552"/>
-            <a:ext cx="1371600" cy="658368"/>
+          <p:cNvPr id="30" name="Text 28"/>
+          <p:cNvSpPr/>
+          <p:nvPr/>
+        </p:nvSpPr>
+        <p:spPr>
+          <a:xfrm>
+            <a:off x="365760" y="4096512"/>
+            <a:ext cx="1371600" cy="804672"/>
           </a:xfrm>
           <a:prstGeom prst="rect">
             <a:avLst/>
@@ -20702,7 +20722,7 @@
                 <a:ea typeface="Trebuchet MS" pitchFamily="34" charset="-122"/>
                 <a:cs typeface="Trebuchet MS" pitchFamily="34" charset="-120"/>
               </a:rPr>
-              <a:t>Syllables</a:t>
+              <a:t>Phonemes</a:t>
             </a:r>
             <a:endParaRPr lang="en-US" sz="1100" dirty="0"/>
           </a:p>
@@ -20710,80 +20730,14 @@
       </p:sp>
       <p:sp>
         <p:nvSpPr>
-          <p:cNvPr id="30" name="Shape 28"/>
-          <p:cNvSpPr/>
-          <p:nvPr/>
-        </p:nvSpPr>
-        <p:spPr>
-          <a:xfrm>
-            <a:off x="1874520" y="3273552"/>
-            <a:ext cx="6903720" cy="658368"/>
-          </a:xfrm>
-          <a:prstGeom prst="rect">
-            <a:avLst>
-              <a:gd name="adj" fmla="val 8333"/>
-            </a:avLst>
-          </a:prstGeom>
-          <a:solidFill>
-            <a:srgbClr val="F8FAFC"/>
-          </a:solidFill>
-          <a:ln w="12700">
-            <a:solidFill>
-              <a:srgbClr val="E2E8F0"/>
-            </a:solidFill>
-            <a:prstDash val="dash"/>
-          </a:ln>
-        </p:spPr>
-      </p:sp>
-      <p:sp>
-        <p:nvSpPr>
-          <p:cNvPr id="31" name="Text 29"/>
-          <p:cNvSpPr/>
-          <p:nvPr/>
-        </p:nvSpPr>
-        <p:spPr>
-          <a:xfrm>
-            <a:off x="1874520" y="3273552"/>
-            <a:ext cx="6903720" cy="658368"/>
-          </a:xfrm>
-          <a:prstGeom prst="rect">
-            <a:avLst/>
-          </a:prstGeom>
-          <a:noFill/>
-          <a:ln/>
-        </p:spPr>
-        <p:txBody>
-          <a:bodyPr wrap="square" rtlCol="0" anchor="ctr"/>
-          <a:lstStyle/>
-          <a:p>
-            <a:pPr algn="ctr" indent="0" marL="0">
-              <a:buNone/>
-            </a:pPr>
-            <a:r>
-              <a:rPr lang="en-US" sz="1100" i="1" dirty="0">
-                <a:solidFill>
-                  <a:srgbClr val="CBD5E1"/>
-                </a:solidFill>
-                <a:latin typeface="Calibri" pitchFamily="34" charset="0"/>
-                <a:ea typeface="Calibri" pitchFamily="34" charset="-122"/>
-                <a:cs typeface="Calibri" pitchFamily="34" charset="-120"/>
-              </a:rPr>
-              <a:t>Write here...</a:t>
-            </a:r>
-            <a:endParaRPr lang="en-US" sz="1100" dirty="0"/>
-          </a:p>
-        </p:txBody>
-      </p:sp>
-      <p:sp>
-        <p:nvSpPr>
-          <p:cNvPr id="32" name="Shape 30"/>
-          <p:cNvSpPr/>
-          <p:nvPr/>
-        </p:nvSpPr>
-        <p:spPr>
-          <a:xfrm>
-            <a:off x="365760" y="4096512"/>
-            <a:ext cx="1371600" cy="804672"/>
+          <p:cNvPr id="31" name="Shape 29"/>
+          <p:cNvSpPr/>
+          <p:nvPr/>
+        </p:nvSpPr>
+        <p:spPr>
+          <a:xfrm>
+            <a:off x="1874520" y="4096512"/>
+            <a:ext cx="6903720" cy="804672"/>
           </a:xfrm>
           <a:prstGeom prst="rect">
             <a:avLst>
@@ -20791,85 +20745,19 @@
             </a:avLst>
           </a:prstGeom>
           <a:solidFill>
-            <a:srgbClr val="E2E8F0"/>
+            <a:srgbClr val="F8FAFC"/>
           </a:solidFill>
           <a:ln w="12700">
             <a:solidFill>
               <a:srgbClr val="E2E8F0"/>
             </a:solidFill>
-            <a:prstDash val="solid"/>
-          </a:ln>
-        </p:spPr>
-      </p:sp>
-      <p:sp>
-        <p:nvSpPr>
-          <p:cNvPr id="33" name="Text 31"/>
-          <p:cNvSpPr/>
-          <p:nvPr/>
-        </p:nvSpPr>
-        <p:spPr>
-          <a:xfrm>
-            <a:off x="365760" y="4096512"/>
-            <a:ext cx="1371600" cy="804672"/>
-          </a:xfrm>
-          <a:prstGeom prst="rect">
-            <a:avLst/>
-          </a:prstGeom>
-          <a:noFill/>
-          <a:ln/>
-        </p:spPr>
-        <p:txBody>
-          <a:bodyPr wrap="square" lIns="0" tIns="0" rIns="0" bIns="0" rtlCol="0" anchor="ctr"/>
-          <a:lstStyle/>
-          <a:p>
-            <a:pPr algn="ctr" indent="0" marL="0">
-              <a:buNone/>
-            </a:pPr>
-            <a:r>
-              <a:rPr lang="en-US" sz="1100" b="1" dirty="0">
-                <a:solidFill>
-                  <a:srgbClr val="475569"/>
-                </a:solidFill>
-                <a:latin typeface="Trebuchet MS" pitchFamily="34" charset="0"/>
-                <a:ea typeface="Trebuchet MS" pitchFamily="34" charset="-122"/>
-                <a:cs typeface="Trebuchet MS" pitchFamily="34" charset="-120"/>
-              </a:rPr>
-              <a:t>Phonemes</a:t>
-            </a:r>
-            <a:endParaRPr lang="en-US" sz="1100" dirty="0"/>
-          </a:p>
-        </p:txBody>
-      </p:sp>
-      <p:sp>
-        <p:nvSpPr>
-          <p:cNvPr id="34" name="Shape 32"/>
-          <p:cNvSpPr/>
-          <p:nvPr/>
-        </p:nvSpPr>
-        <p:spPr>
-          <a:xfrm>
-            <a:off x="1874520" y="4096512"/>
-            <a:ext cx="6903720" cy="804672"/>
-          </a:xfrm>
-          <a:prstGeom prst="rect">
-            <a:avLst>
-              <a:gd name="adj" fmla="val 6818"/>
-            </a:avLst>
-          </a:prstGeom>
-          <a:solidFill>
-            <a:srgbClr val="F8FAFC"/>
-          </a:solidFill>
-          <a:ln w="12700">
-            <a:solidFill>
-              <a:srgbClr val="E2E8F0"/>
-            </a:solidFill>
             <a:prstDash val="dash"/>
           </a:ln>
         </p:spPr>
       </p:sp>
       <p:sp>
         <p:nvSpPr>
-          <p:cNvPr id="35" name="Text 33"/>
+          <p:cNvPr id="32" name="Text 30"/>
           <p:cNvSpPr/>
           <p:nvPr/>
         </p:nvSpPr>
@@ -21331,7 +21219,7 @@
                 <a:ea typeface="Trebuchet MS" pitchFamily="34" charset="-122"/>
                 <a:cs typeface="Trebuchet MS" pitchFamily="34" charset="-120"/>
               </a:rPr>
-              <a:t>unreturned</a:t>
+              <a:t>returner</a:t>
             </a:r>
             <a:endParaRPr lang="en-US" sz="2800" dirty="0"/>
           </a:p>
@@ -21411,8 +21299,8 @@
         </p:nvSpPr>
         <p:spPr>
           <a:xfrm>
-            <a:off x="1989734" y="2258568"/>
-            <a:ext cx="1581912" cy="292608"/>
+            <a:off x="2221992" y="2258568"/>
+            <a:ext cx="1828800" cy="292608"/>
           </a:xfrm>
           <a:prstGeom prst="rect">
             <a:avLst>
@@ -21445,8 +21333,8 @@
         </p:nvSpPr>
         <p:spPr>
           <a:xfrm>
-            <a:off x="1989734" y="2258568"/>
-            <a:ext cx="1581912" cy="292608"/>
+            <a:off x="2221992" y="2258568"/>
+            <a:ext cx="1828800" cy="292608"/>
           </a:xfrm>
           <a:prstGeom prst="rect">
             <a:avLst/>
@@ -21470,7 +21358,7 @@
                 <a:ea typeface="Trebuchet MS" pitchFamily="34" charset="-122"/>
                 <a:cs typeface="Trebuchet MS" pitchFamily="34" charset="-120"/>
               </a:rPr>
-              <a:t>un</a:t>
+              <a:t>re</a:t>
             </a:r>
             <a:endParaRPr lang="en-US" sz="1300" dirty="0"/>
           </a:p>
@@ -21484,8 +21372,8 @@
         </p:nvSpPr>
         <p:spPr>
           <a:xfrm>
-            <a:off x="1989734" y="2569464"/>
-            <a:ext cx="1581912" cy="201168"/>
+            <a:off x="2221992" y="2569464"/>
+            <a:ext cx="1828800" cy="201168"/>
           </a:xfrm>
           <a:prstGeom prst="rect">
             <a:avLst/>
@@ -21509,7 +21397,7 @@
                 <a:ea typeface="Calibri" pitchFamily="34" charset="-122"/>
                 <a:cs typeface="Calibri" pitchFamily="34" charset="-120"/>
               </a:rPr>
-              <a:t>not</a:t>
+              <a:t>back, again</a:t>
             </a:r>
             <a:endParaRPr lang="en-US" sz="850" dirty="0"/>
           </a:p>
@@ -21523,8 +21411,8 @@
         </p:nvSpPr>
         <p:spPr>
           <a:xfrm>
-            <a:off x="3659429" y="2258568"/>
-            <a:ext cx="1581912" cy="292608"/>
+            <a:off x="4370832" y="2258568"/>
+            <a:ext cx="1828800" cy="292608"/>
           </a:xfrm>
           <a:prstGeom prst="rect">
             <a:avLst>
@@ -21532,11 +21420,11 @@
             </a:avLst>
           </a:prstGeom>
           <a:solidFill>
-            <a:srgbClr val="DDD6FE"/>
+            <a:srgbClr val="FCE7F3"/>
           </a:solidFill>
           <a:ln w="19050">
             <a:solidFill>
-              <a:srgbClr val="7C3AED"/>
+              <a:srgbClr val="DB2777"/>
             </a:solidFill>
             <a:prstDash val="solid"/>
           </a:ln>
@@ -21557,8 +21445,8 @@
         </p:nvSpPr>
         <p:spPr>
           <a:xfrm>
-            <a:off x="3659429" y="2258568"/>
-            <a:ext cx="1581912" cy="292608"/>
+            <a:off x="4370832" y="2258568"/>
+            <a:ext cx="1828800" cy="292608"/>
           </a:xfrm>
           <a:prstGeom prst="rect">
             <a:avLst/>
@@ -21576,13 +21464,13 @@
             <a:r>
               <a:rPr lang="en-US" sz="1300" b="1" dirty="0">
                 <a:solidFill>
-                  <a:srgbClr val="4C1D95"/>
+                  <a:srgbClr val="9D174D"/>
                 </a:solidFill>
                 <a:latin typeface="Trebuchet MS" pitchFamily="34" charset="0"/>
                 <a:ea typeface="Trebuchet MS" pitchFamily="34" charset="-122"/>
                 <a:cs typeface="Trebuchet MS" pitchFamily="34" charset="-120"/>
               </a:rPr>
-              <a:t>re</a:t>
+              <a:t>turn</a:t>
             </a:r>
             <a:endParaRPr lang="en-US" sz="1300" dirty="0"/>
           </a:p>
@@ -21596,8 +21484,8 @@
         </p:nvSpPr>
         <p:spPr>
           <a:xfrm>
-            <a:off x="3659429" y="2569464"/>
-            <a:ext cx="1581912" cy="201168"/>
+            <a:off x="4370832" y="2569464"/>
+            <a:ext cx="1828800" cy="201168"/>
           </a:xfrm>
           <a:prstGeom prst="rect">
             <a:avLst/>
@@ -21621,7 +21509,7 @@
                 <a:ea typeface="Calibri" pitchFamily="34" charset="-122"/>
                 <a:cs typeface="Calibri" pitchFamily="34" charset="-120"/>
               </a:rPr>
-              <a:t>back, again</a:t>
+              <a:t>turn, go back</a:t>
             </a:r>
             <a:endParaRPr lang="en-US" sz="850" dirty="0"/>
           </a:p>
@@ -21635,8 +21523,8 @@
         </p:nvSpPr>
         <p:spPr>
           <a:xfrm>
-            <a:off x="5329123" y="2258568"/>
-            <a:ext cx="1581912" cy="292608"/>
+            <a:off x="6519672" y="2258568"/>
+            <a:ext cx="1828800" cy="292608"/>
           </a:xfrm>
           <a:prstGeom prst="rect">
             <a:avLst>
@@ -21669,8 +21557,8 @@
         </p:nvSpPr>
         <p:spPr>
           <a:xfrm>
-            <a:off x="5329123" y="2258568"/>
-            <a:ext cx="1581912" cy="292608"/>
+            <a:off x="6519672" y="2258568"/>
+            <a:ext cx="1828800" cy="292608"/>
           </a:xfrm>
           <a:prstGeom prst="rect">
             <a:avLst/>
@@ -21694,7 +21582,7 @@
                 <a:ea typeface="Trebuchet MS" pitchFamily="34" charset="-122"/>
                 <a:cs typeface="Trebuchet MS" pitchFamily="34" charset="-120"/>
               </a:rPr>
-              <a:t>turn</a:t>
+              <a:t>er</a:t>
             </a:r>
             <a:endParaRPr lang="en-US" sz="1300" dirty="0"/>
           </a:p>
@@ -21708,8 +21596,8 @@
         </p:nvSpPr>
         <p:spPr>
           <a:xfrm>
-            <a:off x="5329123" y="2569464"/>
-            <a:ext cx="1581912" cy="201168"/>
+            <a:off x="6519672" y="2569464"/>
+            <a:ext cx="1828800" cy="201168"/>
           </a:xfrm>
           <a:prstGeom prst="rect">
             <a:avLst/>
@@ -21733,7 +21621,7 @@
                 <a:ea typeface="Calibri" pitchFamily="34" charset="-122"/>
                 <a:cs typeface="Calibri" pitchFamily="34" charset="-120"/>
               </a:rPr>
-              <a:t>to turn, go around</a:t>
+              <a:t>a person who does something</a:t>
             </a:r>
             <a:endParaRPr lang="en-US" sz="850" dirty="0"/>
           </a:p>
@@ -21747,30 +21635,23 @@
         </p:nvSpPr>
         <p:spPr>
           <a:xfrm>
-            <a:off x="6998818" y="2258568"/>
-            <a:ext cx="1581912" cy="292608"/>
+            <a:off x="365760" y="3273552"/>
+            <a:ext cx="1371600" cy="658368"/>
           </a:xfrm>
           <a:prstGeom prst="rect">
             <a:avLst>
-              <a:gd name="adj" fmla="val 25000"/>
+              <a:gd name="adj" fmla="val 8333"/>
             </a:avLst>
           </a:prstGeom>
           <a:solidFill>
-            <a:srgbClr val="FCE7F3"/>
-          </a:solidFill>
-          <a:ln w="19050">
-            <a:solidFill>
-              <a:srgbClr val="DB2777"/>
-            </a:solidFill>
-            <a:prstDash val="solid"/>
-          </a:ln>
-          <a:effectLst>
-            <a:outerShdw sx="100000" sy="100000" kx="0" ky="0" algn="bl" rotWithShape="0" blurRad="101600" dist="38100" dir="8100000">
-              <a:srgbClr val="000000">
-                <a:alpha val="12000"/>
-              </a:srgbClr>
-            </a:outerShdw>
-          </a:effectLst>
+            <a:srgbClr val="E2E8F0"/>
+          </a:solidFill>
+          <a:ln w="12700">
+            <a:solidFill>
+              <a:srgbClr val="E2E8F0"/>
+            </a:solidFill>
+            <a:prstDash val="solid"/>
+          </a:ln>
         </p:spPr>
       </p:sp>
       <p:sp>
@@ -21781,86 +21662,47 @@
         </p:nvSpPr>
         <p:spPr>
           <a:xfrm>
-            <a:off x="6998818" y="2258568"/>
-            <a:ext cx="1581912" cy="292608"/>
-          </a:xfrm>
-          <a:prstGeom prst="rect">
-            <a:avLst/>
-          </a:prstGeom>
-          <a:noFill/>
-          <a:ln/>
-        </p:spPr>
-        <p:txBody>
-          <a:bodyPr wrap="square" lIns="0" tIns="0" rIns="0" bIns="0" rtlCol="0" anchor="ctr"/>
-          <a:lstStyle/>
-          <a:p>
-            <a:pPr algn="ctr" indent="0" marL="0">
-              <a:buNone/>
-            </a:pPr>
-            <a:r>
-              <a:rPr lang="en-US" sz="1300" b="1" dirty="0">
-                <a:solidFill>
-                  <a:srgbClr val="9D174D"/>
+            <a:off x="365760" y="3273552"/>
+            <a:ext cx="1371600" cy="658368"/>
+          </a:xfrm>
+          <a:prstGeom prst="rect">
+            <a:avLst/>
+          </a:prstGeom>
+          <a:noFill/>
+          <a:ln/>
+        </p:spPr>
+        <p:txBody>
+          <a:bodyPr wrap="square" lIns="0" tIns="0" rIns="0" bIns="0" rtlCol="0" anchor="ctr"/>
+          <a:lstStyle/>
+          <a:p>
+            <a:pPr algn="ctr" indent="0" marL="0">
+              <a:buNone/>
+            </a:pPr>
+            <a:r>
+              <a:rPr lang="en-US" sz="1100" b="1" dirty="0">
+                <a:solidFill>
+                  <a:srgbClr val="475569"/>
                 </a:solidFill>
                 <a:latin typeface="Trebuchet MS" pitchFamily="34" charset="0"/>
                 <a:ea typeface="Trebuchet MS" pitchFamily="34" charset="-122"/>
                 <a:cs typeface="Trebuchet MS" pitchFamily="34" charset="-120"/>
               </a:rPr>
-              <a:t>ed</a:t>
-            </a:r>
-            <a:endParaRPr lang="en-US" sz="1300" dirty="0"/>
-          </a:p>
-        </p:txBody>
-      </p:sp>
-      <p:sp>
-        <p:nvSpPr>
-          <p:cNvPr id="27" name="Text 25"/>
-          <p:cNvSpPr/>
-          <p:nvPr/>
-        </p:nvSpPr>
-        <p:spPr>
-          <a:xfrm>
-            <a:off x="6998818" y="2569464"/>
-            <a:ext cx="1581912" cy="201168"/>
-          </a:xfrm>
-          <a:prstGeom prst="rect">
-            <a:avLst/>
-          </a:prstGeom>
-          <a:noFill/>
-          <a:ln/>
-        </p:spPr>
-        <p:txBody>
-          <a:bodyPr wrap="square" lIns="0" tIns="0" rIns="0" bIns="0" rtlCol="0" anchor="t"/>
-          <a:lstStyle/>
-          <a:p>
-            <a:pPr algn="ctr" indent="0" marL="0">
-              <a:buNone/>
-            </a:pPr>
-            <a:r>
-              <a:rPr lang="en-US" sz="850" dirty="0">
-                <a:solidFill>
-                  <a:srgbClr val="475569"/>
-                </a:solidFill>
-                <a:latin typeface="Calibri" pitchFamily="34" charset="0"/>
-                <a:ea typeface="Calibri" pitchFamily="34" charset="-122"/>
-                <a:cs typeface="Calibri" pitchFamily="34" charset="-120"/>
-              </a:rPr>
-              <a:t>in the past</a:t>
-            </a:r>
-            <a:endParaRPr lang="en-US" sz="850" dirty="0"/>
-          </a:p>
-        </p:txBody>
-      </p:sp>
-      <p:sp>
-        <p:nvSpPr>
-          <p:cNvPr id="28" name="Shape 26"/>
-          <p:cNvSpPr/>
-          <p:nvPr/>
-        </p:nvSpPr>
-        <p:spPr>
-          <a:xfrm>
-            <a:off x="365760" y="3273552"/>
-            <a:ext cx="1371600" cy="658368"/>
+              <a:t>Syllables</a:t>
+            </a:r>
+            <a:endParaRPr lang="en-US" sz="1100" dirty="0"/>
+          </a:p>
+        </p:txBody>
+      </p:sp>
+      <p:sp>
+        <p:nvSpPr>
+          <p:cNvPr id="27" name="Shape 25"/>
+          <p:cNvSpPr/>
+          <p:nvPr/>
+        </p:nvSpPr>
+        <p:spPr>
+          <a:xfrm>
+            <a:off x="1874520" y="3273552"/>
+            <a:ext cx="6903720" cy="658368"/>
           </a:xfrm>
           <a:prstGeom prst="rect">
             <a:avLst>
@@ -21868,11 +21710,38 @@
             </a:avLst>
           </a:prstGeom>
           <a:solidFill>
-            <a:srgbClr val="E2E8F0"/>
-          </a:solidFill>
-          <a:ln w="12700">
-            <a:solidFill>
-              <a:srgbClr val="E2E8F0"/>
+            <a:srgbClr val="CCFBF1"/>
+          </a:solidFill>
+          <a:ln w="12700">
+            <a:solidFill>
+              <a:srgbClr val="0D9488"/>
+            </a:solidFill>
+            <a:prstDash val="solid"/>
+          </a:ln>
+        </p:spPr>
+      </p:sp>
+      <p:sp>
+        <p:nvSpPr>
+          <p:cNvPr id="28" name="Shape 26"/>
+          <p:cNvSpPr/>
+          <p:nvPr/>
+        </p:nvSpPr>
+        <p:spPr>
+          <a:xfrm>
+            <a:off x="2313432" y="3364992"/>
+            <a:ext cx="1645920" cy="475488"/>
+          </a:xfrm>
+          <a:prstGeom prst="rect">
+            <a:avLst>
+              <a:gd name="adj" fmla="val 9615"/>
+            </a:avLst>
+          </a:prstGeom>
+          <a:solidFill>
+            <a:srgbClr val="FFFFFF"/>
+          </a:solidFill>
+          <a:ln w="12700">
+            <a:solidFill>
+              <a:srgbClr val="0D9488"/>
             </a:solidFill>
             <a:prstDash val="solid"/>
           </a:ln>
@@ -21886,63 +21755,75 @@
         </p:nvSpPr>
         <p:spPr>
           <a:xfrm>
-            <a:off x="365760" y="3273552"/>
-            <a:ext cx="1371600" cy="658368"/>
-          </a:xfrm>
-          <a:prstGeom prst="rect">
-            <a:avLst/>
-          </a:prstGeom>
-          <a:noFill/>
-          <a:ln/>
-        </p:spPr>
-        <p:txBody>
-          <a:bodyPr wrap="square" lIns="0" tIns="0" rIns="0" bIns="0" rtlCol="0" anchor="ctr"/>
-          <a:lstStyle/>
-          <a:p>
-            <a:pPr algn="ctr" indent="0" marL="0">
-              <a:buNone/>
-            </a:pPr>
-            <a:r>
-              <a:rPr lang="en-US" sz="1100" b="1" dirty="0">
-                <a:solidFill>
-                  <a:srgbClr val="475569"/>
+            <a:off x="2313432" y="3364992"/>
+            <a:ext cx="1645920" cy="475488"/>
+          </a:xfrm>
+          <a:prstGeom prst="rect">
+            <a:avLst/>
+          </a:prstGeom>
+          <a:noFill/>
+          <a:ln/>
+        </p:spPr>
+        <p:txBody>
+          <a:bodyPr wrap="square" lIns="0" tIns="0" rIns="0" bIns="0" rtlCol="0" anchor="ctr"/>
+          <a:lstStyle/>
+          <a:p>
+            <a:pPr algn="ctr" indent="0" marL="0">
+              <a:buNone/>
+            </a:pPr>
+            <a:r>
+              <a:rPr lang="en-US" sz="1400" b="1" dirty="0">
+                <a:solidFill>
+                  <a:srgbClr val="0D9488"/>
                 </a:solidFill>
                 <a:latin typeface="Trebuchet MS" pitchFamily="34" charset="0"/>
                 <a:ea typeface="Trebuchet MS" pitchFamily="34" charset="-122"/>
                 <a:cs typeface="Trebuchet MS" pitchFamily="34" charset="-120"/>
               </a:rPr>
-              <a:t>Syllables</a:t>
-            </a:r>
-            <a:endParaRPr lang="en-US" sz="1100" dirty="0"/>
-          </a:p>
-        </p:txBody>
-      </p:sp>
-      <p:sp>
-        <p:nvSpPr>
-          <p:cNvPr id="30" name="Shape 28"/>
-          <p:cNvSpPr/>
-          <p:nvPr/>
-        </p:nvSpPr>
-        <p:spPr>
-          <a:xfrm>
-            <a:off x="1874520" y="3273552"/>
-            <a:ext cx="6903720" cy="658368"/>
-          </a:xfrm>
-          <a:prstGeom prst="rect">
-            <a:avLst>
-              <a:gd name="adj" fmla="val 8333"/>
-            </a:avLst>
-          </a:prstGeom>
-          <a:solidFill>
-            <a:srgbClr val="CCFBF1"/>
-          </a:solidFill>
-          <a:ln w="12700">
-            <a:solidFill>
-              <a:srgbClr val="0D9488"/>
-            </a:solidFill>
-            <a:prstDash val="solid"/>
-          </a:ln>
-        </p:spPr>
+              <a:t>re</a:t>
+            </a:r>
+            <a:endParaRPr lang="en-US" sz="1400" dirty="0"/>
+          </a:p>
+        </p:txBody>
+      </p:sp>
+      <p:sp>
+        <p:nvSpPr>
+          <p:cNvPr id="30" name="Text 28"/>
+          <p:cNvSpPr/>
+          <p:nvPr/>
+        </p:nvSpPr>
+        <p:spPr>
+          <a:xfrm>
+            <a:off x="3959352" y="3364992"/>
+            <a:ext cx="411480" cy="475488"/>
+          </a:xfrm>
+          <a:prstGeom prst="rect">
+            <a:avLst/>
+          </a:prstGeom>
+          <a:noFill/>
+          <a:ln/>
+        </p:spPr>
+        <p:txBody>
+          <a:bodyPr wrap="square" lIns="0" tIns="0" rIns="0" bIns="0" rtlCol="0" anchor="ctr"/>
+          <a:lstStyle/>
+          <a:p>
+            <a:pPr algn="ctr" indent="0" marL="0">
+              <a:buNone/>
+            </a:pPr>
+            <a:r>
+              <a:rPr lang="en-US" sz="1600" b="1" dirty="0">
+                <a:solidFill>
+                  <a:srgbClr val="0D9488"/>
+                </a:solidFill>
+                <a:latin typeface="Trebuchet MS" pitchFamily="34" charset="0"/>
+                <a:ea typeface="Trebuchet MS" pitchFamily="34" charset="-122"/>
+                <a:cs typeface="Trebuchet MS" pitchFamily="34" charset="-120"/>
+              </a:rPr>
+              <a:t>·</a:t>
+            </a:r>
+            <a:endParaRPr lang="en-US" sz="1600" dirty="0"/>
+          </a:p>
+        </p:txBody>
       </p:sp>
       <p:sp>
         <p:nvSpPr>
@@ -21952,7 +21833,7 @@
         </p:nvSpPr>
         <p:spPr>
           <a:xfrm>
-            <a:off x="2313432" y="3364992"/>
+            <a:off x="4370832" y="3364992"/>
             <a:ext cx="1645920" cy="475488"/>
           </a:xfrm>
           <a:prstGeom prst="rect">
@@ -21979,7 +21860,7 @@
         </p:nvSpPr>
         <p:spPr>
           <a:xfrm>
-            <a:off x="2313432" y="3364992"/>
+            <a:off x="4370832" y="3364992"/>
             <a:ext cx="1645920" cy="475488"/>
           </a:xfrm>
           <a:prstGeom prst="rect">
@@ -22004,7 +21885,7 @@
                 <a:ea typeface="Trebuchet MS" pitchFamily="34" charset="-122"/>
                 <a:cs typeface="Trebuchet MS" pitchFamily="34" charset="-120"/>
               </a:rPr>
-              <a:t>un</a:t>
+              <a:t>turn</a:t>
             </a:r>
             <a:endParaRPr lang="en-US" sz="1400" dirty="0"/>
           </a:p>
@@ -22018,7 +21899,7 @@
         </p:nvSpPr>
         <p:spPr>
           <a:xfrm>
-            <a:off x="3959352" y="3364992"/>
+            <a:off x="6016752" y="3364992"/>
             <a:ext cx="411480" cy="475488"/>
           </a:xfrm>
           <a:prstGeom prst="rect">
@@ -22057,7 +21938,7 @@
         </p:nvSpPr>
         <p:spPr>
           <a:xfrm>
-            <a:off x="4370832" y="3364992"/>
+            <a:off x="6428232" y="3364992"/>
             <a:ext cx="1645920" cy="475488"/>
           </a:xfrm>
           <a:prstGeom prst="rect">
@@ -22084,7 +21965,7 @@
         </p:nvSpPr>
         <p:spPr>
           <a:xfrm>
-            <a:off x="4370832" y="3364992"/>
+            <a:off x="6428232" y="3364992"/>
             <a:ext cx="1645920" cy="475488"/>
           </a:xfrm>
           <a:prstGeom prst="rect">
@@ -22109,7 +21990,7 @@
                 <a:ea typeface="Trebuchet MS" pitchFamily="34" charset="-122"/>
                 <a:cs typeface="Trebuchet MS" pitchFamily="34" charset="-120"/>
               </a:rPr>
-              <a:t>re</a:t>
+              <a:t>er</a:t>
             </a:r>
             <a:endParaRPr lang="en-US" sz="1400" dirty="0"/>
           </a:p>
@@ -22117,119 +21998,80 @@
       </p:sp>
       <p:sp>
         <p:nvSpPr>
-          <p:cNvPr id="36" name="Text 34"/>
-          <p:cNvSpPr/>
-          <p:nvPr/>
-        </p:nvSpPr>
-        <p:spPr>
-          <a:xfrm>
-            <a:off x="6016752" y="3364992"/>
-            <a:ext cx="411480" cy="475488"/>
-          </a:xfrm>
-          <a:prstGeom prst="rect">
-            <a:avLst/>
-          </a:prstGeom>
-          <a:noFill/>
-          <a:ln/>
-        </p:spPr>
-        <p:txBody>
-          <a:bodyPr wrap="square" lIns="0" tIns="0" rIns="0" bIns="0" rtlCol="0" anchor="ctr"/>
-          <a:lstStyle/>
-          <a:p>
-            <a:pPr algn="ctr" indent="0" marL="0">
-              <a:buNone/>
-            </a:pPr>
-            <a:r>
-              <a:rPr lang="en-US" sz="1600" b="1" dirty="0">
-                <a:solidFill>
-                  <a:srgbClr val="0D9488"/>
+          <p:cNvPr id="36" name="Shape 34"/>
+          <p:cNvSpPr/>
+          <p:nvPr/>
+        </p:nvSpPr>
+        <p:spPr>
+          <a:xfrm>
+            <a:off x="365760" y="4096512"/>
+            <a:ext cx="1371600" cy="804672"/>
+          </a:xfrm>
+          <a:prstGeom prst="rect">
+            <a:avLst>
+              <a:gd name="adj" fmla="val 6818"/>
+            </a:avLst>
+          </a:prstGeom>
+          <a:solidFill>
+            <a:srgbClr val="E2E8F0"/>
+          </a:solidFill>
+          <a:ln w="12700">
+            <a:solidFill>
+              <a:srgbClr val="E2E8F0"/>
+            </a:solidFill>
+            <a:prstDash val="solid"/>
+          </a:ln>
+        </p:spPr>
+      </p:sp>
+      <p:sp>
+        <p:nvSpPr>
+          <p:cNvPr id="37" name="Text 35"/>
+          <p:cNvSpPr/>
+          <p:nvPr/>
+        </p:nvSpPr>
+        <p:spPr>
+          <a:xfrm>
+            <a:off x="365760" y="4096512"/>
+            <a:ext cx="1371600" cy="804672"/>
+          </a:xfrm>
+          <a:prstGeom prst="rect">
+            <a:avLst/>
+          </a:prstGeom>
+          <a:noFill/>
+          <a:ln/>
+        </p:spPr>
+        <p:txBody>
+          <a:bodyPr wrap="square" lIns="0" tIns="0" rIns="0" bIns="0" rtlCol="0" anchor="ctr"/>
+          <a:lstStyle/>
+          <a:p>
+            <a:pPr algn="ctr" indent="0" marL="0">
+              <a:buNone/>
+            </a:pPr>
+            <a:r>
+              <a:rPr lang="en-US" sz="1100" b="1" dirty="0">
+                <a:solidFill>
+                  <a:srgbClr val="475569"/>
                 </a:solidFill>
                 <a:latin typeface="Trebuchet MS" pitchFamily="34" charset="0"/>
                 <a:ea typeface="Trebuchet MS" pitchFamily="34" charset="-122"/>
                 <a:cs typeface="Trebuchet MS" pitchFamily="34" charset="-120"/>
               </a:rPr>
-              <a:t>·</a:t>
-            </a:r>
-            <a:endParaRPr lang="en-US" sz="1600" dirty="0"/>
-          </a:p>
-        </p:txBody>
-      </p:sp>
-      <p:sp>
-        <p:nvSpPr>
-          <p:cNvPr id="37" name="Shape 35"/>
-          <p:cNvSpPr/>
-          <p:nvPr/>
-        </p:nvSpPr>
-        <p:spPr>
-          <a:xfrm>
-            <a:off x="6428232" y="3364992"/>
-            <a:ext cx="1645920" cy="475488"/>
-          </a:xfrm>
-          <a:prstGeom prst="rect">
-            <a:avLst>
-              <a:gd name="adj" fmla="val 9615"/>
-            </a:avLst>
-          </a:prstGeom>
-          <a:solidFill>
-            <a:srgbClr val="FFFFFF"/>
-          </a:solidFill>
-          <a:ln w="12700">
-            <a:solidFill>
-              <a:srgbClr val="0D9488"/>
-            </a:solidFill>
-            <a:prstDash val="solid"/>
-          </a:ln>
-        </p:spPr>
-      </p:sp>
-      <p:sp>
-        <p:nvSpPr>
-          <p:cNvPr id="38" name="Text 36"/>
-          <p:cNvSpPr/>
-          <p:nvPr/>
-        </p:nvSpPr>
-        <p:spPr>
-          <a:xfrm>
-            <a:off x="6428232" y="3364992"/>
-            <a:ext cx="1645920" cy="475488"/>
-          </a:xfrm>
-          <a:prstGeom prst="rect">
-            <a:avLst/>
-          </a:prstGeom>
-          <a:noFill/>
-          <a:ln/>
-        </p:spPr>
-        <p:txBody>
-          <a:bodyPr wrap="square" lIns="0" tIns="0" rIns="0" bIns="0" rtlCol="0" anchor="ctr"/>
-          <a:lstStyle/>
-          <a:p>
-            <a:pPr algn="ctr" indent="0" marL="0">
-              <a:buNone/>
-            </a:pPr>
-            <a:r>
-              <a:rPr lang="en-US" sz="1400" b="1" dirty="0">
-                <a:solidFill>
-                  <a:srgbClr val="0D9488"/>
-                </a:solidFill>
-                <a:latin typeface="Trebuchet MS" pitchFamily="34" charset="0"/>
-                <a:ea typeface="Trebuchet MS" pitchFamily="34" charset="-122"/>
-                <a:cs typeface="Trebuchet MS" pitchFamily="34" charset="-120"/>
-              </a:rPr>
-              <a:t>turned</a:t>
-            </a:r>
-            <a:endParaRPr lang="en-US" sz="1400" dirty="0"/>
-          </a:p>
-        </p:txBody>
-      </p:sp>
-      <p:sp>
-        <p:nvSpPr>
-          <p:cNvPr id="39" name="Shape 37"/>
-          <p:cNvSpPr/>
-          <p:nvPr/>
-        </p:nvSpPr>
-        <p:spPr>
-          <a:xfrm>
-            <a:off x="365760" y="4096512"/>
-            <a:ext cx="1371600" cy="804672"/>
+              <a:t>Phonemes</a:t>
+            </a:r>
+            <a:endParaRPr lang="en-US" sz="1100" dirty="0"/>
+          </a:p>
+        </p:txBody>
+      </p:sp>
+      <p:sp>
+        <p:nvSpPr>
+          <p:cNvPr id="38" name="Shape 36"/>
+          <p:cNvSpPr/>
+          <p:nvPr/>
+        </p:nvSpPr>
+        <p:spPr>
+          <a:xfrm>
+            <a:off x="1874520" y="4096512"/>
+            <a:ext cx="6903720" cy="804672"/>
           </a:xfrm>
           <a:prstGeom prst="rect">
             <a:avLst>
@@ -22237,85 +22079,19 @@
             </a:avLst>
           </a:prstGeom>
           <a:solidFill>
-            <a:srgbClr val="E2E8F0"/>
+            <a:srgbClr val="F8FAFC"/>
           </a:solidFill>
           <a:ln w="12700">
             <a:solidFill>
               <a:srgbClr val="E2E8F0"/>
             </a:solidFill>
-            <a:prstDash val="solid"/>
-          </a:ln>
-        </p:spPr>
-      </p:sp>
-      <p:sp>
-        <p:nvSpPr>
-          <p:cNvPr id="40" name="Text 38"/>
-          <p:cNvSpPr/>
-          <p:nvPr/>
-        </p:nvSpPr>
-        <p:spPr>
-          <a:xfrm>
-            <a:off x="365760" y="4096512"/>
-            <a:ext cx="1371600" cy="804672"/>
-          </a:xfrm>
-          <a:prstGeom prst="rect">
-            <a:avLst/>
-          </a:prstGeom>
-          <a:noFill/>
-          <a:ln/>
-        </p:spPr>
-        <p:txBody>
-          <a:bodyPr wrap="square" lIns="0" tIns="0" rIns="0" bIns="0" rtlCol="0" anchor="ctr"/>
-          <a:lstStyle/>
-          <a:p>
-            <a:pPr algn="ctr" indent="0" marL="0">
-              <a:buNone/>
-            </a:pPr>
-            <a:r>
-              <a:rPr lang="en-US" sz="1100" b="1" dirty="0">
-                <a:solidFill>
-                  <a:srgbClr val="475569"/>
-                </a:solidFill>
-                <a:latin typeface="Trebuchet MS" pitchFamily="34" charset="0"/>
-                <a:ea typeface="Trebuchet MS" pitchFamily="34" charset="-122"/>
-                <a:cs typeface="Trebuchet MS" pitchFamily="34" charset="-120"/>
-              </a:rPr>
-              <a:t>Phonemes</a:t>
-            </a:r>
-            <a:endParaRPr lang="en-US" sz="1100" dirty="0"/>
-          </a:p>
-        </p:txBody>
-      </p:sp>
-      <p:sp>
-        <p:nvSpPr>
-          <p:cNvPr id="41" name="Shape 39"/>
-          <p:cNvSpPr/>
-          <p:nvPr/>
-        </p:nvSpPr>
-        <p:spPr>
-          <a:xfrm>
-            <a:off x="1874520" y="4096512"/>
-            <a:ext cx="6903720" cy="804672"/>
-          </a:xfrm>
-          <a:prstGeom prst="rect">
-            <a:avLst>
-              <a:gd name="adj" fmla="val 6818"/>
-            </a:avLst>
-          </a:prstGeom>
-          <a:solidFill>
-            <a:srgbClr val="F8FAFC"/>
-          </a:solidFill>
-          <a:ln w="12700">
-            <a:solidFill>
-              <a:srgbClr val="E2E8F0"/>
-            </a:solidFill>
             <a:prstDash val="dash"/>
           </a:ln>
         </p:spPr>
       </p:sp>
       <p:sp>
         <p:nvSpPr>
-          <p:cNvPr id="42" name="Text 40"/>
+          <p:cNvPr id="39" name="Text 37"/>
           <p:cNvSpPr/>
           <p:nvPr/>
         </p:nvSpPr>
@@ -22777,7 +22553,7 @@
                 <a:ea typeface="Trebuchet MS" pitchFamily="34" charset="-122"/>
                 <a:cs typeface="Trebuchet MS" pitchFamily="34" charset="-120"/>
               </a:rPr>
-              <a:t>unreturned</a:t>
+              <a:t>returner</a:t>
             </a:r>
             <a:endParaRPr lang="en-US" sz="2800" dirty="0"/>
           </a:p>
@@ -22857,8 +22633,8 @@
         </p:nvSpPr>
         <p:spPr>
           <a:xfrm>
-            <a:off x="1989734" y="2258568"/>
-            <a:ext cx="1581912" cy="292608"/>
+            <a:off x="2221992" y="2258568"/>
+            <a:ext cx="1828800" cy="292608"/>
           </a:xfrm>
           <a:prstGeom prst="rect">
             <a:avLst>
@@ -22891,8 +22667,8 @@
         </p:nvSpPr>
         <p:spPr>
           <a:xfrm>
-            <a:off x="1989734" y="2258568"/>
-            <a:ext cx="1581912" cy="292608"/>
+            <a:off x="2221992" y="2258568"/>
+            <a:ext cx="1828800" cy="292608"/>
           </a:xfrm>
           <a:prstGeom prst="rect">
             <a:avLst/>
@@ -22916,7 +22692,7 @@
                 <a:ea typeface="Trebuchet MS" pitchFamily="34" charset="-122"/>
                 <a:cs typeface="Trebuchet MS" pitchFamily="34" charset="-120"/>
               </a:rPr>
-              <a:t>un</a:t>
+              <a:t>re</a:t>
             </a:r>
             <a:endParaRPr lang="en-US" sz="1300" dirty="0"/>
           </a:p>
@@ -22930,8 +22706,8 @@
         </p:nvSpPr>
         <p:spPr>
           <a:xfrm>
-            <a:off x="1989734" y="2569464"/>
-            <a:ext cx="1581912" cy="201168"/>
+            <a:off x="2221992" y="2569464"/>
+            <a:ext cx="1828800" cy="201168"/>
           </a:xfrm>
           <a:prstGeom prst="rect">
             <a:avLst/>
@@ -22955,7 +22731,7 @@
                 <a:ea typeface="Calibri" pitchFamily="34" charset="-122"/>
                 <a:cs typeface="Calibri" pitchFamily="34" charset="-120"/>
               </a:rPr>
-              <a:t>not</a:t>
+              <a:t>back, again</a:t>
             </a:r>
             <a:endParaRPr lang="en-US" sz="850" dirty="0"/>
           </a:p>
@@ -22969,8 +22745,8 @@
         </p:nvSpPr>
         <p:spPr>
           <a:xfrm>
-            <a:off x="3659429" y="2258568"/>
-            <a:ext cx="1581912" cy="292608"/>
+            <a:off x="4370832" y="2258568"/>
+            <a:ext cx="1828800" cy="292608"/>
           </a:xfrm>
           <a:prstGeom prst="rect">
             <a:avLst>
@@ -22978,11 +22754,11 @@
             </a:avLst>
           </a:prstGeom>
           <a:solidFill>
-            <a:srgbClr val="DDD6FE"/>
+            <a:srgbClr val="FCE7F3"/>
           </a:solidFill>
           <a:ln w="19050">
             <a:solidFill>
-              <a:srgbClr val="7C3AED"/>
+              <a:srgbClr val="DB2777"/>
             </a:solidFill>
             <a:prstDash val="solid"/>
           </a:ln>
@@ -23003,8 +22779,8 @@
         </p:nvSpPr>
         <p:spPr>
           <a:xfrm>
-            <a:off x="3659429" y="2258568"/>
-            <a:ext cx="1581912" cy="292608"/>
+            <a:off x="4370832" y="2258568"/>
+            <a:ext cx="1828800" cy="292608"/>
           </a:xfrm>
           <a:prstGeom prst="rect">
             <a:avLst/>
@@ -23022,13 +22798,13 @@
             <a:r>
               <a:rPr lang="en-US" sz="1300" b="1" dirty="0">
                 <a:solidFill>
-                  <a:srgbClr val="4C1D95"/>
+                  <a:srgbClr val="9D174D"/>
                 </a:solidFill>
                 <a:latin typeface="Trebuchet MS" pitchFamily="34" charset="0"/>
                 <a:ea typeface="Trebuchet MS" pitchFamily="34" charset="-122"/>
                 <a:cs typeface="Trebuchet MS" pitchFamily="34" charset="-120"/>
               </a:rPr>
-              <a:t>re</a:t>
+              <a:t>turn</a:t>
             </a:r>
             <a:endParaRPr lang="en-US" sz="1300" dirty="0"/>
           </a:p>
@@ -23042,8 +22818,8 @@
         </p:nvSpPr>
         <p:spPr>
           <a:xfrm>
-            <a:off x="3659429" y="2569464"/>
-            <a:ext cx="1581912" cy="201168"/>
+            <a:off x="4370832" y="2569464"/>
+            <a:ext cx="1828800" cy="201168"/>
           </a:xfrm>
           <a:prstGeom prst="rect">
             <a:avLst/>
@@ -23067,7 +22843,7 @@
                 <a:ea typeface="Calibri" pitchFamily="34" charset="-122"/>
                 <a:cs typeface="Calibri" pitchFamily="34" charset="-120"/>
               </a:rPr>
-              <a:t>back, again</a:t>
+              <a:t>turn, go back</a:t>
             </a:r>
             <a:endParaRPr lang="en-US" sz="850" dirty="0"/>
           </a:p>
@@ -23081,8 +22857,8 @@
         </p:nvSpPr>
         <p:spPr>
           <a:xfrm>
-            <a:off x="5329123" y="2258568"/>
-            <a:ext cx="1581912" cy="292608"/>
+            <a:off x="6519672" y="2258568"/>
+            <a:ext cx="1828800" cy="292608"/>
           </a:xfrm>
           <a:prstGeom prst="rect">
             <a:avLst>
@@ -23115,8 +22891,8 @@
         </p:nvSpPr>
         <p:spPr>
           <a:xfrm>
-            <a:off x="5329123" y="2258568"/>
-            <a:ext cx="1581912" cy="292608"/>
+            <a:off x="6519672" y="2258568"/>
+            <a:ext cx="1828800" cy="292608"/>
           </a:xfrm>
           <a:prstGeom prst="rect">
             <a:avLst/>
@@ -23140,7 +22916,7 @@
                 <a:ea typeface="Trebuchet MS" pitchFamily="34" charset="-122"/>
                 <a:cs typeface="Trebuchet MS" pitchFamily="34" charset="-120"/>
               </a:rPr>
-              <a:t>turn</a:t>
+              <a:t>er</a:t>
             </a:r>
             <a:endParaRPr lang="en-US" sz="1300" dirty="0"/>
           </a:p>
@@ -23154,8 +22930,8 @@
         </p:nvSpPr>
         <p:spPr>
           <a:xfrm>
-            <a:off x="5329123" y="2569464"/>
-            <a:ext cx="1581912" cy="201168"/>
+            <a:off x="6519672" y="2569464"/>
+            <a:ext cx="1828800" cy="201168"/>
           </a:xfrm>
           <a:prstGeom prst="rect">
             <a:avLst/>
@@ -23179,7 +22955,7 @@
                 <a:ea typeface="Calibri" pitchFamily="34" charset="-122"/>
                 <a:cs typeface="Calibri" pitchFamily="34" charset="-120"/>
               </a:rPr>
-              <a:t>to turn, go around</a:t>
+              <a:t>a person who does something</a:t>
             </a:r>
             <a:endParaRPr lang="en-US" sz="850" dirty="0"/>
           </a:p>
@@ -23193,30 +22969,23 @@
         </p:nvSpPr>
         <p:spPr>
           <a:xfrm>
-            <a:off x="6998818" y="2258568"/>
-            <a:ext cx="1581912" cy="292608"/>
+            <a:off x="365760" y="3273552"/>
+            <a:ext cx="1371600" cy="658368"/>
           </a:xfrm>
           <a:prstGeom prst="rect">
             <a:avLst>
-              <a:gd name="adj" fmla="val 25000"/>
+              <a:gd name="adj" fmla="val 8333"/>
             </a:avLst>
           </a:prstGeom>
           <a:solidFill>
-            <a:srgbClr val="FCE7F3"/>
-          </a:solidFill>
-          <a:ln w="19050">
-            <a:solidFill>
-              <a:srgbClr val="DB2777"/>
-            </a:solidFill>
-            <a:prstDash val="solid"/>
-          </a:ln>
-          <a:effectLst>
-            <a:outerShdw sx="100000" sy="100000" kx="0" ky="0" algn="bl" rotWithShape="0" blurRad="101600" dist="38100" dir="8100000">
-              <a:srgbClr val="000000">
-                <a:alpha val="12000"/>
-              </a:srgbClr>
-            </a:outerShdw>
-          </a:effectLst>
+            <a:srgbClr val="E2E8F0"/>
+          </a:solidFill>
+          <a:ln w="12700">
+            <a:solidFill>
+              <a:srgbClr val="E2E8F0"/>
+            </a:solidFill>
+            <a:prstDash val="solid"/>
+          </a:ln>
         </p:spPr>
       </p:sp>
       <p:sp>
@@ -23227,86 +22996,47 @@
         </p:nvSpPr>
         <p:spPr>
           <a:xfrm>
-            <a:off x="6998818" y="2258568"/>
-            <a:ext cx="1581912" cy="292608"/>
-          </a:xfrm>
-          <a:prstGeom prst="rect">
-            <a:avLst/>
-          </a:prstGeom>
-          <a:noFill/>
-          <a:ln/>
-        </p:spPr>
-        <p:txBody>
-          <a:bodyPr wrap="square" lIns="0" tIns="0" rIns="0" bIns="0" rtlCol="0" anchor="ctr"/>
-          <a:lstStyle/>
-          <a:p>
-            <a:pPr algn="ctr" indent="0" marL="0">
-              <a:buNone/>
-            </a:pPr>
-            <a:r>
-              <a:rPr lang="en-US" sz="1300" b="1" dirty="0">
-                <a:solidFill>
-                  <a:srgbClr val="9D174D"/>
+            <a:off x="365760" y="3273552"/>
+            <a:ext cx="1371600" cy="658368"/>
+          </a:xfrm>
+          <a:prstGeom prst="rect">
+            <a:avLst/>
+          </a:prstGeom>
+          <a:noFill/>
+          <a:ln/>
+        </p:spPr>
+        <p:txBody>
+          <a:bodyPr wrap="square" lIns="0" tIns="0" rIns="0" bIns="0" rtlCol="0" anchor="ctr"/>
+          <a:lstStyle/>
+          <a:p>
+            <a:pPr algn="ctr" indent="0" marL="0">
+              <a:buNone/>
+            </a:pPr>
+            <a:r>
+              <a:rPr lang="en-US" sz="1100" b="1" dirty="0">
+                <a:solidFill>
+                  <a:srgbClr val="475569"/>
                 </a:solidFill>
                 <a:latin typeface="Trebuchet MS" pitchFamily="34" charset="0"/>
                 <a:ea typeface="Trebuchet MS" pitchFamily="34" charset="-122"/>
                 <a:cs typeface="Trebuchet MS" pitchFamily="34" charset="-120"/>
               </a:rPr>
-              <a:t>ed</a:t>
-            </a:r>
-            <a:endParaRPr lang="en-US" sz="1300" dirty="0"/>
-          </a:p>
-        </p:txBody>
-      </p:sp>
-      <p:sp>
-        <p:nvSpPr>
-          <p:cNvPr id="27" name="Text 25"/>
-          <p:cNvSpPr/>
-          <p:nvPr/>
-        </p:nvSpPr>
-        <p:spPr>
-          <a:xfrm>
-            <a:off x="6998818" y="2569464"/>
-            <a:ext cx="1581912" cy="201168"/>
-          </a:xfrm>
-          <a:prstGeom prst="rect">
-            <a:avLst/>
-          </a:prstGeom>
-          <a:noFill/>
-          <a:ln/>
-        </p:spPr>
-        <p:txBody>
-          <a:bodyPr wrap="square" lIns="0" tIns="0" rIns="0" bIns="0" rtlCol="0" anchor="t"/>
-          <a:lstStyle/>
-          <a:p>
-            <a:pPr algn="ctr" indent="0" marL="0">
-              <a:buNone/>
-            </a:pPr>
-            <a:r>
-              <a:rPr lang="en-US" sz="850" dirty="0">
-                <a:solidFill>
-                  <a:srgbClr val="475569"/>
-                </a:solidFill>
-                <a:latin typeface="Calibri" pitchFamily="34" charset="0"/>
-                <a:ea typeface="Calibri" pitchFamily="34" charset="-122"/>
-                <a:cs typeface="Calibri" pitchFamily="34" charset="-120"/>
-              </a:rPr>
-              <a:t>in the past</a:t>
-            </a:r>
-            <a:endParaRPr lang="en-US" sz="850" dirty="0"/>
-          </a:p>
-        </p:txBody>
-      </p:sp>
-      <p:sp>
-        <p:nvSpPr>
-          <p:cNvPr id="28" name="Shape 26"/>
-          <p:cNvSpPr/>
-          <p:nvPr/>
-        </p:nvSpPr>
-        <p:spPr>
-          <a:xfrm>
-            <a:off x="365760" y="3273552"/>
-            <a:ext cx="1371600" cy="658368"/>
+              <a:t>Syllables</a:t>
+            </a:r>
+            <a:endParaRPr lang="en-US" sz="1100" dirty="0"/>
+          </a:p>
+        </p:txBody>
+      </p:sp>
+      <p:sp>
+        <p:nvSpPr>
+          <p:cNvPr id="27" name="Shape 25"/>
+          <p:cNvSpPr/>
+          <p:nvPr/>
+        </p:nvSpPr>
+        <p:spPr>
+          <a:xfrm>
+            <a:off x="1874520" y="3273552"/>
+            <a:ext cx="6903720" cy="658368"/>
           </a:xfrm>
           <a:prstGeom prst="rect">
             <a:avLst>
@@ -23314,11 +23044,38 @@
             </a:avLst>
           </a:prstGeom>
           <a:solidFill>
-            <a:srgbClr val="E2E8F0"/>
-          </a:solidFill>
-          <a:ln w="12700">
-            <a:solidFill>
-              <a:srgbClr val="E2E8F0"/>
+            <a:srgbClr val="CCFBF1"/>
+          </a:solidFill>
+          <a:ln w="12700">
+            <a:solidFill>
+              <a:srgbClr val="0D9488"/>
+            </a:solidFill>
+            <a:prstDash val="solid"/>
+          </a:ln>
+        </p:spPr>
+      </p:sp>
+      <p:sp>
+        <p:nvSpPr>
+          <p:cNvPr id="28" name="Shape 26"/>
+          <p:cNvSpPr/>
+          <p:nvPr/>
+        </p:nvSpPr>
+        <p:spPr>
+          <a:xfrm>
+            <a:off x="2313432" y="3364992"/>
+            <a:ext cx="1645920" cy="475488"/>
+          </a:xfrm>
+          <a:prstGeom prst="rect">
+            <a:avLst>
+              <a:gd name="adj" fmla="val 9615"/>
+            </a:avLst>
+          </a:prstGeom>
+          <a:solidFill>
+            <a:srgbClr val="FFFFFF"/>
+          </a:solidFill>
+          <a:ln w="12700">
+            <a:solidFill>
+              <a:srgbClr val="0D9488"/>
             </a:solidFill>
             <a:prstDash val="solid"/>
           </a:ln>
@@ -23332,32 +23089,308 @@
         </p:nvSpPr>
         <p:spPr>
           <a:xfrm>
-            <a:off x="365760" y="3273552"/>
-            <a:ext cx="1371600" cy="658368"/>
-          </a:xfrm>
-          <a:prstGeom prst="rect">
-            <a:avLst/>
-          </a:prstGeom>
-          <a:noFill/>
-          <a:ln/>
-        </p:spPr>
-        <p:txBody>
-          <a:bodyPr wrap="square" lIns="0" tIns="0" rIns="0" bIns="0" rtlCol="0" anchor="ctr"/>
-          <a:lstStyle/>
-          <a:p>
-            <a:pPr algn="ctr" indent="0" marL="0">
-              <a:buNone/>
-            </a:pPr>
-            <a:r>
-              <a:rPr lang="en-US" sz="1100" b="1" dirty="0">
-                <a:solidFill>
-                  <a:srgbClr val="475569"/>
+            <a:off x="2313432" y="3364992"/>
+            <a:ext cx="1645920" cy="475488"/>
+          </a:xfrm>
+          <a:prstGeom prst="rect">
+            <a:avLst/>
+          </a:prstGeom>
+          <a:noFill/>
+          <a:ln/>
+        </p:spPr>
+        <p:txBody>
+          <a:bodyPr wrap="square" lIns="0" tIns="0" rIns="0" bIns="0" rtlCol="0" anchor="ctr"/>
+          <a:lstStyle/>
+          <a:p>
+            <a:pPr algn="ctr" indent="0" marL="0">
+              <a:buNone/>
+            </a:pPr>
+            <a:r>
+              <a:rPr lang="en-US" sz="1400" b="1" dirty="0">
+                <a:solidFill>
+                  <a:srgbClr val="0D9488"/>
                 </a:solidFill>
                 <a:latin typeface="Trebuchet MS" pitchFamily="34" charset="0"/>
                 <a:ea typeface="Trebuchet MS" pitchFamily="34" charset="-122"/>
                 <a:cs typeface="Trebuchet MS" pitchFamily="34" charset="-120"/>
               </a:rPr>
-              <a:t>Syllables</a:t>
+              <a:t>re</a:t>
+            </a:r>
+            <a:endParaRPr lang="en-US" sz="1400" dirty="0"/>
+          </a:p>
+        </p:txBody>
+      </p:sp>
+      <p:sp>
+        <p:nvSpPr>
+          <p:cNvPr id="30" name="Text 28"/>
+          <p:cNvSpPr/>
+          <p:nvPr/>
+        </p:nvSpPr>
+        <p:spPr>
+          <a:xfrm>
+            <a:off x="3959352" y="3364992"/>
+            <a:ext cx="411480" cy="475488"/>
+          </a:xfrm>
+          <a:prstGeom prst="rect">
+            <a:avLst/>
+          </a:prstGeom>
+          <a:noFill/>
+          <a:ln/>
+        </p:spPr>
+        <p:txBody>
+          <a:bodyPr wrap="square" lIns="0" tIns="0" rIns="0" bIns="0" rtlCol="0" anchor="ctr"/>
+          <a:lstStyle/>
+          <a:p>
+            <a:pPr algn="ctr" indent="0" marL="0">
+              <a:buNone/>
+            </a:pPr>
+            <a:r>
+              <a:rPr lang="en-US" sz="1600" b="1" dirty="0">
+                <a:solidFill>
+                  <a:srgbClr val="0D9488"/>
+                </a:solidFill>
+                <a:latin typeface="Trebuchet MS" pitchFamily="34" charset="0"/>
+                <a:ea typeface="Trebuchet MS" pitchFamily="34" charset="-122"/>
+                <a:cs typeface="Trebuchet MS" pitchFamily="34" charset="-120"/>
+              </a:rPr>
+              <a:t>·</a:t>
+            </a:r>
+            <a:endParaRPr lang="en-US" sz="1600" dirty="0"/>
+          </a:p>
+        </p:txBody>
+      </p:sp>
+      <p:sp>
+        <p:nvSpPr>
+          <p:cNvPr id="31" name="Shape 29"/>
+          <p:cNvSpPr/>
+          <p:nvPr/>
+        </p:nvSpPr>
+        <p:spPr>
+          <a:xfrm>
+            <a:off x="4370832" y="3364992"/>
+            <a:ext cx="1645920" cy="475488"/>
+          </a:xfrm>
+          <a:prstGeom prst="rect">
+            <a:avLst>
+              <a:gd name="adj" fmla="val 9615"/>
+            </a:avLst>
+          </a:prstGeom>
+          <a:solidFill>
+            <a:srgbClr val="FFFFFF"/>
+          </a:solidFill>
+          <a:ln w="12700">
+            <a:solidFill>
+              <a:srgbClr val="0D9488"/>
+            </a:solidFill>
+            <a:prstDash val="solid"/>
+          </a:ln>
+        </p:spPr>
+      </p:sp>
+      <p:sp>
+        <p:nvSpPr>
+          <p:cNvPr id="32" name="Text 30"/>
+          <p:cNvSpPr/>
+          <p:nvPr/>
+        </p:nvSpPr>
+        <p:spPr>
+          <a:xfrm>
+            <a:off x="4370832" y="3364992"/>
+            <a:ext cx="1645920" cy="475488"/>
+          </a:xfrm>
+          <a:prstGeom prst="rect">
+            <a:avLst/>
+          </a:prstGeom>
+          <a:noFill/>
+          <a:ln/>
+        </p:spPr>
+        <p:txBody>
+          <a:bodyPr wrap="square" lIns="0" tIns="0" rIns="0" bIns="0" rtlCol="0" anchor="ctr"/>
+          <a:lstStyle/>
+          <a:p>
+            <a:pPr algn="ctr" indent="0" marL="0">
+              <a:buNone/>
+            </a:pPr>
+            <a:r>
+              <a:rPr lang="en-US" sz="1400" b="1" dirty="0">
+                <a:solidFill>
+                  <a:srgbClr val="0D9488"/>
+                </a:solidFill>
+                <a:latin typeface="Trebuchet MS" pitchFamily="34" charset="0"/>
+                <a:ea typeface="Trebuchet MS" pitchFamily="34" charset="-122"/>
+                <a:cs typeface="Trebuchet MS" pitchFamily="34" charset="-120"/>
+              </a:rPr>
+              <a:t>turn</a:t>
+            </a:r>
+            <a:endParaRPr lang="en-US" sz="1400" dirty="0"/>
+          </a:p>
+        </p:txBody>
+      </p:sp>
+      <p:sp>
+        <p:nvSpPr>
+          <p:cNvPr id="33" name="Text 31"/>
+          <p:cNvSpPr/>
+          <p:nvPr/>
+        </p:nvSpPr>
+        <p:spPr>
+          <a:xfrm>
+            <a:off x="6016752" y="3364992"/>
+            <a:ext cx="411480" cy="475488"/>
+          </a:xfrm>
+          <a:prstGeom prst="rect">
+            <a:avLst/>
+          </a:prstGeom>
+          <a:noFill/>
+          <a:ln/>
+        </p:spPr>
+        <p:txBody>
+          <a:bodyPr wrap="square" lIns="0" tIns="0" rIns="0" bIns="0" rtlCol="0" anchor="ctr"/>
+          <a:lstStyle/>
+          <a:p>
+            <a:pPr algn="ctr" indent="0" marL="0">
+              <a:buNone/>
+            </a:pPr>
+            <a:r>
+              <a:rPr lang="en-US" sz="1600" b="1" dirty="0">
+                <a:solidFill>
+                  <a:srgbClr val="0D9488"/>
+                </a:solidFill>
+                <a:latin typeface="Trebuchet MS" pitchFamily="34" charset="0"/>
+                <a:ea typeface="Trebuchet MS" pitchFamily="34" charset="-122"/>
+                <a:cs typeface="Trebuchet MS" pitchFamily="34" charset="-120"/>
+              </a:rPr>
+              <a:t>·</a:t>
+            </a:r>
+            <a:endParaRPr lang="en-US" sz="1600" dirty="0"/>
+          </a:p>
+        </p:txBody>
+      </p:sp>
+      <p:sp>
+        <p:nvSpPr>
+          <p:cNvPr id="34" name="Shape 32"/>
+          <p:cNvSpPr/>
+          <p:nvPr/>
+        </p:nvSpPr>
+        <p:spPr>
+          <a:xfrm>
+            <a:off x="6428232" y="3364992"/>
+            <a:ext cx="1645920" cy="475488"/>
+          </a:xfrm>
+          <a:prstGeom prst="rect">
+            <a:avLst>
+              <a:gd name="adj" fmla="val 9615"/>
+            </a:avLst>
+          </a:prstGeom>
+          <a:solidFill>
+            <a:srgbClr val="FFFFFF"/>
+          </a:solidFill>
+          <a:ln w="12700">
+            <a:solidFill>
+              <a:srgbClr val="0D9488"/>
+            </a:solidFill>
+            <a:prstDash val="solid"/>
+          </a:ln>
+        </p:spPr>
+      </p:sp>
+      <p:sp>
+        <p:nvSpPr>
+          <p:cNvPr id="35" name="Text 33"/>
+          <p:cNvSpPr/>
+          <p:nvPr/>
+        </p:nvSpPr>
+        <p:spPr>
+          <a:xfrm>
+            <a:off x="6428232" y="3364992"/>
+            <a:ext cx="1645920" cy="475488"/>
+          </a:xfrm>
+          <a:prstGeom prst="rect">
+            <a:avLst/>
+          </a:prstGeom>
+          <a:noFill/>
+          <a:ln/>
+        </p:spPr>
+        <p:txBody>
+          <a:bodyPr wrap="square" lIns="0" tIns="0" rIns="0" bIns="0" rtlCol="0" anchor="ctr"/>
+          <a:lstStyle/>
+          <a:p>
+            <a:pPr algn="ctr" indent="0" marL="0">
+              <a:buNone/>
+            </a:pPr>
+            <a:r>
+              <a:rPr lang="en-US" sz="1400" b="1" dirty="0">
+                <a:solidFill>
+                  <a:srgbClr val="0D9488"/>
+                </a:solidFill>
+                <a:latin typeface="Trebuchet MS" pitchFamily="34" charset="0"/>
+                <a:ea typeface="Trebuchet MS" pitchFamily="34" charset="-122"/>
+                <a:cs typeface="Trebuchet MS" pitchFamily="34" charset="-120"/>
+              </a:rPr>
+              <a:t>er</a:t>
+            </a:r>
+            <a:endParaRPr lang="en-US" sz="1400" dirty="0"/>
+          </a:p>
+        </p:txBody>
+      </p:sp>
+      <p:sp>
+        <p:nvSpPr>
+          <p:cNvPr id="36" name="Shape 34"/>
+          <p:cNvSpPr/>
+          <p:nvPr/>
+        </p:nvSpPr>
+        <p:spPr>
+          <a:xfrm>
+            <a:off x="365760" y="4096512"/>
+            <a:ext cx="1371600" cy="804672"/>
+          </a:xfrm>
+          <a:prstGeom prst="rect">
+            <a:avLst>
+              <a:gd name="adj" fmla="val 6818"/>
+            </a:avLst>
+          </a:prstGeom>
+          <a:solidFill>
+            <a:srgbClr val="E2E8F0"/>
+          </a:solidFill>
+          <a:ln w="12700">
+            <a:solidFill>
+              <a:srgbClr val="E2E8F0"/>
+            </a:solidFill>
+            <a:prstDash val="solid"/>
+          </a:ln>
+        </p:spPr>
+      </p:sp>
+      <p:sp>
+        <p:nvSpPr>
+          <p:cNvPr id="37" name="Text 35"/>
+          <p:cNvSpPr/>
+          <p:nvPr/>
+        </p:nvSpPr>
+        <p:spPr>
+          <a:xfrm>
+            <a:off x="365760" y="4096512"/>
+            <a:ext cx="1371600" cy="804672"/>
+          </a:xfrm>
+          <a:prstGeom prst="rect">
+            <a:avLst/>
+          </a:prstGeom>
+          <a:noFill/>
+          <a:ln/>
+        </p:spPr>
+        <p:txBody>
+          <a:bodyPr wrap="square" lIns="0" tIns="0" rIns="0" bIns="0" rtlCol="0" anchor="ctr"/>
+          <a:lstStyle/>
+          <a:p>
+            <a:pPr algn="ctr" indent="0" marL="0">
+              <a:buNone/>
+            </a:pPr>
+            <a:r>
+              <a:rPr lang="en-US" sz="1100" b="1" dirty="0">
+                <a:solidFill>
+                  <a:srgbClr val="475569"/>
+                </a:solidFill>
+                <a:latin typeface="Trebuchet MS" pitchFamily="34" charset="0"/>
+                <a:ea typeface="Trebuchet MS" pitchFamily="34" charset="-122"/>
+                <a:cs typeface="Trebuchet MS" pitchFamily="34" charset="-120"/>
+              </a:rPr>
+              <a:t>Phonemes</a:t>
             </a:r>
             <a:endParaRPr lang="en-US" sz="1100" dirty="0"/>
           </a:p>
@@ -23365,13 +23398,13 @@
       </p:sp>
       <p:sp>
         <p:nvSpPr>
-          <p:cNvPr id="30" name="Shape 28"/>
-          <p:cNvSpPr/>
-          <p:nvPr/>
-        </p:nvSpPr>
-        <p:spPr>
-          <a:xfrm>
-            <a:off x="1874520" y="3273552"/>
+          <p:cNvPr id="38" name="Shape 36"/>
+          <p:cNvSpPr/>
+          <p:nvPr/>
+        </p:nvSpPr>
+        <p:spPr>
+          <a:xfrm>
+            <a:off x="1874520" y="4096512"/>
             <a:ext cx="6903720" cy="658368"/>
           </a:xfrm>
           <a:prstGeom prst="rect">
@@ -23380,30 +23413,30 @@
             </a:avLst>
           </a:prstGeom>
           <a:solidFill>
-            <a:srgbClr val="CCFBF1"/>
-          </a:solidFill>
-          <a:ln w="12700">
-            <a:solidFill>
-              <a:srgbClr val="0D9488"/>
-            </a:solidFill>
-            <a:prstDash val="solid"/>
-          </a:ln>
-        </p:spPr>
-      </p:sp>
-      <p:sp>
-        <p:nvSpPr>
-          <p:cNvPr id="31" name="Shape 29"/>
-          <p:cNvSpPr/>
-          <p:nvPr/>
-        </p:nvSpPr>
-        <p:spPr>
-          <a:xfrm>
-            <a:off x="2313432" y="3364992"/>
-            <a:ext cx="1645920" cy="475488"/>
+            <a:srgbClr val="FCE7F3"/>
+          </a:solidFill>
+          <a:ln w="12700">
+            <a:solidFill>
+              <a:srgbClr val="DB2777"/>
+            </a:solidFill>
+            <a:prstDash val="solid"/>
+          </a:ln>
+        </p:spPr>
+      </p:sp>
+      <p:sp>
+        <p:nvSpPr>
+          <p:cNvPr id="39" name="Shape 37"/>
+          <p:cNvSpPr/>
+          <p:nvPr/>
+        </p:nvSpPr>
+        <p:spPr>
+          <a:xfrm>
+            <a:off x="2254649" y="4169664"/>
+            <a:ext cx="685800" cy="475488"/>
           </a:xfrm>
           <a:prstGeom prst="rect">
             <a:avLst>
-              <a:gd name="adj" fmla="val 9615"/>
+              <a:gd name="adj" fmla="val 7692"/>
             </a:avLst>
           </a:prstGeom>
           <a:solidFill>
@@ -23411,104 +23444,131 @@
           </a:solidFill>
           <a:ln w="12700">
             <a:solidFill>
-              <a:srgbClr val="0D9488"/>
-            </a:solidFill>
-            <a:prstDash val="solid"/>
-          </a:ln>
-        </p:spPr>
-      </p:sp>
-      <p:sp>
-        <p:nvSpPr>
-          <p:cNvPr id="32" name="Text 30"/>
-          <p:cNvSpPr/>
-          <p:nvPr/>
-        </p:nvSpPr>
-        <p:spPr>
-          <a:xfrm>
-            <a:off x="2313432" y="3364992"/>
-            <a:ext cx="1645920" cy="475488"/>
-          </a:xfrm>
-          <a:prstGeom prst="rect">
-            <a:avLst/>
-          </a:prstGeom>
-          <a:noFill/>
-          <a:ln/>
-        </p:spPr>
-        <p:txBody>
-          <a:bodyPr wrap="square" lIns="0" tIns="0" rIns="0" bIns="0" rtlCol="0" anchor="ctr"/>
-          <a:lstStyle/>
-          <a:p>
-            <a:pPr algn="ctr" indent="0" marL="0">
-              <a:buNone/>
-            </a:pPr>
-            <a:r>
-              <a:rPr lang="en-US" sz="1400" b="1" dirty="0">
-                <a:solidFill>
-                  <a:srgbClr val="0D9488"/>
+              <a:srgbClr val="DB2777"/>
+            </a:solidFill>
+            <a:prstDash val="solid"/>
+          </a:ln>
+        </p:spPr>
+      </p:sp>
+      <p:sp>
+        <p:nvSpPr>
+          <p:cNvPr id="40" name="Text 38"/>
+          <p:cNvSpPr/>
+          <p:nvPr/>
+        </p:nvSpPr>
+        <p:spPr>
+          <a:xfrm>
+            <a:off x="2254649" y="4169664"/>
+            <a:ext cx="685800" cy="475488"/>
+          </a:xfrm>
+          <a:prstGeom prst="rect">
+            <a:avLst/>
+          </a:prstGeom>
+          <a:noFill/>
+          <a:ln/>
+        </p:spPr>
+        <p:txBody>
+          <a:bodyPr wrap="square" lIns="0" tIns="0" rIns="0" bIns="0" rtlCol="0" anchor="ctr"/>
+          <a:lstStyle/>
+          <a:p>
+            <a:pPr algn="ctr" indent="0" marL="0">
+              <a:buNone/>
+            </a:pPr>
+            <a:r>
+              <a:rPr lang="en-US" sz="900" b="1" dirty="0">
+                <a:solidFill>
+                  <a:srgbClr val="9D174D"/>
                 </a:solidFill>
                 <a:latin typeface="Trebuchet MS" pitchFamily="34" charset="0"/>
                 <a:ea typeface="Trebuchet MS" pitchFamily="34" charset="-122"/>
                 <a:cs typeface="Trebuchet MS" pitchFamily="34" charset="-120"/>
               </a:rPr>
-              <a:t>un</a:t>
-            </a:r>
-            <a:endParaRPr lang="en-US" sz="1400" dirty="0"/>
-          </a:p>
-        </p:txBody>
-      </p:sp>
-      <p:sp>
-        <p:nvSpPr>
-          <p:cNvPr id="33" name="Text 31"/>
-          <p:cNvSpPr/>
-          <p:nvPr/>
-        </p:nvSpPr>
-        <p:spPr>
-          <a:xfrm>
-            <a:off x="3959352" y="3364992"/>
-            <a:ext cx="411480" cy="475488"/>
-          </a:xfrm>
-          <a:prstGeom prst="rect">
-            <a:avLst/>
-          </a:prstGeom>
-          <a:noFill/>
-          <a:ln/>
-        </p:spPr>
-        <p:txBody>
-          <a:bodyPr wrap="square" lIns="0" tIns="0" rIns="0" bIns="0" rtlCol="0" anchor="ctr"/>
-          <a:lstStyle/>
-          <a:p>
-            <a:pPr algn="ctr" indent="0" marL="0">
-              <a:buNone/>
-            </a:pPr>
-            <a:r>
-              <a:rPr lang="en-US" sz="1600" b="1" dirty="0">
-                <a:solidFill>
-                  <a:srgbClr val="0D9488"/>
+              <a:t>r</a:t>
+            </a:r>
+            <a:endParaRPr lang="en-US" sz="900" dirty="0"/>
+          </a:p>
+        </p:txBody>
+      </p:sp>
+      <p:sp>
+        <p:nvSpPr>
+          <p:cNvPr id="41" name="Shape 39"/>
+          <p:cNvSpPr/>
+          <p:nvPr/>
+        </p:nvSpPr>
+        <p:spPr>
+          <a:xfrm>
+            <a:off x="3293146" y="4169664"/>
+            <a:ext cx="685800" cy="475488"/>
+          </a:xfrm>
+          <a:prstGeom prst="rect">
+            <a:avLst>
+              <a:gd name="adj" fmla="val 7692"/>
+            </a:avLst>
+          </a:prstGeom>
+          <a:solidFill>
+            <a:srgbClr val="FFFFFF"/>
+          </a:solidFill>
+          <a:ln w="12700">
+            <a:solidFill>
+              <a:srgbClr val="DB2777"/>
+            </a:solidFill>
+            <a:prstDash val="solid"/>
+          </a:ln>
+        </p:spPr>
+      </p:sp>
+      <p:sp>
+        <p:nvSpPr>
+          <p:cNvPr id="42" name="Text 40"/>
+          <p:cNvSpPr/>
+          <p:nvPr/>
+        </p:nvSpPr>
+        <p:spPr>
+          <a:xfrm>
+            <a:off x="3293146" y="4169664"/>
+            <a:ext cx="685800" cy="475488"/>
+          </a:xfrm>
+          <a:prstGeom prst="rect">
+            <a:avLst/>
+          </a:prstGeom>
+          <a:noFill/>
+          <a:ln/>
+        </p:spPr>
+        <p:txBody>
+          <a:bodyPr wrap="square" lIns="0" tIns="0" rIns="0" bIns="0" rtlCol="0" anchor="ctr"/>
+          <a:lstStyle/>
+          <a:p>
+            <a:pPr algn="ctr" indent="0" marL="0">
+              <a:buNone/>
+            </a:pPr>
+            <a:r>
+              <a:rPr lang="en-US" sz="900" b="1" dirty="0">
+                <a:solidFill>
+                  <a:srgbClr val="9D174D"/>
                 </a:solidFill>
                 <a:latin typeface="Trebuchet MS" pitchFamily="34" charset="0"/>
                 <a:ea typeface="Trebuchet MS" pitchFamily="34" charset="-122"/>
                 <a:cs typeface="Trebuchet MS" pitchFamily="34" charset="-120"/>
               </a:rPr>
-              <a:t>·</a:t>
-            </a:r>
-            <a:endParaRPr lang="en-US" sz="1600" dirty="0"/>
-          </a:p>
-        </p:txBody>
-      </p:sp>
-      <p:sp>
-        <p:nvSpPr>
-          <p:cNvPr id="34" name="Shape 32"/>
-          <p:cNvSpPr/>
-          <p:nvPr/>
-        </p:nvSpPr>
-        <p:spPr>
-          <a:xfrm>
-            <a:off x="4370832" y="3364992"/>
-            <a:ext cx="1645920" cy="475488"/>
+              <a:t>e</a:t>
+            </a:r>
+            <a:endParaRPr lang="en-US" sz="900" dirty="0"/>
+          </a:p>
+        </p:txBody>
+      </p:sp>
+      <p:sp>
+        <p:nvSpPr>
+          <p:cNvPr id="43" name="Shape 41"/>
+          <p:cNvSpPr/>
+          <p:nvPr/>
+        </p:nvSpPr>
+        <p:spPr>
+          <a:xfrm>
+            <a:off x="4331643" y="4169664"/>
+            <a:ext cx="685800" cy="475488"/>
           </a:xfrm>
           <a:prstGeom prst="rect">
             <a:avLst>
-              <a:gd name="adj" fmla="val 9615"/>
+              <a:gd name="adj" fmla="val 7692"/>
             </a:avLst>
           </a:prstGeom>
           <a:solidFill>
@@ -23516,104 +23576,131 @@
           </a:solidFill>
           <a:ln w="12700">
             <a:solidFill>
-              <a:srgbClr val="0D9488"/>
-            </a:solidFill>
-            <a:prstDash val="solid"/>
-          </a:ln>
-        </p:spPr>
-      </p:sp>
-      <p:sp>
-        <p:nvSpPr>
-          <p:cNvPr id="35" name="Text 33"/>
-          <p:cNvSpPr/>
-          <p:nvPr/>
-        </p:nvSpPr>
-        <p:spPr>
-          <a:xfrm>
-            <a:off x="4370832" y="3364992"/>
-            <a:ext cx="1645920" cy="475488"/>
-          </a:xfrm>
-          <a:prstGeom prst="rect">
-            <a:avLst/>
-          </a:prstGeom>
-          <a:noFill/>
-          <a:ln/>
-        </p:spPr>
-        <p:txBody>
-          <a:bodyPr wrap="square" lIns="0" tIns="0" rIns="0" bIns="0" rtlCol="0" anchor="ctr"/>
-          <a:lstStyle/>
-          <a:p>
-            <a:pPr algn="ctr" indent="0" marL="0">
-              <a:buNone/>
-            </a:pPr>
-            <a:r>
-              <a:rPr lang="en-US" sz="1400" b="1" dirty="0">
-                <a:solidFill>
-                  <a:srgbClr val="0D9488"/>
+              <a:srgbClr val="DB2777"/>
+            </a:solidFill>
+            <a:prstDash val="solid"/>
+          </a:ln>
+        </p:spPr>
+      </p:sp>
+      <p:sp>
+        <p:nvSpPr>
+          <p:cNvPr id="44" name="Text 42"/>
+          <p:cNvSpPr/>
+          <p:nvPr/>
+        </p:nvSpPr>
+        <p:spPr>
+          <a:xfrm>
+            <a:off x="4331643" y="4169664"/>
+            <a:ext cx="685800" cy="475488"/>
+          </a:xfrm>
+          <a:prstGeom prst="rect">
+            <a:avLst/>
+          </a:prstGeom>
+          <a:noFill/>
+          <a:ln/>
+        </p:spPr>
+        <p:txBody>
+          <a:bodyPr wrap="square" lIns="0" tIns="0" rIns="0" bIns="0" rtlCol="0" anchor="ctr"/>
+          <a:lstStyle/>
+          <a:p>
+            <a:pPr algn="ctr" indent="0" marL="0">
+              <a:buNone/>
+            </a:pPr>
+            <a:r>
+              <a:rPr lang="en-US" sz="900" b="1" dirty="0">
+                <a:solidFill>
+                  <a:srgbClr val="9D174D"/>
                 </a:solidFill>
                 <a:latin typeface="Trebuchet MS" pitchFamily="34" charset="0"/>
                 <a:ea typeface="Trebuchet MS" pitchFamily="34" charset="-122"/>
                 <a:cs typeface="Trebuchet MS" pitchFamily="34" charset="-120"/>
               </a:rPr>
-              <a:t>re</a:t>
-            </a:r>
-            <a:endParaRPr lang="en-US" sz="1400" dirty="0"/>
-          </a:p>
-        </p:txBody>
-      </p:sp>
-      <p:sp>
-        <p:nvSpPr>
-          <p:cNvPr id="36" name="Text 34"/>
-          <p:cNvSpPr/>
-          <p:nvPr/>
-        </p:nvSpPr>
-        <p:spPr>
-          <a:xfrm>
-            <a:off x="6016752" y="3364992"/>
-            <a:ext cx="411480" cy="475488"/>
-          </a:xfrm>
-          <a:prstGeom prst="rect">
-            <a:avLst/>
-          </a:prstGeom>
-          <a:noFill/>
-          <a:ln/>
-        </p:spPr>
-        <p:txBody>
-          <a:bodyPr wrap="square" lIns="0" tIns="0" rIns="0" bIns="0" rtlCol="0" anchor="ctr"/>
-          <a:lstStyle/>
-          <a:p>
-            <a:pPr algn="ctr" indent="0" marL="0">
-              <a:buNone/>
-            </a:pPr>
-            <a:r>
-              <a:rPr lang="en-US" sz="1600" b="1" dirty="0">
-                <a:solidFill>
-                  <a:srgbClr val="0D9488"/>
+              <a:t>t</a:t>
+            </a:r>
+            <a:endParaRPr lang="en-US" sz="900" dirty="0"/>
+          </a:p>
+        </p:txBody>
+      </p:sp>
+      <p:sp>
+        <p:nvSpPr>
+          <p:cNvPr id="45" name="Shape 43"/>
+          <p:cNvSpPr/>
+          <p:nvPr/>
+        </p:nvSpPr>
+        <p:spPr>
+          <a:xfrm>
+            <a:off x="5370141" y="4169664"/>
+            <a:ext cx="685800" cy="475488"/>
+          </a:xfrm>
+          <a:prstGeom prst="rect">
+            <a:avLst>
+              <a:gd name="adj" fmla="val 7692"/>
+            </a:avLst>
+          </a:prstGeom>
+          <a:solidFill>
+            <a:srgbClr val="FFFFFF"/>
+          </a:solidFill>
+          <a:ln w="12700">
+            <a:solidFill>
+              <a:srgbClr val="DB2777"/>
+            </a:solidFill>
+            <a:prstDash val="solid"/>
+          </a:ln>
+        </p:spPr>
+      </p:sp>
+      <p:sp>
+        <p:nvSpPr>
+          <p:cNvPr id="46" name="Text 44"/>
+          <p:cNvSpPr/>
+          <p:nvPr/>
+        </p:nvSpPr>
+        <p:spPr>
+          <a:xfrm>
+            <a:off x="5370141" y="4169664"/>
+            <a:ext cx="685800" cy="475488"/>
+          </a:xfrm>
+          <a:prstGeom prst="rect">
+            <a:avLst/>
+          </a:prstGeom>
+          <a:noFill/>
+          <a:ln/>
+        </p:spPr>
+        <p:txBody>
+          <a:bodyPr wrap="square" lIns="0" tIns="0" rIns="0" bIns="0" rtlCol="0" anchor="ctr"/>
+          <a:lstStyle/>
+          <a:p>
+            <a:pPr algn="ctr" indent="0" marL="0">
+              <a:buNone/>
+            </a:pPr>
+            <a:r>
+              <a:rPr lang="en-US" sz="900" b="1" dirty="0">
+                <a:solidFill>
+                  <a:srgbClr val="9D174D"/>
                 </a:solidFill>
                 <a:latin typeface="Trebuchet MS" pitchFamily="34" charset="0"/>
                 <a:ea typeface="Trebuchet MS" pitchFamily="34" charset="-122"/>
                 <a:cs typeface="Trebuchet MS" pitchFamily="34" charset="-120"/>
               </a:rPr>
-              <a:t>·</a:t>
-            </a:r>
-            <a:endParaRPr lang="en-US" sz="1600" dirty="0"/>
-          </a:p>
-        </p:txBody>
-      </p:sp>
-      <p:sp>
-        <p:nvSpPr>
-          <p:cNvPr id="37" name="Shape 35"/>
-          <p:cNvSpPr/>
-          <p:nvPr/>
-        </p:nvSpPr>
-        <p:spPr>
-          <a:xfrm>
-            <a:off x="6428232" y="3364992"/>
-            <a:ext cx="1645920" cy="475488"/>
+              <a:t>ur</a:t>
+            </a:r>
+            <a:endParaRPr lang="en-US" sz="900" dirty="0"/>
+          </a:p>
+        </p:txBody>
+      </p:sp>
+      <p:sp>
+        <p:nvSpPr>
+          <p:cNvPr id="47" name="Shape 45"/>
+          <p:cNvSpPr/>
+          <p:nvPr/>
+        </p:nvSpPr>
+        <p:spPr>
+          <a:xfrm>
+            <a:off x="6408638" y="4169664"/>
+            <a:ext cx="685800" cy="475488"/>
           </a:xfrm>
           <a:prstGeom prst="rect">
             <a:avLst>
-              <a:gd name="adj" fmla="val 9615"/>
+              <a:gd name="adj" fmla="val 7692"/>
             </a:avLst>
           </a:prstGeom>
           <a:solidFill>
@@ -23621,708 +23708,114 @@
           </a:solidFill>
           <a:ln w="12700">
             <a:solidFill>
-              <a:srgbClr val="0D9488"/>
-            </a:solidFill>
-            <a:prstDash val="solid"/>
-          </a:ln>
-        </p:spPr>
-      </p:sp>
-      <p:sp>
-        <p:nvSpPr>
-          <p:cNvPr id="38" name="Text 36"/>
-          <p:cNvSpPr/>
-          <p:nvPr/>
-        </p:nvSpPr>
-        <p:spPr>
-          <a:xfrm>
-            <a:off x="6428232" y="3364992"/>
-            <a:ext cx="1645920" cy="475488"/>
-          </a:xfrm>
-          <a:prstGeom prst="rect">
-            <a:avLst/>
-          </a:prstGeom>
-          <a:noFill/>
-          <a:ln/>
-        </p:spPr>
-        <p:txBody>
-          <a:bodyPr wrap="square" lIns="0" tIns="0" rIns="0" bIns="0" rtlCol="0" anchor="ctr"/>
-          <a:lstStyle/>
-          <a:p>
-            <a:pPr algn="ctr" indent="0" marL="0">
-              <a:buNone/>
-            </a:pPr>
-            <a:r>
-              <a:rPr lang="en-US" sz="1400" b="1" dirty="0">
-                <a:solidFill>
-                  <a:srgbClr val="0D9488"/>
+              <a:srgbClr val="DB2777"/>
+            </a:solidFill>
+            <a:prstDash val="solid"/>
+          </a:ln>
+        </p:spPr>
+      </p:sp>
+      <p:sp>
+        <p:nvSpPr>
+          <p:cNvPr id="48" name="Text 46"/>
+          <p:cNvSpPr/>
+          <p:nvPr/>
+        </p:nvSpPr>
+        <p:spPr>
+          <a:xfrm>
+            <a:off x="6408638" y="4169664"/>
+            <a:ext cx="685800" cy="475488"/>
+          </a:xfrm>
+          <a:prstGeom prst="rect">
+            <a:avLst/>
+          </a:prstGeom>
+          <a:noFill/>
+          <a:ln/>
+        </p:spPr>
+        <p:txBody>
+          <a:bodyPr wrap="square" lIns="0" tIns="0" rIns="0" bIns="0" rtlCol="0" anchor="ctr"/>
+          <a:lstStyle/>
+          <a:p>
+            <a:pPr algn="ctr" indent="0" marL="0">
+              <a:buNone/>
+            </a:pPr>
+            <a:r>
+              <a:rPr lang="en-US" sz="900" b="1" dirty="0">
+                <a:solidFill>
+                  <a:srgbClr val="9D174D"/>
                 </a:solidFill>
                 <a:latin typeface="Trebuchet MS" pitchFamily="34" charset="0"/>
                 <a:ea typeface="Trebuchet MS" pitchFamily="34" charset="-122"/>
                 <a:cs typeface="Trebuchet MS" pitchFamily="34" charset="-120"/>
               </a:rPr>
-              <a:t>turned</a:t>
-            </a:r>
-            <a:endParaRPr lang="en-US" sz="1400" dirty="0"/>
-          </a:p>
-        </p:txBody>
-      </p:sp>
-      <p:sp>
-        <p:nvSpPr>
-          <p:cNvPr id="39" name="Shape 37"/>
-          <p:cNvSpPr/>
-          <p:nvPr/>
-        </p:nvSpPr>
-        <p:spPr>
-          <a:xfrm>
-            <a:off x="365760" y="4096512"/>
-            <a:ext cx="1371600" cy="804672"/>
+              <a:t>n</a:t>
+            </a:r>
+            <a:endParaRPr lang="en-US" sz="900" dirty="0"/>
+          </a:p>
+        </p:txBody>
+      </p:sp>
+      <p:sp>
+        <p:nvSpPr>
+          <p:cNvPr id="49" name="Shape 47"/>
+          <p:cNvSpPr/>
+          <p:nvPr/>
+        </p:nvSpPr>
+        <p:spPr>
+          <a:xfrm>
+            <a:off x="7447135" y="4169664"/>
+            <a:ext cx="685800" cy="475488"/>
           </a:xfrm>
           <a:prstGeom prst="rect">
             <a:avLst>
-              <a:gd name="adj" fmla="val 6818"/>
+              <a:gd name="adj" fmla="val 7692"/>
             </a:avLst>
           </a:prstGeom>
           <a:solidFill>
-            <a:srgbClr val="E2E8F0"/>
-          </a:solidFill>
-          <a:ln w="12700">
-            <a:solidFill>
-              <a:srgbClr val="E2E8F0"/>
-            </a:solidFill>
-            <a:prstDash val="solid"/>
-          </a:ln>
-        </p:spPr>
-      </p:sp>
-      <p:sp>
-        <p:nvSpPr>
-          <p:cNvPr id="40" name="Text 38"/>
-          <p:cNvSpPr/>
-          <p:nvPr/>
-        </p:nvSpPr>
-        <p:spPr>
-          <a:xfrm>
-            <a:off x="365760" y="4096512"/>
-            <a:ext cx="1371600" cy="804672"/>
-          </a:xfrm>
-          <a:prstGeom prst="rect">
-            <a:avLst/>
-          </a:prstGeom>
-          <a:noFill/>
-          <a:ln/>
-        </p:spPr>
-        <p:txBody>
-          <a:bodyPr wrap="square" lIns="0" tIns="0" rIns="0" bIns="0" rtlCol="0" anchor="ctr"/>
-          <a:lstStyle/>
-          <a:p>
-            <a:pPr algn="ctr" indent="0" marL="0">
-              <a:buNone/>
-            </a:pPr>
-            <a:r>
-              <a:rPr lang="en-US" sz="1100" b="1" dirty="0">
-                <a:solidFill>
-                  <a:srgbClr val="475569"/>
+            <a:srgbClr val="FFFFFF"/>
+          </a:solidFill>
+          <a:ln w="12700">
+            <a:solidFill>
+              <a:srgbClr val="DB2777"/>
+            </a:solidFill>
+            <a:prstDash val="solid"/>
+          </a:ln>
+        </p:spPr>
+      </p:sp>
+      <p:sp>
+        <p:nvSpPr>
+          <p:cNvPr id="50" name="Text 48"/>
+          <p:cNvSpPr/>
+          <p:nvPr/>
+        </p:nvSpPr>
+        <p:spPr>
+          <a:xfrm>
+            <a:off x="7447135" y="4169664"/>
+            <a:ext cx="685800" cy="475488"/>
+          </a:xfrm>
+          <a:prstGeom prst="rect">
+            <a:avLst/>
+          </a:prstGeom>
+          <a:noFill/>
+          <a:ln/>
+        </p:spPr>
+        <p:txBody>
+          <a:bodyPr wrap="square" lIns="0" tIns="0" rIns="0" bIns="0" rtlCol="0" anchor="ctr"/>
+          <a:lstStyle/>
+          <a:p>
+            <a:pPr algn="ctr" indent="0" marL="0">
+              <a:buNone/>
+            </a:pPr>
+            <a:r>
+              <a:rPr lang="en-US" sz="900" b="1" dirty="0">
+                <a:solidFill>
+                  <a:srgbClr val="9D174D"/>
                 </a:solidFill>
                 <a:latin typeface="Trebuchet MS" pitchFamily="34" charset="0"/>
                 <a:ea typeface="Trebuchet MS" pitchFamily="34" charset="-122"/>
                 <a:cs typeface="Trebuchet MS" pitchFamily="34" charset="-120"/>
               </a:rPr>
-              <a:t>Phonemes</a:t>
-            </a:r>
-            <a:endParaRPr lang="en-US" sz="1100" dirty="0"/>
-          </a:p>
-        </p:txBody>
-      </p:sp>
-      <p:sp>
-        <p:nvSpPr>
-          <p:cNvPr id="41" name="Shape 39"/>
-          <p:cNvSpPr/>
-          <p:nvPr/>
-        </p:nvSpPr>
-        <p:spPr>
-          <a:xfrm>
-            <a:off x="1874520" y="4096512"/>
-            <a:ext cx="6903720" cy="804672"/>
-          </a:xfrm>
-          <a:prstGeom prst="rect">
-            <a:avLst>
-              <a:gd name="adj" fmla="val 6818"/>
-            </a:avLst>
-          </a:prstGeom>
-          <a:solidFill>
-            <a:srgbClr val="FCE7F3"/>
-          </a:solidFill>
-          <a:ln w="12700">
-            <a:solidFill>
-              <a:srgbClr val="DB2777"/>
-            </a:solidFill>
-            <a:prstDash val="solid"/>
-          </a:ln>
-        </p:spPr>
-      </p:sp>
-      <p:sp>
-        <p:nvSpPr>
-          <p:cNvPr id="42" name="Shape 40"/>
-          <p:cNvSpPr/>
-          <p:nvPr/>
-        </p:nvSpPr>
-        <p:spPr>
-          <a:xfrm>
-            <a:off x="2023872" y="4169664"/>
-            <a:ext cx="685800" cy="384048"/>
-          </a:xfrm>
-          <a:prstGeom prst="rect">
-            <a:avLst>
-              <a:gd name="adj" fmla="val 9524"/>
-            </a:avLst>
-          </a:prstGeom>
-          <a:solidFill>
-            <a:srgbClr val="FFFFFF"/>
-          </a:solidFill>
-          <a:ln w="12700">
-            <a:solidFill>
-              <a:srgbClr val="DB2777"/>
-            </a:solidFill>
-            <a:prstDash val="solid"/>
-          </a:ln>
-        </p:spPr>
-      </p:sp>
-      <p:sp>
-        <p:nvSpPr>
-          <p:cNvPr id="43" name="Text 41"/>
-          <p:cNvSpPr/>
-          <p:nvPr/>
-        </p:nvSpPr>
-        <p:spPr>
-          <a:xfrm>
-            <a:off x="2023872" y="4169664"/>
-            <a:ext cx="685800" cy="384048"/>
-          </a:xfrm>
-          <a:prstGeom prst="rect">
-            <a:avLst/>
-          </a:prstGeom>
-          <a:noFill/>
-          <a:ln/>
-        </p:spPr>
-        <p:txBody>
-          <a:bodyPr wrap="square" lIns="0" tIns="0" rIns="0" bIns="0" rtlCol="0" anchor="ctr"/>
-          <a:lstStyle/>
-          <a:p>
-            <a:pPr algn="ctr" indent="0" marL="0">
-              <a:buNone/>
-            </a:pPr>
-            <a:r>
-              <a:rPr lang="en-US" sz="900" b="1" dirty="0">
-                <a:solidFill>
-                  <a:srgbClr val="9D174D"/>
-                </a:solidFill>
-                <a:latin typeface="Trebuchet MS" pitchFamily="34" charset="0"/>
-                <a:ea typeface="Trebuchet MS" pitchFamily="34" charset="-122"/>
-                <a:cs typeface="Trebuchet MS" pitchFamily="34" charset="-120"/>
-              </a:rPr>
-              <a:t>u</a:t>
+              <a:t>er</a:t>
             </a:r>
             <a:endParaRPr lang="en-US" sz="900" dirty="0"/>
-          </a:p>
-        </p:txBody>
-      </p:sp>
-      <p:sp>
-        <p:nvSpPr>
-          <p:cNvPr id="44" name="Shape 42"/>
-          <p:cNvSpPr/>
-          <p:nvPr/>
-        </p:nvSpPr>
-        <p:spPr>
-          <a:xfrm>
-            <a:off x="2831592" y="4169664"/>
-            <a:ext cx="685800" cy="384048"/>
-          </a:xfrm>
-          <a:prstGeom prst="rect">
-            <a:avLst>
-              <a:gd name="adj" fmla="val 9524"/>
-            </a:avLst>
-          </a:prstGeom>
-          <a:solidFill>
-            <a:srgbClr val="FFFFFF"/>
-          </a:solidFill>
-          <a:ln w="12700">
-            <a:solidFill>
-              <a:srgbClr val="DB2777"/>
-            </a:solidFill>
-            <a:prstDash val="solid"/>
-          </a:ln>
-        </p:spPr>
-      </p:sp>
-      <p:sp>
-        <p:nvSpPr>
-          <p:cNvPr id="45" name="Text 43"/>
-          <p:cNvSpPr/>
-          <p:nvPr/>
-        </p:nvSpPr>
-        <p:spPr>
-          <a:xfrm>
-            <a:off x="2831592" y="4169664"/>
-            <a:ext cx="685800" cy="384048"/>
-          </a:xfrm>
-          <a:prstGeom prst="rect">
-            <a:avLst/>
-          </a:prstGeom>
-          <a:noFill/>
-          <a:ln/>
-        </p:spPr>
-        <p:txBody>
-          <a:bodyPr wrap="square" lIns="0" tIns="0" rIns="0" bIns="0" rtlCol="0" anchor="ctr"/>
-          <a:lstStyle/>
-          <a:p>
-            <a:pPr algn="ctr" indent="0" marL="0">
-              <a:buNone/>
-            </a:pPr>
-            <a:r>
-              <a:rPr lang="en-US" sz="900" b="1" dirty="0">
-                <a:solidFill>
-                  <a:srgbClr val="9D174D"/>
-                </a:solidFill>
-                <a:latin typeface="Trebuchet MS" pitchFamily="34" charset="0"/>
-                <a:ea typeface="Trebuchet MS" pitchFamily="34" charset="-122"/>
-                <a:cs typeface="Trebuchet MS" pitchFamily="34" charset="-120"/>
-              </a:rPr>
-              <a:t>n</a:t>
-            </a:r>
-            <a:endParaRPr lang="en-US" sz="900" dirty="0"/>
-          </a:p>
-        </p:txBody>
-      </p:sp>
-      <p:sp>
-        <p:nvSpPr>
-          <p:cNvPr id="46" name="Shape 44"/>
-          <p:cNvSpPr/>
-          <p:nvPr/>
-        </p:nvSpPr>
-        <p:spPr>
-          <a:xfrm>
-            <a:off x="3639312" y="4169664"/>
-            <a:ext cx="685800" cy="384048"/>
-          </a:xfrm>
-          <a:prstGeom prst="rect">
-            <a:avLst>
-              <a:gd name="adj" fmla="val 9524"/>
-            </a:avLst>
-          </a:prstGeom>
-          <a:solidFill>
-            <a:srgbClr val="FFFFFF"/>
-          </a:solidFill>
-          <a:ln w="12700">
-            <a:solidFill>
-              <a:srgbClr val="DB2777"/>
-            </a:solidFill>
-            <a:prstDash val="solid"/>
-          </a:ln>
-        </p:spPr>
-      </p:sp>
-      <p:sp>
-        <p:nvSpPr>
-          <p:cNvPr id="47" name="Text 45"/>
-          <p:cNvSpPr/>
-          <p:nvPr/>
-        </p:nvSpPr>
-        <p:spPr>
-          <a:xfrm>
-            <a:off x="3639312" y="4169664"/>
-            <a:ext cx="685800" cy="384048"/>
-          </a:xfrm>
-          <a:prstGeom prst="rect">
-            <a:avLst/>
-          </a:prstGeom>
-          <a:noFill/>
-          <a:ln/>
-        </p:spPr>
-        <p:txBody>
-          <a:bodyPr wrap="square" lIns="0" tIns="0" rIns="0" bIns="0" rtlCol="0" anchor="ctr"/>
-          <a:lstStyle/>
-          <a:p>
-            <a:pPr algn="ctr" indent="0" marL="0">
-              <a:buNone/>
-            </a:pPr>
-            <a:r>
-              <a:rPr lang="en-US" sz="900" b="1" dirty="0">
-                <a:solidFill>
-                  <a:srgbClr val="9D174D"/>
-                </a:solidFill>
-                <a:latin typeface="Trebuchet MS" pitchFamily="34" charset="0"/>
-                <a:ea typeface="Trebuchet MS" pitchFamily="34" charset="-122"/>
-                <a:cs typeface="Trebuchet MS" pitchFamily="34" charset="-120"/>
-              </a:rPr>
-              <a:t>r</a:t>
-            </a:r>
-            <a:endParaRPr lang="en-US" sz="900" dirty="0"/>
-          </a:p>
-        </p:txBody>
-      </p:sp>
-      <p:sp>
-        <p:nvSpPr>
-          <p:cNvPr id="48" name="Shape 46"/>
-          <p:cNvSpPr/>
-          <p:nvPr/>
-        </p:nvSpPr>
-        <p:spPr>
-          <a:xfrm>
-            <a:off x="4447032" y="4169664"/>
-            <a:ext cx="685800" cy="384048"/>
-          </a:xfrm>
-          <a:prstGeom prst="rect">
-            <a:avLst>
-              <a:gd name="adj" fmla="val 9524"/>
-            </a:avLst>
-          </a:prstGeom>
-          <a:solidFill>
-            <a:srgbClr val="FFFFFF"/>
-          </a:solidFill>
-          <a:ln w="12700">
-            <a:solidFill>
-              <a:srgbClr val="DB2777"/>
-            </a:solidFill>
-            <a:prstDash val="solid"/>
-          </a:ln>
-        </p:spPr>
-      </p:sp>
-      <p:sp>
-        <p:nvSpPr>
-          <p:cNvPr id="49" name="Text 47"/>
-          <p:cNvSpPr/>
-          <p:nvPr/>
-        </p:nvSpPr>
-        <p:spPr>
-          <a:xfrm>
-            <a:off x="4447032" y="4169664"/>
-            <a:ext cx="685800" cy="384048"/>
-          </a:xfrm>
-          <a:prstGeom prst="rect">
-            <a:avLst/>
-          </a:prstGeom>
-          <a:noFill/>
-          <a:ln/>
-        </p:spPr>
-        <p:txBody>
-          <a:bodyPr wrap="square" lIns="0" tIns="0" rIns="0" bIns="0" rtlCol="0" anchor="ctr"/>
-          <a:lstStyle/>
-          <a:p>
-            <a:pPr algn="ctr" indent="0" marL="0">
-              <a:buNone/>
-            </a:pPr>
-            <a:r>
-              <a:rPr lang="en-US" sz="900" b="1" dirty="0">
-                <a:solidFill>
-                  <a:srgbClr val="9D174D"/>
-                </a:solidFill>
-                <a:latin typeface="Trebuchet MS" pitchFamily="34" charset="0"/>
-                <a:ea typeface="Trebuchet MS" pitchFamily="34" charset="-122"/>
-                <a:cs typeface="Trebuchet MS" pitchFamily="34" charset="-120"/>
-              </a:rPr>
-              <a:t>e</a:t>
-            </a:r>
-            <a:endParaRPr lang="en-US" sz="900" dirty="0"/>
-          </a:p>
-        </p:txBody>
-      </p:sp>
-      <p:sp>
-        <p:nvSpPr>
-          <p:cNvPr id="50" name="Shape 48"/>
-          <p:cNvSpPr/>
-          <p:nvPr/>
-        </p:nvSpPr>
-        <p:spPr>
-          <a:xfrm>
-            <a:off x="5254752" y="4169664"/>
-            <a:ext cx="685800" cy="384048"/>
-          </a:xfrm>
-          <a:prstGeom prst="rect">
-            <a:avLst>
-              <a:gd name="adj" fmla="val 9524"/>
-            </a:avLst>
-          </a:prstGeom>
-          <a:solidFill>
-            <a:srgbClr val="FFFFFF"/>
-          </a:solidFill>
-          <a:ln w="12700">
-            <a:solidFill>
-              <a:srgbClr val="DB2777"/>
-            </a:solidFill>
-            <a:prstDash val="solid"/>
-          </a:ln>
-        </p:spPr>
-      </p:sp>
-      <p:sp>
-        <p:nvSpPr>
-          <p:cNvPr id="51" name="Text 49"/>
-          <p:cNvSpPr/>
-          <p:nvPr/>
-        </p:nvSpPr>
-        <p:spPr>
-          <a:xfrm>
-            <a:off x="5254752" y="4169664"/>
-            <a:ext cx="685800" cy="384048"/>
-          </a:xfrm>
-          <a:prstGeom prst="rect">
-            <a:avLst/>
-          </a:prstGeom>
-          <a:noFill/>
-          <a:ln/>
-        </p:spPr>
-        <p:txBody>
-          <a:bodyPr wrap="square" lIns="0" tIns="0" rIns="0" bIns="0" rtlCol="0" anchor="ctr"/>
-          <a:lstStyle/>
-          <a:p>
-            <a:pPr algn="ctr" indent="0" marL="0">
-              <a:buNone/>
-            </a:pPr>
-            <a:r>
-              <a:rPr lang="en-US" sz="900" b="1" dirty="0">
-                <a:solidFill>
-                  <a:srgbClr val="9D174D"/>
-                </a:solidFill>
-                <a:latin typeface="Trebuchet MS" pitchFamily="34" charset="0"/>
-                <a:ea typeface="Trebuchet MS" pitchFamily="34" charset="-122"/>
-                <a:cs typeface="Trebuchet MS" pitchFamily="34" charset="-120"/>
-              </a:rPr>
-              <a:t>t</a:t>
-            </a:r>
-            <a:endParaRPr lang="en-US" sz="900" dirty="0"/>
-          </a:p>
-        </p:txBody>
-      </p:sp>
-      <p:sp>
-        <p:nvSpPr>
-          <p:cNvPr id="52" name="Shape 50"/>
-          <p:cNvSpPr/>
-          <p:nvPr/>
-        </p:nvSpPr>
-        <p:spPr>
-          <a:xfrm>
-            <a:off x="6062472" y="4169664"/>
-            <a:ext cx="685800" cy="384048"/>
-          </a:xfrm>
-          <a:prstGeom prst="rect">
-            <a:avLst>
-              <a:gd name="adj" fmla="val 9524"/>
-            </a:avLst>
-          </a:prstGeom>
-          <a:solidFill>
-            <a:srgbClr val="FFFFFF"/>
-          </a:solidFill>
-          <a:ln w="12700">
-            <a:solidFill>
-              <a:srgbClr val="DB2777"/>
-            </a:solidFill>
-            <a:prstDash val="solid"/>
-          </a:ln>
-        </p:spPr>
-      </p:sp>
-      <p:sp>
-        <p:nvSpPr>
-          <p:cNvPr id="53" name="Text 51"/>
-          <p:cNvSpPr/>
-          <p:nvPr/>
-        </p:nvSpPr>
-        <p:spPr>
-          <a:xfrm>
-            <a:off x="6062472" y="4169664"/>
-            <a:ext cx="685800" cy="384048"/>
-          </a:xfrm>
-          <a:prstGeom prst="rect">
-            <a:avLst/>
-          </a:prstGeom>
-          <a:noFill/>
-          <a:ln/>
-        </p:spPr>
-        <p:txBody>
-          <a:bodyPr wrap="square" lIns="0" tIns="0" rIns="0" bIns="0" rtlCol="0" anchor="ctr"/>
-          <a:lstStyle/>
-          <a:p>
-            <a:pPr algn="ctr" indent="0" marL="0">
-              <a:buNone/>
-            </a:pPr>
-            <a:r>
-              <a:rPr lang="en-US" sz="900" b="1" dirty="0">
-                <a:solidFill>
-                  <a:srgbClr val="9D174D"/>
-                </a:solidFill>
-                <a:latin typeface="Trebuchet MS" pitchFamily="34" charset="0"/>
-                <a:ea typeface="Trebuchet MS" pitchFamily="34" charset="-122"/>
-                <a:cs typeface="Trebuchet MS" pitchFamily="34" charset="-120"/>
-              </a:rPr>
-              <a:t>ur</a:t>
-            </a:r>
-            <a:endParaRPr lang="en-US" sz="900" dirty="0"/>
-          </a:p>
-        </p:txBody>
-      </p:sp>
-      <p:sp>
-        <p:nvSpPr>
-          <p:cNvPr id="54" name="Shape 52"/>
-          <p:cNvSpPr/>
-          <p:nvPr/>
-        </p:nvSpPr>
-        <p:spPr>
-          <a:xfrm>
-            <a:off x="6870192" y="4169664"/>
-            <a:ext cx="685800" cy="384048"/>
-          </a:xfrm>
-          <a:prstGeom prst="rect">
-            <a:avLst>
-              <a:gd name="adj" fmla="val 9524"/>
-            </a:avLst>
-          </a:prstGeom>
-          <a:solidFill>
-            <a:srgbClr val="FFFFFF"/>
-          </a:solidFill>
-          <a:ln w="12700">
-            <a:solidFill>
-              <a:srgbClr val="DB2777"/>
-            </a:solidFill>
-            <a:prstDash val="solid"/>
-          </a:ln>
-        </p:spPr>
-      </p:sp>
-      <p:sp>
-        <p:nvSpPr>
-          <p:cNvPr id="55" name="Text 53"/>
-          <p:cNvSpPr/>
-          <p:nvPr/>
-        </p:nvSpPr>
-        <p:spPr>
-          <a:xfrm>
-            <a:off x="6870192" y="4169664"/>
-            <a:ext cx="685800" cy="384048"/>
-          </a:xfrm>
-          <a:prstGeom prst="rect">
-            <a:avLst/>
-          </a:prstGeom>
-          <a:noFill/>
-          <a:ln/>
-        </p:spPr>
-        <p:txBody>
-          <a:bodyPr wrap="square" lIns="0" tIns="0" rIns="0" bIns="0" rtlCol="0" anchor="ctr"/>
-          <a:lstStyle/>
-          <a:p>
-            <a:pPr algn="ctr" indent="0" marL="0">
-              <a:buNone/>
-            </a:pPr>
-            <a:r>
-              <a:rPr lang="en-US" sz="900" b="1" dirty="0">
-                <a:solidFill>
-                  <a:srgbClr val="9D174D"/>
-                </a:solidFill>
-                <a:latin typeface="Trebuchet MS" pitchFamily="34" charset="0"/>
-                <a:ea typeface="Trebuchet MS" pitchFamily="34" charset="-122"/>
-                <a:cs typeface="Trebuchet MS" pitchFamily="34" charset="-120"/>
-              </a:rPr>
-              <a:t>n</a:t>
-            </a:r>
-            <a:endParaRPr lang="en-US" sz="900" dirty="0"/>
-          </a:p>
-        </p:txBody>
-      </p:sp>
-      <p:sp>
-        <p:nvSpPr>
-          <p:cNvPr id="56" name="Shape 54"/>
-          <p:cNvSpPr/>
-          <p:nvPr/>
-        </p:nvSpPr>
-        <p:spPr>
-          <a:xfrm>
-            <a:off x="7677912" y="4169664"/>
-            <a:ext cx="685800" cy="384048"/>
-          </a:xfrm>
-          <a:prstGeom prst="rect">
-            <a:avLst>
-              <a:gd name="adj" fmla="val 9524"/>
-            </a:avLst>
-          </a:prstGeom>
-          <a:solidFill>
-            <a:srgbClr val="FFFFFF"/>
-          </a:solidFill>
-          <a:ln w="12700">
-            <a:solidFill>
-              <a:srgbClr val="DB2777"/>
-            </a:solidFill>
-            <a:prstDash val="solid"/>
-          </a:ln>
-        </p:spPr>
-      </p:sp>
-      <p:sp>
-        <p:nvSpPr>
-          <p:cNvPr id="57" name="Text 55"/>
-          <p:cNvSpPr/>
-          <p:nvPr/>
-        </p:nvSpPr>
-        <p:spPr>
-          <a:xfrm>
-            <a:off x="7677912" y="4169664"/>
-            <a:ext cx="685800" cy="384048"/>
-          </a:xfrm>
-          <a:prstGeom prst="rect">
-            <a:avLst/>
-          </a:prstGeom>
-          <a:noFill/>
-          <a:ln/>
-        </p:spPr>
-        <p:txBody>
-          <a:bodyPr wrap="square" lIns="0" tIns="0" rIns="0" bIns="0" rtlCol="0" anchor="ctr"/>
-          <a:lstStyle/>
-          <a:p>
-            <a:pPr algn="ctr" indent="0" marL="0">
-              <a:buNone/>
-            </a:pPr>
-            <a:r>
-              <a:rPr lang="en-US" sz="900" b="1" dirty="0">
-                <a:solidFill>
-                  <a:srgbClr val="9D174D"/>
-                </a:solidFill>
-                <a:latin typeface="Trebuchet MS" pitchFamily="34" charset="0"/>
-                <a:ea typeface="Trebuchet MS" pitchFamily="34" charset="-122"/>
-                <a:cs typeface="Trebuchet MS" pitchFamily="34" charset="-120"/>
-              </a:rPr>
-              <a:t>ed</a:t>
-            </a:r>
-            <a:endParaRPr lang="en-US" sz="900" dirty="0"/>
-          </a:p>
-        </p:txBody>
-      </p:sp>
-      <p:sp>
-        <p:nvSpPr>
-          <p:cNvPr id="58" name="Text 56"/>
-          <p:cNvSpPr/>
-          <p:nvPr/>
-        </p:nvSpPr>
-        <p:spPr>
-          <a:xfrm>
-            <a:off x="7677912" y="4572000"/>
-            <a:ext cx="685800" cy="219456"/>
-          </a:xfrm>
-          <a:prstGeom prst="rect">
-            <a:avLst/>
-          </a:prstGeom>
-          <a:noFill/>
-          <a:ln/>
-        </p:spPr>
-        <p:txBody>
-          <a:bodyPr wrap="square" lIns="0" tIns="0" rIns="0" bIns="0" rtlCol="0" anchor="t"/>
-          <a:lstStyle/>
-          <a:p>
-            <a:pPr algn="ctr" indent="0" marL="0">
-              <a:buNone/>
-            </a:pPr>
-            <a:r>
-              <a:rPr lang="en-US" sz="750" i="1" dirty="0">
-                <a:solidFill>
-                  <a:srgbClr val="94A3B8"/>
-                </a:solidFill>
-                <a:latin typeface="Calibri" pitchFamily="34" charset="0"/>
-                <a:ea typeface="Calibri" pitchFamily="34" charset="-122"/>
-                <a:cs typeface="Calibri" pitchFamily="34" charset="-120"/>
-              </a:rPr>
-              <a:t>/d/</a:t>
-            </a:r>
-            <a:endParaRPr lang="en-US" sz="750" dirty="0"/>
           </a:p>
         </p:txBody>
       </p:sp>
@@ -24751,7 +24244,7 @@
                 <a:ea typeface="Trebuchet MS" pitchFamily="34" charset="-122"/>
                 <a:cs typeface="Trebuchet MS" pitchFamily="34" charset="-120"/>
               </a:rPr>
-              <a:t>returner</a:t>
+              <a:t>returned</a:t>
             </a:r>
             <a:endParaRPr lang="en-US" sz="2800" dirty="0"/>
           </a:p>
@@ -25578,7 +25071,7 @@
                 <a:ea typeface="Trebuchet MS" pitchFamily="34" charset="-122"/>
                 <a:cs typeface="Trebuchet MS" pitchFamily="34" charset="-120"/>
               </a:rPr>
-              <a:t>returner</a:t>
+              <a:t>returned</a:t>
             </a:r>
             <a:endParaRPr lang="en-US" sz="2800" dirty="0"/>
           </a:p>
@@ -25868,7 +25361,7 @@
                 <a:ea typeface="Calibri" pitchFamily="34" charset="-122"/>
                 <a:cs typeface="Calibri" pitchFamily="34" charset="-120"/>
               </a:rPr>
-              <a:t>to turn, go around</a:t>
+              <a:t>turn, go back</a:t>
             </a:r>
             <a:endParaRPr lang="en-US" sz="850" dirty="0"/>
           </a:p>
@@ -25941,7 +25434,7 @@
                 <a:ea typeface="Trebuchet MS" pitchFamily="34" charset="-122"/>
                 <a:cs typeface="Trebuchet MS" pitchFamily="34" charset="-120"/>
               </a:rPr>
-              <a:t>er</a:t>
+              <a:t>ed</a:t>
             </a:r>
             <a:endParaRPr lang="en-US" sz="1300" dirty="0"/>
           </a:p>
@@ -25980,7 +25473,7 @@
                 <a:ea typeface="Calibri" pitchFamily="34" charset="-122"/>
                 <a:cs typeface="Calibri" pitchFamily="34" charset="-120"/>
               </a:rPr>
-              <a:t>a person who does something</a:t>
+              <a:t>past tense</a:t>
             </a:r>
             <a:endParaRPr lang="en-US" sz="850" dirty="0"/>
           </a:p>
@@ -27394,7 +26887,7 @@
                 <a:ea typeface="Trebuchet MS" pitchFamily="34" charset="-122"/>
                 <a:cs typeface="Trebuchet MS" pitchFamily="34" charset="-120"/>
               </a:rPr>
-              <a:t>returner</a:t>
+              <a:t>returned</a:t>
             </a:r>
             <a:endParaRPr lang="en-US" sz="2800" dirty="0"/>
           </a:p>
@@ -27684,7 +27177,7 @@
                 <a:ea typeface="Calibri" pitchFamily="34" charset="-122"/>
                 <a:cs typeface="Calibri" pitchFamily="34" charset="-120"/>
               </a:rPr>
-              <a:t>to turn, go around</a:t>
+              <a:t>turn, go back</a:t>
             </a:r>
             <a:endParaRPr lang="en-US" sz="850" dirty="0"/>
           </a:p>
@@ -27757,7 +27250,7 @@
                 <a:ea typeface="Trebuchet MS" pitchFamily="34" charset="-122"/>
                 <a:cs typeface="Trebuchet MS" pitchFamily="34" charset="-120"/>
               </a:rPr>
-              <a:t>er</a:t>
+              <a:t>ed</a:t>
             </a:r>
             <a:endParaRPr lang="en-US" sz="1300" dirty="0"/>
           </a:p>
@@ -27796,7 +27289,7 @@
                 <a:ea typeface="Calibri" pitchFamily="34" charset="-122"/>
                 <a:cs typeface="Calibri" pitchFamily="34" charset="-120"/>
               </a:rPr>
-              <a:t>a person who does something</a:t>
+              <a:t>past tense</a:t>
             </a:r>
             <a:endParaRPr lang="en-US" sz="850" dirty="0"/>
           </a:p>
@@ -27903,7 +27396,7 @@
         </p:nvSpPr>
         <p:spPr>
           <a:xfrm>
-            <a:off x="2313432" y="3364992"/>
+            <a:off x="2999232" y="3364992"/>
             <a:ext cx="1645920" cy="475488"/>
           </a:xfrm>
           <a:prstGeom prst="rect">
@@ -27930,7 +27423,7 @@
         </p:nvSpPr>
         <p:spPr>
           <a:xfrm>
-            <a:off x="2313432" y="3364992"/>
+            <a:off x="2999232" y="3364992"/>
             <a:ext cx="1645920" cy="475488"/>
           </a:xfrm>
           <a:prstGeom prst="rect">
@@ -27969,8 +27462,8 @@
         </p:nvSpPr>
         <p:spPr>
           <a:xfrm>
-            <a:off x="3959352" y="3364992"/>
-            <a:ext cx="411480" cy="475488"/>
+            <a:off x="4645152" y="3364992"/>
+            <a:ext cx="1097280" cy="475488"/>
           </a:xfrm>
           <a:prstGeom prst="rect">
             <a:avLst/>
@@ -28008,7 +27501,7 @@
         </p:nvSpPr>
         <p:spPr>
           <a:xfrm>
-            <a:off x="4370832" y="3364992"/>
+            <a:off x="5742432" y="3364992"/>
             <a:ext cx="1645920" cy="475488"/>
           </a:xfrm>
           <a:prstGeom prst="rect">
@@ -28035,7 +27528,7 @@
         </p:nvSpPr>
         <p:spPr>
           <a:xfrm>
-            <a:off x="4370832" y="3364992"/>
+            <a:off x="5742432" y="3364992"/>
             <a:ext cx="1645920" cy="475488"/>
           </a:xfrm>
           <a:prstGeom prst="rect">
@@ -28060,7 +27553,7 @@
                 <a:ea typeface="Trebuchet MS" pitchFamily="34" charset="-122"/>
                 <a:cs typeface="Trebuchet MS" pitchFamily="34" charset="-120"/>
               </a:rPr>
-              <a:t>turn</a:t>
+              <a:t>turned</a:t>
             </a:r>
             <a:endParaRPr lang="en-US" sz="1400" dirty="0"/>
           </a:p>
@@ -28068,119 +27561,80 @@
       </p:sp>
       <p:sp>
         <p:nvSpPr>
-          <p:cNvPr id="33" name="Text 31"/>
-          <p:cNvSpPr/>
-          <p:nvPr/>
-        </p:nvSpPr>
-        <p:spPr>
-          <a:xfrm>
-            <a:off x="6016752" y="3364992"/>
-            <a:ext cx="411480" cy="475488"/>
-          </a:xfrm>
-          <a:prstGeom prst="rect">
-            <a:avLst/>
-          </a:prstGeom>
-          <a:noFill/>
-          <a:ln/>
-        </p:spPr>
-        <p:txBody>
-          <a:bodyPr wrap="square" lIns="0" tIns="0" rIns="0" bIns="0" rtlCol="0" anchor="ctr"/>
-          <a:lstStyle/>
-          <a:p>
-            <a:pPr algn="ctr" indent="0" marL="0">
-              <a:buNone/>
-            </a:pPr>
-            <a:r>
-              <a:rPr lang="en-US" sz="1600" b="1" dirty="0">
-                <a:solidFill>
-                  <a:srgbClr val="0D9488"/>
+          <p:cNvPr id="33" name="Shape 31"/>
+          <p:cNvSpPr/>
+          <p:nvPr/>
+        </p:nvSpPr>
+        <p:spPr>
+          <a:xfrm>
+            <a:off x="365760" y="4096512"/>
+            <a:ext cx="1371600" cy="804672"/>
+          </a:xfrm>
+          <a:prstGeom prst="rect">
+            <a:avLst>
+              <a:gd name="adj" fmla="val 6818"/>
+            </a:avLst>
+          </a:prstGeom>
+          <a:solidFill>
+            <a:srgbClr val="E2E8F0"/>
+          </a:solidFill>
+          <a:ln w="12700">
+            <a:solidFill>
+              <a:srgbClr val="E2E8F0"/>
+            </a:solidFill>
+            <a:prstDash val="solid"/>
+          </a:ln>
+        </p:spPr>
+      </p:sp>
+      <p:sp>
+        <p:nvSpPr>
+          <p:cNvPr id="34" name="Text 32"/>
+          <p:cNvSpPr/>
+          <p:nvPr/>
+        </p:nvSpPr>
+        <p:spPr>
+          <a:xfrm>
+            <a:off x="365760" y="4096512"/>
+            <a:ext cx="1371600" cy="804672"/>
+          </a:xfrm>
+          <a:prstGeom prst="rect">
+            <a:avLst/>
+          </a:prstGeom>
+          <a:noFill/>
+          <a:ln/>
+        </p:spPr>
+        <p:txBody>
+          <a:bodyPr wrap="square" lIns="0" tIns="0" rIns="0" bIns="0" rtlCol="0" anchor="ctr"/>
+          <a:lstStyle/>
+          <a:p>
+            <a:pPr algn="ctr" indent="0" marL="0">
+              <a:buNone/>
+            </a:pPr>
+            <a:r>
+              <a:rPr lang="en-US" sz="1100" b="1" dirty="0">
+                <a:solidFill>
+                  <a:srgbClr val="475569"/>
                 </a:solidFill>
                 <a:latin typeface="Trebuchet MS" pitchFamily="34" charset="0"/>
                 <a:ea typeface="Trebuchet MS" pitchFamily="34" charset="-122"/>
                 <a:cs typeface="Trebuchet MS" pitchFamily="34" charset="-120"/>
               </a:rPr>
-              <a:t>·</a:t>
-            </a:r>
-            <a:endParaRPr lang="en-US" sz="1600" dirty="0"/>
-          </a:p>
-        </p:txBody>
-      </p:sp>
-      <p:sp>
-        <p:nvSpPr>
-          <p:cNvPr id="34" name="Shape 32"/>
-          <p:cNvSpPr/>
-          <p:nvPr/>
-        </p:nvSpPr>
-        <p:spPr>
-          <a:xfrm>
-            <a:off x="6428232" y="3364992"/>
-            <a:ext cx="1645920" cy="475488"/>
-          </a:xfrm>
-          <a:prstGeom prst="rect">
-            <a:avLst>
-              <a:gd name="adj" fmla="val 9615"/>
-            </a:avLst>
-          </a:prstGeom>
-          <a:solidFill>
-            <a:srgbClr val="FFFFFF"/>
-          </a:solidFill>
-          <a:ln w="12700">
-            <a:solidFill>
-              <a:srgbClr val="0D9488"/>
-            </a:solidFill>
-            <a:prstDash val="solid"/>
-          </a:ln>
-        </p:spPr>
-      </p:sp>
-      <p:sp>
-        <p:nvSpPr>
-          <p:cNvPr id="35" name="Text 33"/>
-          <p:cNvSpPr/>
-          <p:nvPr/>
-        </p:nvSpPr>
-        <p:spPr>
-          <a:xfrm>
-            <a:off x="6428232" y="3364992"/>
-            <a:ext cx="1645920" cy="475488"/>
-          </a:xfrm>
-          <a:prstGeom prst="rect">
-            <a:avLst/>
-          </a:prstGeom>
-          <a:noFill/>
-          <a:ln/>
-        </p:spPr>
-        <p:txBody>
-          <a:bodyPr wrap="square" lIns="0" tIns="0" rIns="0" bIns="0" rtlCol="0" anchor="ctr"/>
-          <a:lstStyle/>
-          <a:p>
-            <a:pPr algn="ctr" indent="0" marL="0">
-              <a:buNone/>
-            </a:pPr>
-            <a:r>
-              <a:rPr lang="en-US" sz="1400" b="1" dirty="0">
-                <a:solidFill>
-                  <a:srgbClr val="0D9488"/>
-                </a:solidFill>
-                <a:latin typeface="Trebuchet MS" pitchFamily="34" charset="0"/>
-                <a:ea typeface="Trebuchet MS" pitchFamily="34" charset="-122"/>
-                <a:cs typeface="Trebuchet MS" pitchFamily="34" charset="-120"/>
-              </a:rPr>
-              <a:t>er</a:t>
-            </a:r>
-            <a:endParaRPr lang="en-US" sz="1400" dirty="0"/>
-          </a:p>
-        </p:txBody>
-      </p:sp>
-      <p:sp>
-        <p:nvSpPr>
-          <p:cNvPr id="36" name="Shape 34"/>
-          <p:cNvSpPr/>
-          <p:nvPr/>
-        </p:nvSpPr>
-        <p:spPr>
-          <a:xfrm>
-            <a:off x="365760" y="4096512"/>
-            <a:ext cx="1371600" cy="804672"/>
+              <a:t>Phonemes</a:t>
+            </a:r>
+            <a:endParaRPr lang="en-US" sz="1100" dirty="0"/>
+          </a:p>
+        </p:txBody>
+      </p:sp>
+      <p:sp>
+        <p:nvSpPr>
+          <p:cNvPr id="35" name="Shape 33"/>
+          <p:cNvSpPr/>
+          <p:nvPr/>
+        </p:nvSpPr>
+        <p:spPr>
+          <a:xfrm>
+            <a:off x="1874520" y="4096512"/>
+            <a:ext cx="6903720" cy="804672"/>
           </a:xfrm>
           <a:prstGeom prst="rect">
             <a:avLst>
@@ -28188,85 +27642,19 @@
             </a:avLst>
           </a:prstGeom>
           <a:solidFill>
-            <a:srgbClr val="E2E8F0"/>
+            <a:srgbClr val="F8FAFC"/>
           </a:solidFill>
           <a:ln w="12700">
             <a:solidFill>
               <a:srgbClr val="E2E8F0"/>
             </a:solidFill>
-            <a:prstDash val="solid"/>
-          </a:ln>
-        </p:spPr>
-      </p:sp>
-      <p:sp>
-        <p:nvSpPr>
-          <p:cNvPr id="37" name="Text 35"/>
-          <p:cNvSpPr/>
-          <p:nvPr/>
-        </p:nvSpPr>
-        <p:spPr>
-          <a:xfrm>
-            <a:off x="365760" y="4096512"/>
-            <a:ext cx="1371600" cy="804672"/>
-          </a:xfrm>
-          <a:prstGeom prst="rect">
-            <a:avLst/>
-          </a:prstGeom>
-          <a:noFill/>
-          <a:ln/>
-        </p:spPr>
-        <p:txBody>
-          <a:bodyPr wrap="square" lIns="0" tIns="0" rIns="0" bIns="0" rtlCol="0" anchor="ctr"/>
-          <a:lstStyle/>
-          <a:p>
-            <a:pPr algn="ctr" indent="0" marL="0">
-              <a:buNone/>
-            </a:pPr>
-            <a:r>
-              <a:rPr lang="en-US" sz="1100" b="1" dirty="0">
-                <a:solidFill>
-                  <a:srgbClr val="475569"/>
-                </a:solidFill>
-                <a:latin typeface="Trebuchet MS" pitchFamily="34" charset="0"/>
-                <a:ea typeface="Trebuchet MS" pitchFamily="34" charset="-122"/>
-                <a:cs typeface="Trebuchet MS" pitchFamily="34" charset="-120"/>
-              </a:rPr>
-              <a:t>Phonemes</a:t>
-            </a:r>
-            <a:endParaRPr lang="en-US" sz="1100" dirty="0"/>
-          </a:p>
-        </p:txBody>
-      </p:sp>
-      <p:sp>
-        <p:nvSpPr>
-          <p:cNvPr id="38" name="Shape 36"/>
-          <p:cNvSpPr/>
-          <p:nvPr/>
-        </p:nvSpPr>
-        <p:spPr>
-          <a:xfrm>
-            <a:off x="1874520" y="4096512"/>
-            <a:ext cx="6903720" cy="804672"/>
-          </a:xfrm>
-          <a:prstGeom prst="rect">
-            <a:avLst>
-              <a:gd name="adj" fmla="val 6818"/>
-            </a:avLst>
-          </a:prstGeom>
-          <a:solidFill>
-            <a:srgbClr val="F8FAFC"/>
-          </a:solidFill>
-          <a:ln w="12700">
-            <a:solidFill>
-              <a:srgbClr val="E2E8F0"/>
-            </a:solidFill>
             <a:prstDash val="dash"/>
           </a:ln>
         </p:spPr>
       </p:sp>
       <p:sp>
         <p:nvSpPr>
-          <p:cNvPr id="39" name="Text 37"/>
+          <p:cNvPr id="36" name="Text 34"/>
           <p:cNvSpPr/>
           <p:nvPr/>
         </p:nvSpPr>
@@ -28728,7 +28116,7 @@
                 <a:ea typeface="Trebuchet MS" pitchFamily="34" charset="-122"/>
                 <a:cs typeface="Trebuchet MS" pitchFamily="34" charset="-120"/>
               </a:rPr>
-              <a:t>returner</a:t>
+              <a:t>returned</a:t>
             </a:r>
             <a:endParaRPr lang="en-US" sz="2800" dirty="0"/>
           </a:p>
@@ -29018,7 +28406,7 @@
                 <a:ea typeface="Calibri" pitchFamily="34" charset="-122"/>
                 <a:cs typeface="Calibri" pitchFamily="34" charset="-120"/>
               </a:rPr>
-              <a:t>to turn, go around</a:t>
+              <a:t>turn, go back</a:t>
             </a:r>
             <a:endParaRPr lang="en-US" sz="850" dirty="0"/>
           </a:p>
@@ -29091,7 +28479,7 @@
                 <a:ea typeface="Trebuchet MS" pitchFamily="34" charset="-122"/>
                 <a:cs typeface="Trebuchet MS" pitchFamily="34" charset="-120"/>
               </a:rPr>
-              <a:t>er</a:t>
+              <a:t>ed</a:t>
             </a:r>
             <a:endParaRPr lang="en-US" sz="1300" dirty="0"/>
           </a:p>
@@ -29130,7 +28518,7 @@
                 <a:ea typeface="Calibri" pitchFamily="34" charset="-122"/>
                 <a:cs typeface="Calibri" pitchFamily="34" charset="-120"/>
               </a:rPr>
-              <a:t>a person who does something</a:t>
+              <a:t>past tense</a:t>
             </a:r>
             <a:endParaRPr lang="en-US" sz="850" dirty="0"/>
           </a:p>
@@ -29237,7 +28625,7 @@
         </p:nvSpPr>
         <p:spPr>
           <a:xfrm>
-            <a:off x="2313432" y="3364992"/>
+            <a:off x="2999232" y="3364992"/>
             <a:ext cx="1645920" cy="475488"/>
           </a:xfrm>
           <a:prstGeom prst="rect">
@@ -29264,7 +28652,7 @@
         </p:nvSpPr>
         <p:spPr>
           <a:xfrm>
-            <a:off x="2313432" y="3364992"/>
+            <a:off x="2999232" y="3364992"/>
             <a:ext cx="1645920" cy="475488"/>
           </a:xfrm>
           <a:prstGeom prst="rect">
@@ -29303,8 +28691,8 @@
         </p:nvSpPr>
         <p:spPr>
           <a:xfrm>
-            <a:off x="3959352" y="3364992"/>
-            <a:ext cx="411480" cy="475488"/>
+            <a:off x="4645152" y="3364992"/>
+            <a:ext cx="1097280" cy="475488"/>
           </a:xfrm>
           <a:prstGeom prst="rect">
             <a:avLst/>
@@ -29342,7 +28730,7 @@
         </p:nvSpPr>
         <p:spPr>
           <a:xfrm>
-            <a:off x="4370832" y="3364992"/>
+            <a:off x="5742432" y="3364992"/>
             <a:ext cx="1645920" cy="475488"/>
           </a:xfrm>
           <a:prstGeom prst="rect">
@@ -29369,7 +28757,7 @@
         </p:nvSpPr>
         <p:spPr>
           <a:xfrm>
-            <a:off x="4370832" y="3364992"/>
+            <a:off x="5742432" y="3364992"/>
             <a:ext cx="1645920" cy="475488"/>
           </a:xfrm>
           <a:prstGeom prst="rect">
@@ -29394,7 +28782,7 @@
                 <a:ea typeface="Trebuchet MS" pitchFamily="34" charset="-122"/>
                 <a:cs typeface="Trebuchet MS" pitchFamily="34" charset="-120"/>
               </a:rPr>
-              <a:t>turn</a:t>
+              <a:t>turned</a:t>
             </a:r>
             <a:endParaRPr lang="en-US" sz="1400" dirty="0"/>
           </a:p>
@@ -29402,211 +28790,238 @@
       </p:sp>
       <p:sp>
         <p:nvSpPr>
-          <p:cNvPr id="33" name="Text 31"/>
-          <p:cNvSpPr/>
-          <p:nvPr/>
-        </p:nvSpPr>
-        <p:spPr>
-          <a:xfrm>
-            <a:off x="6016752" y="3364992"/>
-            <a:ext cx="411480" cy="475488"/>
-          </a:xfrm>
-          <a:prstGeom prst="rect">
-            <a:avLst/>
-          </a:prstGeom>
-          <a:noFill/>
-          <a:ln/>
-        </p:spPr>
-        <p:txBody>
-          <a:bodyPr wrap="square" lIns="0" tIns="0" rIns="0" bIns="0" rtlCol="0" anchor="ctr"/>
-          <a:lstStyle/>
-          <a:p>
-            <a:pPr algn="ctr" indent="0" marL="0">
-              <a:buNone/>
-            </a:pPr>
-            <a:r>
-              <a:rPr lang="en-US" sz="1600" b="1" dirty="0">
-                <a:solidFill>
-                  <a:srgbClr val="0D9488"/>
+          <p:cNvPr id="33" name="Shape 31"/>
+          <p:cNvSpPr/>
+          <p:nvPr/>
+        </p:nvSpPr>
+        <p:spPr>
+          <a:xfrm>
+            <a:off x="365760" y="4096512"/>
+            <a:ext cx="1371600" cy="804672"/>
+          </a:xfrm>
+          <a:prstGeom prst="rect">
+            <a:avLst>
+              <a:gd name="adj" fmla="val 6818"/>
+            </a:avLst>
+          </a:prstGeom>
+          <a:solidFill>
+            <a:srgbClr val="E2E8F0"/>
+          </a:solidFill>
+          <a:ln w="12700">
+            <a:solidFill>
+              <a:srgbClr val="E2E8F0"/>
+            </a:solidFill>
+            <a:prstDash val="solid"/>
+          </a:ln>
+        </p:spPr>
+      </p:sp>
+      <p:sp>
+        <p:nvSpPr>
+          <p:cNvPr id="34" name="Text 32"/>
+          <p:cNvSpPr/>
+          <p:nvPr/>
+        </p:nvSpPr>
+        <p:spPr>
+          <a:xfrm>
+            <a:off x="365760" y="4096512"/>
+            <a:ext cx="1371600" cy="804672"/>
+          </a:xfrm>
+          <a:prstGeom prst="rect">
+            <a:avLst/>
+          </a:prstGeom>
+          <a:noFill/>
+          <a:ln/>
+        </p:spPr>
+        <p:txBody>
+          <a:bodyPr wrap="square" lIns="0" tIns="0" rIns="0" bIns="0" rtlCol="0" anchor="ctr"/>
+          <a:lstStyle/>
+          <a:p>
+            <a:pPr algn="ctr" indent="0" marL="0">
+              <a:buNone/>
+            </a:pPr>
+            <a:r>
+              <a:rPr lang="en-US" sz="1100" b="1" dirty="0">
+                <a:solidFill>
+                  <a:srgbClr val="475569"/>
                 </a:solidFill>
                 <a:latin typeface="Trebuchet MS" pitchFamily="34" charset="0"/>
                 <a:ea typeface="Trebuchet MS" pitchFamily="34" charset="-122"/>
                 <a:cs typeface="Trebuchet MS" pitchFamily="34" charset="-120"/>
               </a:rPr>
-              <a:t>·</a:t>
-            </a:r>
-            <a:endParaRPr lang="en-US" sz="1600" dirty="0"/>
-          </a:p>
-        </p:txBody>
-      </p:sp>
-      <p:sp>
-        <p:nvSpPr>
-          <p:cNvPr id="34" name="Shape 32"/>
-          <p:cNvSpPr/>
-          <p:nvPr/>
-        </p:nvSpPr>
-        <p:spPr>
-          <a:xfrm>
-            <a:off x="6428232" y="3364992"/>
-            <a:ext cx="1645920" cy="475488"/>
+              <a:t>Phonemes</a:t>
+            </a:r>
+            <a:endParaRPr lang="en-US" sz="1100" dirty="0"/>
+          </a:p>
+        </p:txBody>
+      </p:sp>
+      <p:sp>
+        <p:nvSpPr>
+          <p:cNvPr id="35" name="Shape 33"/>
+          <p:cNvSpPr/>
+          <p:nvPr/>
+        </p:nvSpPr>
+        <p:spPr>
+          <a:xfrm>
+            <a:off x="1874520" y="4096512"/>
+            <a:ext cx="6903720" cy="658368"/>
           </a:xfrm>
           <a:prstGeom prst="rect">
             <a:avLst>
-              <a:gd name="adj" fmla="val 9615"/>
+              <a:gd name="adj" fmla="val 8333"/>
             </a:avLst>
           </a:prstGeom>
           <a:solidFill>
+            <a:srgbClr val="FCE7F3"/>
+          </a:solidFill>
+          <a:ln w="12700">
+            <a:solidFill>
+              <a:srgbClr val="DB2777"/>
+            </a:solidFill>
+            <a:prstDash val="solid"/>
+          </a:ln>
+        </p:spPr>
+      </p:sp>
+      <p:sp>
+        <p:nvSpPr>
+          <p:cNvPr id="36" name="Shape 34"/>
+          <p:cNvSpPr/>
+          <p:nvPr/>
+        </p:nvSpPr>
+        <p:spPr>
+          <a:xfrm>
+            <a:off x="2254649" y="4169664"/>
+            <a:ext cx="685800" cy="475488"/>
+          </a:xfrm>
+          <a:prstGeom prst="rect">
+            <a:avLst>
+              <a:gd name="adj" fmla="val 7692"/>
+            </a:avLst>
+          </a:prstGeom>
+          <a:solidFill>
             <a:srgbClr val="FFFFFF"/>
           </a:solidFill>
           <a:ln w="12700">
             <a:solidFill>
-              <a:srgbClr val="0D9488"/>
-            </a:solidFill>
-            <a:prstDash val="solid"/>
-          </a:ln>
-        </p:spPr>
-      </p:sp>
-      <p:sp>
-        <p:nvSpPr>
-          <p:cNvPr id="35" name="Text 33"/>
-          <p:cNvSpPr/>
-          <p:nvPr/>
-        </p:nvSpPr>
-        <p:spPr>
-          <a:xfrm>
-            <a:off x="6428232" y="3364992"/>
-            <a:ext cx="1645920" cy="475488"/>
-          </a:xfrm>
-          <a:prstGeom prst="rect">
-            <a:avLst/>
-          </a:prstGeom>
-          <a:noFill/>
-          <a:ln/>
-        </p:spPr>
-        <p:txBody>
-          <a:bodyPr wrap="square" lIns="0" tIns="0" rIns="0" bIns="0" rtlCol="0" anchor="ctr"/>
-          <a:lstStyle/>
-          <a:p>
-            <a:pPr algn="ctr" indent="0" marL="0">
-              <a:buNone/>
-            </a:pPr>
-            <a:r>
-              <a:rPr lang="en-US" sz="1400" b="1" dirty="0">
-                <a:solidFill>
-                  <a:srgbClr val="0D9488"/>
+              <a:srgbClr val="DB2777"/>
+            </a:solidFill>
+            <a:prstDash val="solid"/>
+          </a:ln>
+        </p:spPr>
+      </p:sp>
+      <p:sp>
+        <p:nvSpPr>
+          <p:cNvPr id="37" name="Text 35"/>
+          <p:cNvSpPr/>
+          <p:nvPr/>
+        </p:nvSpPr>
+        <p:spPr>
+          <a:xfrm>
+            <a:off x="2254649" y="4169664"/>
+            <a:ext cx="685800" cy="475488"/>
+          </a:xfrm>
+          <a:prstGeom prst="rect">
+            <a:avLst/>
+          </a:prstGeom>
+          <a:noFill/>
+          <a:ln/>
+        </p:spPr>
+        <p:txBody>
+          <a:bodyPr wrap="square" lIns="0" tIns="0" rIns="0" bIns="0" rtlCol="0" anchor="ctr"/>
+          <a:lstStyle/>
+          <a:p>
+            <a:pPr algn="ctr" indent="0" marL="0">
+              <a:buNone/>
+            </a:pPr>
+            <a:r>
+              <a:rPr lang="en-US" sz="900" b="1" dirty="0">
+                <a:solidFill>
+                  <a:srgbClr val="9D174D"/>
                 </a:solidFill>
                 <a:latin typeface="Trebuchet MS" pitchFamily="34" charset="0"/>
                 <a:ea typeface="Trebuchet MS" pitchFamily="34" charset="-122"/>
                 <a:cs typeface="Trebuchet MS" pitchFamily="34" charset="-120"/>
               </a:rPr>
-              <a:t>er</a:t>
-            </a:r>
-            <a:endParaRPr lang="en-US" sz="1400" dirty="0"/>
-          </a:p>
-        </p:txBody>
-      </p:sp>
-      <p:sp>
-        <p:nvSpPr>
-          <p:cNvPr id="36" name="Shape 34"/>
-          <p:cNvSpPr/>
-          <p:nvPr/>
-        </p:nvSpPr>
-        <p:spPr>
-          <a:xfrm>
-            <a:off x="365760" y="4096512"/>
-            <a:ext cx="1371600" cy="804672"/>
+              <a:t>r</a:t>
+            </a:r>
+            <a:endParaRPr lang="en-US" sz="900" dirty="0"/>
+          </a:p>
+        </p:txBody>
+      </p:sp>
+      <p:sp>
+        <p:nvSpPr>
+          <p:cNvPr id="38" name="Shape 36"/>
+          <p:cNvSpPr/>
+          <p:nvPr/>
+        </p:nvSpPr>
+        <p:spPr>
+          <a:xfrm>
+            <a:off x="3293146" y="4169664"/>
+            <a:ext cx="685800" cy="475488"/>
           </a:xfrm>
           <a:prstGeom prst="rect">
             <a:avLst>
-              <a:gd name="adj" fmla="val 6818"/>
+              <a:gd name="adj" fmla="val 7692"/>
             </a:avLst>
           </a:prstGeom>
           <a:solidFill>
-            <a:srgbClr val="E2E8F0"/>
-          </a:solidFill>
-          <a:ln w="12700">
-            <a:solidFill>
-              <a:srgbClr val="E2E8F0"/>
-            </a:solidFill>
-            <a:prstDash val="solid"/>
-          </a:ln>
-        </p:spPr>
-      </p:sp>
-      <p:sp>
-        <p:nvSpPr>
-          <p:cNvPr id="37" name="Text 35"/>
-          <p:cNvSpPr/>
-          <p:nvPr/>
-        </p:nvSpPr>
-        <p:spPr>
-          <a:xfrm>
-            <a:off x="365760" y="4096512"/>
-            <a:ext cx="1371600" cy="804672"/>
-          </a:xfrm>
-          <a:prstGeom prst="rect">
-            <a:avLst/>
-          </a:prstGeom>
-          <a:noFill/>
-          <a:ln/>
-        </p:spPr>
-        <p:txBody>
-          <a:bodyPr wrap="square" lIns="0" tIns="0" rIns="0" bIns="0" rtlCol="0" anchor="ctr"/>
-          <a:lstStyle/>
-          <a:p>
-            <a:pPr algn="ctr" indent="0" marL="0">
-              <a:buNone/>
-            </a:pPr>
-            <a:r>
-              <a:rPr lang="en-US" sz="1100" b="1" dirty="0">
-                <a:solidFill>
-                  <a:srgbClr val="475569"/>
+            <a:srgbClr val="FFFFFF"/>
+          </a:solidFill>
+          <a:ln w="12700">
+            <a:solidFill>
+              <a:srgbClr val="DB2777"/>
+            </a:solidFill>
+            <a:prstDash val="solid"/>
+          </a:ln>
+        </p:spPr>
+      </p:sp>
+      <p:sp>
+        <p:nvSpPr>
+          <p:cNvPr id="39" name="Text 37"/>
+          <p:cNvSpPr/>
+          <p:nvPr/>
+        </p:nvSpPr>
+        <p:spPr>
+          <a:xfrm>
+            <a:off x="3293146" y="4169664"/>
+            <a:ext cx="685800" cy="475488"/>
+          </a:xfrm>
+          <a:prstGeom prst="rect">
+            <a:avLst/>
+          </a:prstGeom>
+          <a:noFill/>
+          <a:ln/>
+        </p:spPr>
+        <p:txBody>
+          <a:bodyPr wrap="square" lIns="0" tIns="0" rIns="0" bIns="0" rtlCol="0" anchor="ctr"/>
+          <a:lstStyle/>
+          <a:p>
+            <a:pPr algn="ctr" indent="0" marL="0">
+              <a:buNone/>
+            </a:pPr>
+            <a:r>
+              <a:rPr lang="en-US" sz="900" b="1" dirty="0">
+                <a:solidFill>
+                  <a:srgbClr val="9D174D"/>
                 </a:solidFill>
                 <a:latin typeface="Trebuchet MS" pitchFamily="34" charset="0"/>
                 <a:ea typeface="Trebuchet MS" pitchFamily="34" charset="-122"/>
                 <a:cs typeface="Trebuchet MS" pitchFamily="34" charset="-120"/>
               </a:rPr>
-              <a:t>Phonemes</a:t>
-            </a:r>
-            <a:endParaRPr lang="en-US" sz="1100" dirty="0"/>
-          </a:p>
-        </p:txBody>
-      </p:sp>
-      <p:sp>
-        <p:nvSpPr>
-          <p:cNvPr id="38" name="Shape 36"/>
-          <p:cNvSpPr/>
-          <p:nvPr/>
-        </p:nvSpPr>
-        <p:spPr>
-          <a:xfrm>
-            <a:off x="1874520" y="4096512"/>
-            <a:ext cx="6903720" cy="658368"/>
-          </a:xfrm>
-          <a:prstGeom prst="rect">
-            <a:avLst>
-              <a:gd name="adj" fmla="val 8333"/>
-            </a:avLst>
-          </a:prstGeom>
-          <a:solidFill>
-            <a:srgbClr val="FCE7F3"/>
-          </a:solidFill>
-          <a:ln w="12700">
-            <a:solidFill>
-              <a:srgbClr val="DB2777"/>
-            </a:solidFill>
-            <a:prstDash val="solid"/>
-          </a:ln>
-        </p:spPr>
-      </p:sp>
-      <p:sp>
-        <p:nvSpPr>
-          <p:cNvPr id="39" name="Shape 37"/>
-          <p:cNvSpPr/>
-          <p:nvPr/>
-        </p:nvSpPr>
-        <p:spPr>
-          <a:xfrm>
-            <a:off x="2254649" y="4169664"/>
+              <a:t>e</a:t>
+            </a:r>
+            <a:endParaRPr lang="en-US" sz="900" dirty="0"/>
+          </a:p>
+        </p:txBody>
+      </p:sp>
+      <p:sp>
+        <p:nvSpPr>
+          <p:cNvPr id="40" name="Shape 38"/>
+          <p:cNvSpPr/>
+          <p:nvPr/>
+        </p:nvSpPr>
+        <p:spPr>
+          <a:xfrm>
+            <a:off x="4331643" y="4169664"/>
             <a:ext cx="685800" cy="475488"/>
           </a:xfrm>
           <a:prstGeom prst="rect">
@@ -29627,13 +29042,13 @@
       </p:sp>
       <p:sp>
         <p:nvSpPr>
-          <p:cNvPr id="40" name="Text 38"/>
-          <p:cNvSpPr/>
-          <p:nvPr/>
-        </p:nvSpPr>
-        <p:spPr>
-          <a:xfrm>
-            <a:off x="2254649" y="4169664"/>
+          <p:cNvPr id="41" name="Text 39"/>
+          <p:cNvSpPr/>
+          <p:nvPr/>
+        </p:nvSpPr>
+        <p:spPr>
+          <a:xfrm>
+            <a:off x="4331643" y="4169664"/>
             <a:ext cx="685800" cy="475488"/>
           </a:xfrm>
           <a:prstGeom prst="rect">
@@ -29658,7 +29073,7 @@
                 <a:ea typeface="Trebuchet MS" pitchFamily="34" charset="-122"/>
                 <a:cs typeface="Trebuchet MS" pitchFamily="34" charset="-120"/>
               </a:rPr>
-              <a:t>r</a:t>
+              <a:t>t</a:t>
             </a:r>
             <a:endParaRPr lang="en-US" sz="900" dirty="0"/>
           </a:p>
@@ -29666,13 +29081,13 @@
       </p:sp>
       <p:sp>
         <p:nvSpPr>
-          <p:cNvPr id="41" name="Shape 39"/>
-          <p:cNvSpPr/>
-          <p:nvPr/>
-        </p:nvSpPr>
-        <p:spPr>
-          <a:xfrm>
-            <a:off x="3293146" y="4169664"/>
+          <p:cNvPr id="42" name="Shape 40"/>
+          <p:cNvSpPr/>
+          <p:nvPr/>
+        </p:nvSpPr>
+        <p:spPr>
+          <a:xfrm>
+            <a:off x="5370141" y="4169664"/>
             <a:ext cx="685800" cy="475488"/>
           </a:xfrm>
           <a:prstGeom prst="rect">
@@ -29693,13 +29108,13 @@
       </p:sp>
       <p:sp>
         <p:nvSpPr>
-          <p:cNvPr id="42" name="Text 40"/>
-          <p:cNvSpPr/>
-          <p:nvPr/>
-        </p:nvSpPr>
-        <p:spPr>
-          <a:xfrm>
-            <a:off x="3293146" y="4169664"/>
+          <p:cNvPr id="43" name="Text 41"/>
+          <p:cNvSpPr/>
+          <p:nvPr/>
+        </p:nvSpPr>
+        <p:spPr>
+          <a:xfrm>
+            <a:off x="5370141" y="4169664"/>
             <a:ext cx="685800" cy="475488"/>
           </a:xfrm>
           <a:prstGeom prst="rect">
@@ -29724,7 +29139,7 @@
                 <a:ea typeface="Trebuchet MS" pitchFamily="34" charset="-122"/>
                 <a:cs typeface="Trebuchet MS" pitchFamily="34" charset="-120"/>
               </a:rPr>
-              <a:t>e</a:t>
+              <a:t>ur</a:t>
             </a:r>
             <a:endParaRPr lang="en-US" sz="900" dirty="0"/>
           </a:p>
@@ -29732,13 +29147,13 @@
       </p:sp>
       <p:sp>
         <p:nvSpPr>
-          <p:cNvPr id="43" name="Shape 41"/>
-          <p:cNvSpPr/>
-          <p:nvPr/>
-        </p:nvSpPr>
-        <p:spPr>
-          <a:xfrm>
-            <a:off x="4331643" y="4169664"/>
+          <p:cNvPr id="44" name="Shape 42"/>
+          <p:cNvSpPr/>
+          <p:nvPr/>
+        </p:nvSpPr>
+        <p:spPr>
+          <a:xfrm>
+            <a:off x="6408638" y="4169664"/>
             <a:ext cx="685800" cy="475488"/>
           </a:xfrm>
           <a:prstGeom prst="rect">
@@ -29759,13 +29174,13 @@
       </p:sp>
       <p:sp>
         <p:nvSpPr>
-          <p:cNvPr id="44" name="Text 42"/>
-          <p:cNvSpPr/>
-          <p:nvPr/>
-        </p:nvSpPr>
-        <p:spPr>
-          <a:xfrm>
-            <a:off x="4331643" y="4169664"/>
+          <p:cNvPr id="45" name="Text 43"/>
+          <p:cNvSpPr/>
+          <p:nvPr/>
+        </p:nvSpPr>
+        <p:spPr>
+          <a:xfrm>
+            <a:off x="6408638" y="4169664"/>
             <a:ext cx="685800" cy="475488"/>
           </a:xfrm>
           <a:prstGeom prst="rect">
@@ -29790,7 +29205,7 @@
                 <a:ea typeface="Trebuchet MS" pitchFamily="34" charset="-122"/>
                 <a:cs typeface="Trebuchet MS" pitchFamily="34" charset="-120"/>
               </a:rPr>
-              <a:t>t</a:t>
+              <a:t>n</a:t>
             </a:r>
             <a:endParaRPr lang="en-US" sz="900" dirty="0"/>
           </a:p>
@@ -29798,13 +29213,13 @@
       </p:sp>
       <p:sp>
         <p:nvSpPr>
-          <p:cNvPr id="45" name="Shape 43"/>
-          <p:cNvSpPr/>
-          <p:nvPr/>
-        </p:nvSpPr>
-        <p:spPr>
-          <a:xfrm>
-            <a:off x="5370141" y="4169664"/>
+          <p:cNvPr id="46" name="Shape 44"/>
+          <p:cNvSpPr/>
+          <p:nvPr/>
+        </p:nvSpPr>
+        <p:spPr>
+          <a:xfrm>
+            <a:off x="7447135" y="4169664"/>
             <a:ext cx="685800" cy="475488"/>
           </a:xfrm>
           <a:prstGeom prst="rect">
@@ -29825,13 +29240,13 @@
       </p:sp>
       <p:sp>
         <p:nvSpPr>
-          <p:cNvPr id="46" name="Text 44"/>
-          <p:cNvSpPr/>
-          <p:nvPr/>
-        </p:nvSpPr>
-        <p:spPr>
-          <a:xfrm>
-            <a:off x="5370141" y="4169664"/>
+          <p:cNvPr id="47" name="Text 45"/>
+          <p:cNvSpPr/>
+          <p:nvPr/>
+        </p:nvSpPr>
+        <p:spPr>
+          <a:xfrm>
+            <a:off x="7447135" y="4169664"/>
             <a:ext cx="685800" cy="475488"/>
           </a:xfrm>
           <a:prstGeom prst="rect">
@@ -29856,139 +29271,7 @@
                 <a:ea typeface="Trebuchet MS" pitchFamily="34" charset="-122"/>
                 <a:cs typeface="Trebuchet MS" pitchFamily="34" charset="-120"/>
               </a:rPr>
-              <a:t>ur</a:t>
-            </a:r>
-            <a:endParaRPr lang="en-US" sz="900" dirty="0"/>
-          </a:p>
-        </p:txBody>
-      </p:sp>
-      <p:sp>
-        <p:nvSpPr>
-          <p:cNvPr id="47" name="Shape 45"/>
-          <p:cNvSpPr/>
-          <p:nvPr/>
-        </p:nvSpPr>
-        <p:spPr>
-          <a:xfrm>
-            <a:off x="6408638" y="4169664"/>
-            <a:ext cx="685800" cy="475488"/>
-          </a:xfrm>
-          <a:prstGeom prst="rect">
-            <a:avLst>
-              <a:gd name="adj" fmla="val 7692"/>
-            </a:avLst>
-          </a:prstGeom>
-          <a:solidFill>
-            <a:srgbClr val="FFFFFF"/>
-          </a:solidFill>
-          <a:ln w="12700">
-            <a:solidFill>
-              <a:srgbClr val="DB2777"/>
-            </a:solidFill>
-            <a:prstDash val="solid"/>
-          </a:ln>
-        </p:spPr>
-      </p:sp>
-      <p:sp>
-        <p:nvSpPr>
-          <p:cNvPr id="48" name="Text 46"/>
-          <p:cNvSpPr/>
-          <p:nvPr/>
-        </p:nvSpPr>
-        <p:spPr>
-          <a:xfrm>
-            <a:off x="6408638" y="4169664"/>
-            <a:ext cx="685800" cy="475488"/>
-          </a:xfrm>
-          <a:prstGeom prst="rect">
-            <a:avLst/>
-          </a:prstGeom>
-          <a:noFill/>
-          <a:ln/>
-        </p:spPr>
-        <p:txBody>
-          <a:bodyPr wrap="square" lIns="0" tIns="0" rIns="0" bIns="0" rtlCol="0" anchor="ctr"/>
-          <a:lstStyle/>
-          <a:p>
-            <a:pPr algn="ctr" indent="0" marL="0">
-              <a:buNone/>
-            </a:pPr>
-            <a:r>
-              <a:rPr lang="en-US" sz="900" b="1" dirty="0">
-                <a:solidFill>
-                  <a:srgbClr val="9D174D"/>
-                </a:solidFill>
-                <a:latin typeface="Trebuchet MS" pitchFamily="34" charset="0"/>
-                <a:ea typeface="Trebuchet MS" pitchFamily="34" charset="-122"/>
-                <a:cs typeface="Trebuchet MS" pitchFamily="34" charset="-120"/>
-              </a:rPr>
-              <a:t>n</a:t>
-            </a:r>
-            <a:endParaRPr lang="en-US" sz="900" dirty="0"/>
-          </a:p>
-        </p:txBody>
-      </p:sp>
-      <p:sp>
-        <p:nvSpPr>
-          <p:cNvPr id="49" name="Shape 47"/>
-          <p:cNvSpPr/>
-          <p:nvPr/>
-        </p:nvSpPr>
-        <p:spPr>
-          <a:xfrm>
-            <a:off x="7447135" y="4169664"/>
-            <a:ext cx="685800" cy="475488"/>
-          </a:xfrm>
-          <a:prstGeom prst="rect">
-            <a:avLst>
-              <a:gd name="adj" fmla="val 7692"/>
-            </a:avLst>
-          </a:prstGeom>
-          <a:solidFill>
-            <a:srgbClr val="FFFFFF"/>
-          </a:solidFill>
-          <a:ln w="12700">
-            <a:solidFill>
-              <a:srgbClr val="DB2777"/>
-            </a:solidFill>
-            <a:prstDash val="solid"/>
-          </a:ln>
-        </p:spPr>
-      </p:sp>
-      <p:sp>
-        <p:nvSpPr>
-          <p:cNvPr id="50" name="Text 48"/>
-          <p:cNvSpPr/>
-          <p:nvPr/>
-        </p:nvSpPr>
-        <p:spPr>
-          <a:xfrm>
-            <a:off x="7447135" y="4169664"/>
-            <a:ext cx="685800" cy="475488"/>
-          </a:xfrm>
-          <a:prstGeom prst="rect">
-            <a:avLst/>
-          </a:prstGeom>
-          <a:noFill/>
-          <a:ln/>
-        </p:spPr>
-        <p:txBody>
-          <a:bodyPr wrap="square" lIns="0" tIns="0" rIns="0" bIns="0" rtlCol="0" anchor="ctr"/>
-          <a:lstStyle/>
-          <a:p>
-            <a:pPr algn="ctr" indent="0" marL="0">
-              <a:buNone/>
-            </a:pPr>
-            <a:r>
-              <a:rPr lang="en-US" sz="900" b="1" dirty="0">
-                <a:solidFill>
-                  <a:srgbClr val="9D174D"/>
-                </a:solidFill>
-                <a:latin typeface="Trebuchet MS" pitchFamily="34" charset="0"/>
-                <a:ea typeface="Trebuchet MS" pitchFamily="34" charset="-122"/>
-                <a:cs typeface="Trebuchet MS" pitchFamily="34" charset="-120"/>
-              </a:rPr>
-              <a:t>er</a:t>
+              <a:t>ed</a:t>
             </a:r>
             <a:endParaRPr lang="en-US" sz="900" dirty="0"/>
           </a:p>
@@ -30419,7 +29702,7 @@
                 <a:ea typeface="Trebuchet MS" pitchFamily="34" charset="-122"/>
                 <a:cs typeface="Trebuchet MS" pitchFamily="34" charset="-120"/>
               </a:rPr>
-              <a:t>returning</a:t>
+              <a:t>returns</a:t>
             </a:r>
             <a:endParaRPr lang="en-US" sz="2800" dirty="0"/>
           </a:p>
@@ -31246,7 +30529,7 @@
                 <a:ea typeface="Trebuchet MS" pitchFamily="34" charset="-122"/>
                 <a:cs typeface="Trebuchet MS" pitchFamily="34" charset="-120"/>
               </a:rPr>
-              <a:t>returning</a:t>
+              <a:t>returns</a:t>
             </a:r>
             <a:endParaRPr lang="en-US" sz="2800" dirty="0"/>
           </a:p>
@@ -31536,7 +30819,7 @@
                 <a:ea typeface="Calibri" pitchFamily="34" charset="-122"/>
                 <a:cs typeface="Calibri" pitchFamily="34" charset="-120"/>
               </a:rPr>
-              <a:t>to turn, go around</a:t>
+              <a:t>turn, go back</a:t>
             </a:r>
             <a:endParaRPr lang="en-US" sz="850" dirty="0"/>
           </a:p>
@@ -31609,7 +30892,7 @@
                 <a:ea typeface="Trebuchet MS" pitchFamily="34" charset="-122"/>
                 <a:cs typeface="Trebuchet MS" pitchFamily="34" charset="-120"/>
               </a:rPr>
-              <a:t>ing</a:t>
+              <a:t>s</a:t>
             </a:r>
             <a:endParaRPr lang="en-US" sz="1300" dirty="0"/>
           </a:p>
@@ -31648,7 +30931,7 @@
                 <a:ea typeface="Calibri" pitchFamily="34" charset="-122"/>
                 <a:cs typeface="Calibri" pitchFamily="34" charset="-120"/>
               </a:rPr>
-              <a:t>in the process of</a:t>
+              <a:t>more than one, or third person</a:t>
             </a:r>
             <a:endParaRPr lang="en-US" sz="850" dirty="0"/>
           </a:p>
@@ -32343,7 +31626,7 @@
                 <a:ea typeface="Trebuchet MS" pitchFamily="34" charset="-122"/>
                 <a:cs typeface="Trebuchet MS" pitchFamily="34" charset="-120"/>
               </a:rPr>
-              <a:t>returning</a:t>
+              <a:t>returns</a:t>
             </a:r>
             <a:endParaRPr lang="en-US" sz="2800" dirty="0"/>
           </a:p>
@@ -32633,7 +31916,7 @@
                 <a:ea typeface="Calibri" pitchFamily="34" charset="-122"/>
                 <a:cs typeface="Calibri" pitchFamily="34" charset="-120"/>
               </a:rPr>
-              <a:t>to turn, go around</a:t>
+              <a:t>turn, go back</a:t>
             </a:r>
             <a:endParaRPr lang="en-US" sz="850" dirty="0"/>
           </a:p>
@@ -32706,7 +31989,7 @@
                 <a:ea typeface="Trebuchet MS" pitchFamily="34" charset="-122"/>
                 <a:cs typeface="Trebuchet MS" pitchFamily="34" charset="-120"/>
               </a:rPr>
-              <a:t>ing</a:t>
+              <a:t>s</a:t>
             </a:r>
             <a:endParaRPr lang="en-US" sz="1300" dirty="0"/>
           </a:p>
@@ -32745,7 +32028,7 @@
                 <a:ea typeface="Calibri" pitchFamily="34" charset="-122"/>
                 <a:cs typeface="Calibri" pitchFamily="34" charset="-120"/>
               </a:rPr>
-              <a:t>in the process of</a:t>
+              <a:t>more than one, or third person</a:t>
             </a:r>
             <a:endParaRPr lang="en-US" sz="850" dirty="0"/>
           </a:p>
@@ -32852,7 +32135,7 @@
         </p:nvSpPr>
         <p:spPr>
           <a:xfrm>
-            <a:off x="2313432" y="3364992"/>
+            <a:off x="2999232" y="3364992"/>
             <a:ext cx="1645920" cy="475488"/>
           </a:xfrm>
           <a:prstGeom prst="rect">
@@ -32879,7 +32162,7 @@
         </p:nvSpPr>
         <p:spPr>
           <a:xfrm>
-            <a:off x="2313432" y="3364992"/>
+            <a:off x="2999232" y="3364992"/>
             <a:ext cx="1645920" cy="475488"/>
           </a:xfrm>
           <a:prstGeom prst="rect">
@@ -32918,8 +32201,8 @@
         </p:nvSpPr>
         <p:spPr>
           <a:xfrm>
-            <a:off x="3959352" y="3364992"/>
-            <a:ext cx="411480" cy="475488"/>
+            <a:off x="4645152" y="3364992"/>
+            <a:ext cx="1097280" cy="475488"/>
           </a:xfrm>
           <a:prstGeom prst="rect">
             <a:avLst/>
@@ -32957,7 +32240,7 @@
         </p:nvSpPr>
         <p:spPr>
           <a:xfrm>
-            <a:off x="4370832" y="3364992"/>
+            <a:off x="5742432" y="3364992"/>
             <a:ext cx="1645920" cy="475488"/>
           </a:xfrm>
           <a:prstGeom prst="rect">
@@ -32984,7 +32267,7 @@
         </p:nvSpPr>
         <p:spPr>
           <a:xfrm>
-            <a:off x="4370832" y="3364992"/>
+            <a:off x="5742432" y="3364992"/>
             <a:ext cx="1645920" cy="475488"/>
           </a:xfrm>
           <a:prstGeom prst="rect">
@@ -33009,7 +32292,7 @@
                 <a:ea typeface="Trebuchet MS" pitchFamily="34" charset="-122"/>
                 <a:cs typeface="Trebuchet MS" pitchFamily="34" charset="-120"/>
               </a:rPr>
-              <a:t>turn</a:t>
+              <a:t>turns</a:t>
             </a:r>
             <a:endParaRPr lang="en-US" sz="1400" dirty="0"/>
           </a:p>
@@ -33017,119 +32300,80 @@
       </p:sp>
       <p:sp>
         <p:nvSpPr>
-          <p:cNvPr id="33" name="Text 31"/>
-          <p:cNvSpPr/>
-          <p:nvPr/>
-        </p:nvSpPr>
-        <p:spPr>
-          <a:xfrm>
-            <a:off x="6016752" y="3364992"/>
-            <a:ext cx="411480" cy="475488"/>
-          </a:xfrm>
-          <a:prstGeom prst="rect">
-            <a:avLst/>
-          </a:prstGeom>
-          <a:noFill/>
-          <a:ln/>
-        </p:spPr>
-        <p:txBody>
-          <a:bodyPr wrap="square" lIns="0" tIns="0" rIns="0" bIns="0" rtlCol="0" anchor="ctr"/>
-          <a:lstStyle/>
-          <a:p>
-            <a:pPr algn="ctr" indent="0" marL="0">
-              <a:buNone/>
-            </a:pPr>
-            <a:r>
-              <a:rPr lang="en-US" sz="1600" b="1" dirty="0">
-                <a:solidFill>
-                  <a:srgbClr val="0D9488"/>
+          <p:cNvPr id="33" name="Shape 31"/>
+          <p:cNvSpPr/>
+          <p:nvPr/>
+        </p:nvSpPr>
+        <p:spPr>
+          <a:xfrm>
+            <a:off x="365760" y="4096512"/>
+            <a:ext cx="1371600" cy="804672"/>
+          </a:xfrm>
+          <a:prstGeom prst="rect">
+            <a:avLst>
+              <a:gd name="adj" fmla="val 6818"/>
+            </a:avLst>
+          </a:prstGeom>
+          <a:solidFill>
+            <a:srgbClr val="E2E8F0"/>
+          </a:solidFill>
+          <a:ln w="12700">
+            <a:solidFill>
+              <a:srgbClr val="E2E8F0"/>
+            </a:solidFill>
+            <a:prstDash val="solid"/>
+          </a:ln>
+        </p:spPr>
+      </p:sp>
+      <p:sp>
+        <p:nvSpPr>
+          <p:cNvPr id="34" name="Text 32"/>
+          <p:cNvSpPr/>
+          <p:nvPr/>
+        </p:nvSpPr>
+        <p:spPr>
+          <a:xfrm>
+            <a:off x="365760" y="4096512"/>
+            <a:ext cx="1371600" cy="804672"/>
+          </a:xfrm>
+          <a:prstGeom prst="rect">
+            <a:avLst/>
+          </a:prstGeom>
+          <a:noFill/>
+          <a:ln/>
+        </p:spPr>
+        <p:txBody>
+          <a:bodyPr wrap="square" lIns="0" tIns="0" rIns="0" bIns="0" rtlCol="0" anchor="ctr"/>
+          <a:lstStyle/>
+          <a:p>
+            <a:pPr algn="ctr" indent="0" marL="0">
+              <a:buNone/>
+            </a:pPr>
+            <a:r>
+              <a:rPr lang="en-US" sz="1100" b="1" dirty="0">
+                <a:solidFill>
+                  <a:srgbClr val="475569"/>
                 </a:solidFill>
                 <a:latin typeface="Trebuchet MS" pitchFamily="34" charset="0"/>
                 <a:ea typeface="Trebuchet MS" pitchFamily="34" charset="-122"/>
                 <a:cs typeface="Trebuchet MS" pitchFamily="34" charset="-120"/>
               </a:rPr>
-              <a:t>·</a:t>
-            </a:r>
-            <a:endParaRPr lang="en-US" sz="1600" dirty="0"/>
-          </a:p>
-        </p:txBody>
-      </p:sp>
-      <p:sp>
-        <p:nvSpPr>
-          <p:cNvPr id="34" name="Shape 32"/>
-          <p:cNvSpPr/>
-          <p:nvPr/>
-        </p:nvSpPr>
-        <p:spPr>
-          <a:xfrm>
-            <a:off x="6428232" y="3364992"/>
-            <a:ext cx="1645920" cy="475488"/>
-          </a:xfrm>
-          <a:prstGeom prst="rect">
-            <a:avLst>
-              <a:gd name="adj" fmla="val 9615"/>
-            </a:avLst>
-          </a:prstGeom>
-          <a:solidFill>
-            <a:srgbClr val="FFFFFF"/>
-          </a:solidFill>
-          <a:ln w="12700">
-            <a:solidFill>
-              <a:srgbClr val="0D9488"/>
-            </a:solidFill>
-            <a:prstDash val="solid"/>
-          </a:ln>
-        </p:spPr>
-      </p:sp>
-      <p:sp>
-        <p:nvSpPr>
-          <p:cNvPr id="35" name="Text 33"/>
-          <p:cNvSpPr/>
-          <p:nvPr/>
-        </p:nvSpPr>
-        <p:spPr>
-          <a:xfrm>
-            <a:off x="6428232" y="3364992"/>
-            <a:ext cx="1645920" cy="475488"/>
-          </a:xfrm>
-          <a:prstGeom prst="rect">
-            <a:avLst/>
-          </a:prstGeom>
-          <a:noFill/>
-          <a:ln/>
-        </p:spPr>
-        <p:txBody>
-          <a:bodyPr wrap="square" lIns="0" tIns="0" rIns="0" bIns="0" rtlCol="0" anchor="ctr"/>
-          <a:lstStyle/>
-          <a:p>
-            <a:pPr algn="ctr" indent="0" marL="0">
-              <a:buNone/>
-            </a:pPr>
-            <a:r>
-              <a:rPr lang="en-US" sz="1400" b="1" dirty="0">
-                <a:solidFill>
-                  <a:srgbClr val="0D9488"/>
-                </a:solidFill>
-                <a:latin typeface="Trebuchet MS" pitchFamily="34" charset="0"/>
-                <a:ea typeface="Trebuchet MS" pitchFamily="34" charset="-122"/>
-                <a:cs typeface="Trebuchet MS" pitchFamily="34" charset="-120"/>
-              </a:rPr>
-              <a:t>ing</a:t>
-            </a:r>
-            <a:endParaRPr lang="en-US" sz="1400" dirty="0"/>
-          </a:p>
-        </p:txBody>
-      </p:sp>
-      <p:sp>
-        <p:nvSpPr>
-          <p:cNvPr id="36" name="Shape 34"/>
-          <p:cNvSpPr/>
-          <p:nvPr/>
-        </p:nvSpPr>
-        <p:spPr>
-          <a:xfrm>
-            <a:off x="365760" y="4096512"/>
-            <a:ext cx="1371600" cy="804672"/>
+              <a:t>Phonemes</a:t>
+            </a:r>
+            <a:endParaRPr lang="en-US" sz="1100" dirty="0"/>
+          </a:p>
+        </p:txBody>
+      </p:sp>
+      <p:sp>
+        <p:nvSpPr>
+          <p:cNvPr id="35" name="Shape 33"/>
+          <p:cNvSpPr/>
+          <p:nvPr/>
+        </p:nvSpPr>
+        <p:spPr>
+          <a:xfrm>
+            <a:off x="1874520" y="4096512"/>
+            <a:ext cx="6903720" cy="804672"/>
           </a:xfrm>
           <a:prstGeom prst="rect">
             <a:avLst>
@@ -33137,85 +32381,19 @@
             </a:avLst>
           </a:prstGeom>
           <a:solidFill>
-            <a:srgbClr val="E2E8F0"/>
+            <a:srgbClr val="F8FAFC"/>
           </a:solidFill>
           <a:ln w="12700">
             <a:solidFill>
               <a:srgbClr val="E2E8F0"/>
             </a:solidFill>
-            <a:prstDash val="solid"/>
-          </a:ln>
-        </p:spPr>
-      </p:sp>
-      <p:sp>
-        <p:nvSpPr>
-          <p:cNvPr id="37" name="Text 35"/>
-          <p:cNvSpPr/>
-          <p:nvPr/>
-        </p:nvSpPr>
-        <p:spPr>
-          <a:xfrm>
-            <a:off x="365760" y="4096512"/>
-            <a:ext cx="1371600" cy="804672"/>
-          </a:xfrm>
-          <a:prstGeom prst="rect">
-            <a:avLst/>
-          </a:prstGeom>
-          <a:noFill/>
-          <a:ln/>
-        </p:spPr>
-        <p:txBody>
-          <a:bodyPr wrap="square" lIns="0" tIns="0" rIns="0" bIns="0" rtlCol="0" anchor="ctr"/>
-          <a:lstStyle/>
-          <a:p>
-            <a:pPr algn="ctr" indent="0" marL="0">
-              <a:buNone/>
-            </a:pPr>
-            <a:r>
-              <a:rPr lang="en-US" sz="1100" b="1" dirty="0">
-                <a:solidFill>
-                  <a:srgbClr val="475569"/>
-                </a:solidFill>
-                <a:latin typeface="Trebuchet MS" pitchFamily="34" charset="0"/>
-                <a:ea typeface="Trebuchet MS" pitchFamily="34" charset="-122"/>
-                <a:cs typeface="Trebuchet MS" pitchFamily="34" charset="-120"/>
-              </a:rPr>
-              <a:t>Phonemes</a:t>
-            </a:r>
-            <a:endParaRPr lang="en-US" sz="1100" dirty="0"/>
-          </a:p>
-        </p:txBody>
-      </p:sp>
-      <p:sp>
-        <p:nvSpPr>
-          <p:cNvPr id="38" name="Shape 36"/>
-          <p:cNvSpPr/>
-          <p:nvPr/>
-        </p:nvSpPr>
-        <p:spPr>
-          <a:xfrm>
-            <a:off x="1874520" y="4096512"/>
-            <a:ext cx="6903720" cy="804672"/>
-          </a:xfrm>
-          <a:prstGeom prst="rect">
-            <a:avLst>
-              <a:gd name="adj" fmla="val 6818"/>
-            </a:avLst>
-          </a:prstGeom>
-          <a:solidFill>
-            <a:srgbClr val="F8FAFC"/>
-          </a:solidFill>
-          <a:ln w="12700">
-            <a:solidFill>
-              <a:srgbClr val="E2E8F0"/>
-            </a:solidFill>
             <a:prstDash val="dash"/>
           </a:ln>
         </p:spPr>
       </p:sp>
       <p:sp>
         <p:nvSpPr>
-          <p:cNvPr id="39" name="Text 37"/>
+          <p:cNvPr id="36" name="Text 34"/>
           <p:cNvSpPr/>
           <p:nvPr/>
         </p:nvSpPr>
@@ -33677,7 +32855,7 @@
                 <a:ea typeface="Trebuchet MS" pitchFamily="34" charset="-122"/>
                 <a:cs typeface="Trebuchet MS" pitchFamily="34" charset="-120"/>
               </a:rPr>
-              <a:t>returning</a:t>
+              <a:t>returns</a:t>
             </a:r>
             <a:endParaRPr lang="en-US" sz="2800" dirty="0"/>
           </a:p>
@@ -33967,7 +33145,7 @@
                 <a:ea typeface="Calibri" pitchFamily="34" charset="-122"/>
                 <a:cs typeface="Calibri" pitchFamily="34" charset="-120"/>
               </a:rPr>
-              <a:t>to turn, go around</a:t>
+              <a:t>turn, go back</a:t>
             </a:r>
             <a:endParaRPr lang="en-US" sz="850" dirty="0"/>
           </a:p>
@@ -34040,7 +33218,7 @@
                 <a:ea typeface="Trebuchet MS" pitchFamily="34" charset="-122"/>
                 <a:cs typeface="Trebuchet MS" pitchFamily="34" charset="-120"/>
               </a:rPr>
-              <a:t>ing</a:t>
+              <a:t>s</a:t>
             </a:r>
             <a:endParaRPr lang="en-US" sz="1300" dirty="0"/>
           </a:p>
@@ -34079,7 +33257,7 @@
                 <a:ea typeface="Calibri" pitchFamily="34" charset="-122"/>
                 <a:cs typeface="Calibri" pitchFamily="34" charset="-120"/>
               </a:rPr>
-              <a:t>in the process of</a:t>
+              <a:t>more than one, or third person</a:t>
             </a:r>
             <a:endParaRPr lang="en-US" sz="850" dirty="0"/>
           </a:p>
@@ -34186,7 +33364,7 @@
         </p:nvSpPr>
         <p:spPr>
           <a:xfrm>
-            <a:off x="2313432" y="3364992"/>
+            <a:off x="2999232" y="3364992"/>
             <a:ext cx="1645920" cy="475488"/>
           </a:xfrm>
           <a:prstGeom prst="rect">
@@ -34213,7 +33391,7 @@
         </p:nvSpPr>
         <p:spPr>
           <a:xfrm>
-            <a:off x="2313432" y="3364992"/>
+            <a:off x="2999232" y="3364992"/>
             <a:ext cx="1645920" cy="475488"/>
           </a:xfrm>
           <a:prstGeom prst="rect">
@@ -34252,8 +33430,8 @@
         </p:nvSpPr>
         <p:spPr>
           <a:xfrm>
-            <a:off x="3959352" y="3364992"/>
-            <a:ext cx="411480" cy="475488"/>
+            <a:off x="4645152" y="3364992"/>
+            <a:ext cx="1097280" cy="475488"/>
           </a:xfrm>
           <a:prstGeom prst="rect">
             <a:avLst/>
@@ -34291,7 +33469,7 @@
         </p:nvSpPr>
         <p:spPr>
           <a:xfrm>
-            <a:off x="4370832" y="3364992"/>
+            <a:off x="5742432" y="3364992"/>
             <a:ext cx="1645920" cy="475488"/>
           </a:xfrm>
           <a:prstGeom prst="rect">
@@ -34318,7 +33496,7 @@
         </p:nvSpPr>
         <p:spPr>
           <a:xfrm>
-            <a:off x="4370832" y="3364992"/>
+            <a:off x="5742432" y="3364992"/>
             <a:ext cx="1645920" cy="475488"/>
           </a:xfrm>
           <a:prstGeom prst="rect">
@@ -34343,7 +33521,7 @@
                 <a:ea typeface="Trebuchet MS" pitchFamily="34" charset="-122"/>
                 <a:cs typeface="Trebuchet MS" pitchFamily="34" charset="-120"/>
               </a:rPr>
-              <a:t>turn</a:t>
+              <a:t>turns</a:t>
             </a:r>
             <a:endParaRPr lang="en-US" sz="1400" dirty="0"/>
           </a:p>
@@ -34351,211 +33529,238 @@
       </p:sp>
       <p:sp>
         <p:nvSpPr>
-          <p:cNvPr id="33" name="Text 31"/>
-          <p:cNvSpPr/>
-          <p:nvPr/>
-        </p:nvSpPr>
-        <p:spPr>
-          <a:xfrm>
-            <a:off x="6016752" y="3364992"/>
-            <a:ext cx="411480" cy="475488"/>
-          </a:xfrm>
-          <a:prstGeom prst="rect">
-            <a:avLst/>
-          </a:prstGeom>
-          <a:noFill/>
-          <a:ln/>
-        </p:spPr>
-        <p:txBody>
-          <a:bodyPr wrap="square" lIns="0" tIns="0" rIns="0" bIns="0" rtlCol="0" anchor="ctr"/>
-          <a:lstStyle/>
-          <a:p>
-            <a:pPr algn="ctr" indent="0" marL="0">
-              <a:buNone/>
-            </a:pPr>
-            <a:r>
-              <a:rPr lang="en-US" sz="1600" b="1" dirty="0">
-                <a:solidFill>
-                  <a:srgbClr val="0D9488"/>
+          <p:cNvPr id="33" name="Shape 31"/>
+          <p:cNvSpPr/>
+          <p:nvPr/>
+        </p:nvSpPr>
+        <p:spPr>
+          <a:xfrm>
+            <a:off x="365760" y="4096512"/>
+            <a:ext cx="1371600" cy="804672"/>
+          </a:xfrm>
+          <a:prstGeom prst="rect">
+            <a:avLst>
+              <a:gd name="adj" fmla="val 6818"/>
+            </a:avLst>
+          </a:prstGeom>
+          <a:solidFill>
+            <a:srgbClr val="E2E8F0"/>
+          </a:solidFill>
+          <a:ln w="12700">
+            <a:solidFill>
+              <a:srgbClr val="E2E8F0"/>
+            </a:solidFill>
+            <a:prstDash val="solid"/>
+          </a:ln>
+        </p:spPr>
+      </p:sp>
+      <p:sp>
+        <p:nvSpPr>
+          <p:cNvPr id="34" name="Text 32"/>
+          <p:cNvSpPr/>
+          <p:nvPr/>
+        </p:nvSpPr>
+        <p:spPr>
+          <a:xfrm>
+            <a:off x="365760" y="4096512"/>
+            <a:ext cx="1371600" cy="804672"/>
+          </a:xfrm>
+          <a:prstGeom prst="rect">
+            <a:avLst/>
+          </a:prstGeom>
+          <a:noFill/>
+          <a:ln/>
+        </p:spPr>
+        <p:txBody>
+          <a:bodyPr wrap="square" lIns="0" tIns="0" rIns="0" bIns="0" rtlCol="0" anchor="ctr"/>
+          <a:lstStyle/>
+          <a:p>
+            <a:pPr algn="ctr" indent="0" marL="0">
+              <a:buNone/>
+            </a:pPr>
+            <a:r>
+              <a:rPr lang="en-US" sz="1100" b="1" dirty="0">
+                <a:solidFill>
+                  <a:srgbClr val="475569"/>
                 </a:solidFill>
                 <a:latin typeface="Trebuchet MS" pitchFamily="34" charset="0"/>
                 <a:ea typeface="Trebuchet MS" pitchFamily="34" charset="-122"/>
                 <a:cs typeface="Trebuchet MS" pitchFamily="34" charset="-120"/>
               </a:rPr>
-              <a:t>·</a:t>
-            </a:r>
-            <a:endParaRPr lang="en-US" sz="1600" dirty="0"/>
-          </a:p>
-        </p:txBody>
-      </p:sp>
-      <p:sp>
-        <p:nvSpPr>
-          <p:cNvPr id="34" name="Shape 32"/>
-          <p:cNvSpPr/>
-          <p:nvPr/>
-        </p:nvSpPr>
-        <p:spPr>
-          <a:xfrm>
-            <a:off x="6428232" y="3364992"/>
-            <a:ext cx="1645920" cy="475488"/>
+              <a:t>Phonemes</a:t>
+            </a:r>
+            <a:endParaRPr lang="en-US" sz="1100" dirty="0"/>
+          </a:p>
+        </p:txBody>
+      </p:sp>
+      <p:sp>
+        <p:nvSpPr>
+          <p:cNvPr id="35" name="Shape 33"/>
+          <p:cNvSpPr/>
+          <p:nvPr/>
+        </p:nvSpPr>
+        <p:spPr>
+          <a:xfrm>
+            <a:off x="1874520" y="4096512"/>
+            <a:ext cx="6903720" cy="658368"/>
           </a:xfrm>
           <a:prstGeom prst="rect">
             <a:avLst>
-              <a:gd name="adj" fmla="val 9615"/>
+              <a:gd name="adj" fmla="val 8333"/>
             </a:avLst>
           </a:prstGeom>
           <a:solidFill>
+            <a:srgbClr val="FCE7F3"/>
+          </a:solidFill>
+          <a:ln w="12700">
+            <a:solidFill>
+              <a:srgbClr val="DB2777"/>
+            </a:solidFill>
+            <a:prstDash val="solid"/>
+          </a:ln>
+        </p:spPr>
+      </p:sp>
+      <p:sp>
+        <p:nvSpPr>
+          <p:cNvPr id="36" name="Shape 34"/>
+          <p:cNvSpPr/>
+          <p:nvPr/>
+        </p:nvSpPr>
+        <p:spPr>
+          <a:xfrm>
+            <a:off x="2254649" y="4169664"/>
+            <a:ext cx="685800" cy="475488"/>
+          </a:xfrm>
+          <a:prstGeom prst="rect">
+            <a:avLst>
+              <a:gd name="adj" fmla="val 7692"/>
+            </a:avLst>
+          </a:prstGeom>
+          <a:solidFill>
             <a:srgbClr val="FFFFFF"/>
           </a:solidFill>
           <a:ln w="12700">
             <a:solidFill>
-              <a:srgbClr val="0D9488"/>
-            </a:solidFill>
-            <a:prstDash val="solid"/>
-          </a:ln>
-        </p:spPr>
-      </p:sp>
-      <p:sp>
-        <p:nvSpPr>
-          <p:cNvPr id="35" name="Text 33"/>
-          <p:cNvSpPr/>
-          <p:nvPr/>
-        </p:nvSpPr>
-        <p:spPr>
-          <a:xfrm>
-            <a:off x="6428232" y="3364992"/>
-            <a:ext cx="1645920" cy="475488"/>
-          </a:xfrm>
-          <a:prstGeom prst="rect">
-            <a:avLst/>
-          </a:prstGeom>
-          <a:noFill/>
-          <a:ln/>
-        </p:spPr>
-        <p:txBody>
-          <a:bodyPr wrap="square" lIns="0" tIns="0" rIns="0" bIns="0" rtlCol="0" anchor="ctr"/>
-          <a:lstStyle/>
-          <a:p>
-            <a:pPr algn="ctr" indent="0" marL="0">
-              <a:buNone/>
-            </a:pPr>
-            <a:r>
-              <a:rPr lang="en-US" sz="1400" b="1" dirty="0">
-                <a:solidFill>
-                  <a:srgbClr val="0D9488"/>
+              <a:srgbClr val="DB2777"/>
+            </a:solidFill>
+            <a:prstDash val="solid"/>
+          </a:ln>
+        </p:spPr>
+      </p:sp>
+      <p:sp>
+        <p:nvSpPr>
+          <p:cNvPr id="37" name="Text 35"/>
+          <p:cNvSpPr/>
+          <p:nvPr/>
+        </p:nvSpPr>
+        <p:spPr>
+          <a:xfrm>
+            <a:off x="2254649" y="4169664"/>
+            <a:ext cx="685800" cy="475488"/>
+          </a:xfrm>
+          <a:prstGeom prst="rect">
+            <a:avLst/>
+          </a:prstGeom>
+          <a:noFill/>
+          <a:ln/>
+        </p:spPr>
+        <p:txBody>
+          <a:bodyPr wrap="square" lIns="0" tIns="0" rIns="0" bIns="0" rtlCol="0" anchor="ctr"/>
+          <a:lstStyle/>
+          <a:p>
+            <a:pPr algn="ctr" indent="0" marL="0">
+              <a:buNone/>
+            </a:pPr>
+            <a:r>
+              <a:rPr lang="en-US" sz="900" b="1" dirty="0">
+                <a:solidFill>
+                  <a:srgbClr val="9D174D"/>
                 </a:solidFill>
                 <a:latin typeface="Trebuchet MS" pitchFamily="34" charset="0"/>
                 <a:ea typeface="Trebuchet MS" pitchFamily="34" charset="-122"/>
                 <a:cs typeface="Trebuchet MS" pitchFamily="34" charset="-120"/>
               </a:rPr>
-              <a:t>ing</a:t>
-            </a:r>
-            <a:endParaRPr lang="en-US" sz="1400" dirty="0"/>
-          </a:p>
-        </p:txBody>
-      </p:sp>
-      <p:sp>
-        <p:nvSpPr>
-          <p:cNvPr id="36" name="Shape 34"/>
-          <p:cNvSpPr/>
-          <p:nvPr/>
-        </p:nvSpPr>
-        <p:spPr>
-          <a:xfrm>
-            <a:off x="365760" y="4096512"/>
-            <a:ext cx="1371600" cy="804672"/>
+              <a:t>r</a:t>
+            </a:r>
+            <a:endParaRPr lang="en-US" sz="900" dirty="0"/>
+          </a:p>
+        </p:txBody>
+      </p:sp>
+      <p:sp>
+        <p:nvSpPr>
+          <p:cNvPr id="38" name="Shape 36"/>
+          <p:cNvSpPr/>
+          <p:nvPr/>
+        </p:nvSpPr>
+        <p:spPr>
+          <a:xfrm>
+            <a:off x="3293146" y="4169664"/>
+            <a:ext cx="685800" cy="475488"/>
           </a:xfrm>
           <a:prstGeom prst="rect">
             <a:avLst>
-              <a:gd name="adj" fmla="val 6818"/>
+              <a:gd name="adj" fmla="val 7692"/>
             </a:avLst>
           </a:prstGeom>
           <a:solidFill>
-            <a:srgbClr val="E2E8F0"/>
-          </a:solidFill>
-          <a:ln w="12700">
-            <a:solidFill>
-              <a:srgbClr val="E2E8F0"/>
-            </a:solidFill>
-            <a:prstDash val="solid"/>
-          </a:ln>
-        </p:spPr>
-      </p:sp>
-      <p:sp>
-        <p:nvSpPr>
-          <p:cNvPr id="37" name="Text 35"/>
-          <p:cNvSpPr/>
-          <p:nvPr/>
-        </p:nvSpPr>
-        <p:spPr>
-          <a:xfrm>
-            <a:off x="365760" y="4096512"/>
-            <a:ext cx="1371600" cy="804672"/>
-          </a:xfrm>
-          <a:prstGeom prst="rect">
-            <a:avLst/>
-          </a:prstGeom>
-          <a:noFill/>
-          <a:ln/>
-        </p:spPr>
-        <p:txBody>
-          <a:bodyPr wrap="square" lIns="0" tIns="0" rIns="0" bIns="0" rtlCol="0" anchor="ctr"/>
-          <a:lstStyle/>
-          <a:p>
-            <a:pPr algn="ctr" indent="0" marL="0">
-              <a:buNone/>
-            </a:pPr>
-            <a:r>
-              <a:rPr lang="en-US" sz="1100" b="1" dirty="0">
-                <a:solidFill>
-                  <a:srgbClr val="475569"/>
+            <a:srgbClr val="FFFFFF"/>
+          </a:solidFill>
+          <a:ln w="12700">
+            <a:solidFill>
+              <a:srgbClr val="DB2777"/>
+            </a:solidFill>
+            <a:prstDash val="solid"/>
+          </a:ln>
+        </p:spPr>
+      </p:sp>
+      <p:sp>
+        <p:nvSpPr>
+          <p:cNvPr id="39" name="Text 37"/>
+          <p:cNvSpPr/>
+          <p:nvPr/>
+        </p:nvSpPr>
+        <p:spPr>
+          <a:xfrm>
+            <a:off x="3293146" y="4169664"/>
+            <a:ext cx="685800" cy="475488"/>
+          </a:xfrm>
+          <a:prstGeom prst="rect">
+            <a:avLst/>
+          </a:prstGeom>
+          <a:noFill/>
+          <a:ln/>
+        </p:spPr>
+        <p:txBody>
+          <a:bodyPr wrap="square" lIns="0" tIns="0" rIns="0" bIns="0" rtlCol="0" anchor="ctr"/>
+          <a:lstStyle/>
+          <a:p>
+            <a:pPr algn="ctr" indent="0" marL="0">
+              <a:buNone/>
+            </a:pPr>
+            <a:r>
+              <a:rPr lang="en-US" sz="900" b="1" dirty="0">
+                <a:solidFill>
+                  <a:srgbClr val="9D174D"/>
                 </a:solidFill>
                 <a:latin typeface="Trebuchet MS" pitchFamily="34" charset="0"/>
                 <a:ea typeface="Trebuchet MS" pitchFamily="34" charset="-122"/>
                 <a:cs typeface="Trebuchet MS" pitchFamily="34" charset="-120"/>
               </a:rPr>
-              <a:t>Phonemes</a:t>
-            </a:r>
-            <a:endParaRPr lang="en-US" sz="1100" dirty="0"/>
-          </a:p>
-        </p:txBody>
-      </p:sp>
-      <p:sp>
-        <p:nvSpPr>
-          <p:cNvPr id="38" name="Shape 36"/>
-          <p:cNvSpPr/>
-          <p:nvPr/>
-        </p:nvSpPr>
-        <p:spPr>
-          <a:xfrm>
-            <a:off x="1874520" y="4096512"/>
-            <a:ext cx="6903720" cy="658368"/>
-          </a:xfrm>
-          <a:prstGeom prst="rect">
-            <a:avLst>
-              <a:gd name="adj" fmla="val 8333"/>
-            </a:avLst>
-          </a:prstGeom>
-          <a:solidFill>
-            <a:srgbClr val="FCE7F3"/>
-          </a:solidFill>
-          <a:ln w="12700">
-            <a:solidFill>
-              <a:srgbClr val="DB2777"/>
-            </a:solidFill>
-            <a:prstDash val="solid"/>
-          </a:ln>
-        </p:spPr>
-      </p:sp>
-      <p:sp>
-        <p:nvSpPr>
-          <p:cNvPr id="39" name="Shape 37"/>
-          <p:cNvSpPr/>
-          <p:nvPr/>
-        </p:nvSpPr>
-        <p:spPr>
-          <a:xfrm>
-            <a:off x="2124837" y="4169664"/>
+              <a:t>e</a:t>
+            </a:r>
+            <a:endParaRPr lang="en-US" sz="900" dirty="0"/>
+          </a:p>
+        </p:txBody>
+      </p:sp>
+      <p:sp>
+        <p:nvSpPr>
+          <p:cNvPr id="40" name="Shape 38"/>
+          <p:cNvSpPr/>
+          <p:nvPr/>
+        </p:nvSpPr>
+        <p:spPr>
+          <a:xfrm>
+            <a:off x="4331643" y="4169664"/>
             <a:ext cx="685800" cy="475488"/>
           </a:xfrm>
           <a:prstGeom prst="rect">
@@ -34576,13 +33781,13 @@
       </p:sp>
       <p:sp>
         <p:nvSpPr>
-          <p:cNvPr id="40" name="Text 38"/>
-          <p:cNvSpPr/>
-          <p:nvPr/>
-        </p:nvSpPr>
-        <p:spPr>
-          <a:xfrm>
-            <a:off x="2124837" y="4169664"/>
+          <p:cNvPr id="41" name="Text 39"/>
+          <p:cNvSpPr/>
+          <p:nvPr/>
+        </p:nvSpPr>
+        <p:spPr>
+          <a:xfrm>
+            <a:off x="4331643" y="4169664"/>
             <a:ext cx="685800" cy="475488"/>
           </a:xfrm>
           <a:prstGeom prst="rect">
@@ -34607,7 +33812,7 @@
                 <a:ea typeface="Trebuchet MS" pitchFamily="34" charset="-122"/>
                 <a:cs typeface="Trebuchet MS" pitchFamily="34" charset="-120"/>
               </a:rPr>
-              <a:t>r</a:t>
+              <a:t>t</a:t>
             </a:r>
             <a:endParaRPr lang="en-US" sz="900" dirty="0"/>
           </a:p>
@@ -34615,13 +33820,13 @@
       </p:sp>
       <p:sp>
         <p:nvSpPr>
-          <p:cNvPr id="41" name="Shape 39"/>
-          <p:cNvSpPr/>
-          <p:nvPr/>
-        </p:nvSpPr>
-        <p:spPr>
-          <a:xfrm>
-            <a:off x="3033522" y="4169664"/>
+          <p:cNvPr id="42" name="Shape 40"/>
+          <p:cNvSpPr/>
+          <p:nvPr/>
+        </p:nvSpPr>
+        <p:spPr>
+          <a:xfrm>
+            <a:off x="5370141" y="4169664"/>
             <a:ext cx="685800" cy="475488"/>
           </a:xfrm>
           <a:prstGeom prst="rect">
@@ -34642,13 +33847,13 @@
       </p:sp>
       <p:sp>
         <p:nvSpPr>
-          <p:cNvPr id="42" name="Text 40"/>
-          <p:cNvSpPr/>
-          <p:nvPr/>
-        </p:nvSpPr>
-        <p:spPr>
-          <a:xfrm>
-            <a:off x="3033522" y="4169664"/>
+          <p:cNvPr id="43" name="Text 41"/>
+          <p:cNvSpPr/>
+          <p:nvPr/>
+        </p:nvSpPr>
+        <p:spPr>
+          <a:xfrm>
+            <a:off x="5370141" y="4169664"/>
             <a:ext cx="685800" cy="475488"/>
           </a:xfrm>
           <a:prstGeom prst="rect">
@@ -34673,7 +33878,7 @@
                 <a:ea typeface="Trebuchet MS" pitchFamily="34" charset="-122"/>
                 <a:cs typeface="Trebuchet MS" pitchFamily="34" charset="-120"/>
               </a:rPr>
-              <a:t>e</a:t>
+              <a:t>ur</a:t>
             </a:r>
             <a:endParaRPr lang="en-US" sz="900" dirty="0"/>
           </a:p>
@@ -34681,13 +33886,13 @@
       </p:sp>
       <p:sp>
         <p:nvSpPr>
-          <p:cNvPr id="43" name="Shape 41"/>
-          <p:cNvSpPr/>
-          <p:nvPr/>
-        </p:nvSpPr>
-        <p:spPr>
-          <a:xfrm>
-            <a:off x="3942207" y="4169664"/>
+          <p:cNvPr id="44" name="Shape 42"/>
+          <p:cNvSpPr/>
+          <p:nvPr/>
+        </p:nvSpPr>
+        <p:spPr>
+          <a:xfrm>
+            <a:off x="6408638" y="4169664"/>
             <a:ext cx="685800" cy="475488"/>
           </a:xfrm>
           <a:prstGeom prst="rect">
@@ -34708,13 +33913,13 @@
       </p:sp>
       <p:sp>
         <p:nvSpPr>
-          <p:cNvPr id="44" name="Text 42"/>
-          <p:cNvSpPr/>
-          <p:nvPr/>
-        </p:nvSpPr>
-        <p:spPr>
-          <a:xfrm>
-            <a:off x="3942207" y="4169664"/>
+          <p:cNvPr id="45" name="Text 43"/>
+          <p:cNvSpPr/>
+          <p:nvPr/>
+        </p:nvSpPr>
+        <p:spPr>
+          <a:xfrm>
+            <a:off x="6408638" y="4169664"/>
             <a:ext cx="685800" cy="475488"/>
           </a:xfrm>
           <a:prstGeom prst="rect">
@@ -34739,7 +33944,7 @@
                 <a:ea typeface="Trebuchet MS" pitchFamily="34" charset="-122"/>
                 <a:cs typeface="Trebuchet MS" pitchFamily="34" charset="-120"/>
               </a:rPr>
-              <a:t>t</a:t>
+              <a:t>n</a:t>
             </a:r>
             <a:endParaRPr lang="en-US" sz="900" dirty="0"/>
           </a:p>
@@ -34747,13 +33952,13 @@
       </p:sp>
       <p:sp>
         <p:nvSpPr>
-          <p:cNvPr id="45" name="Shape 43"/>
-          <p:cNvSpPr/>
-          <p:nvPr/>
-        </p:nvSpPr>
-        <p:spPr>
-          <a:xfrm>
-            <a:off x="4850892" y="4169664"/>
+          <p:cNvPr id="46" name="Shape 44"/>
+          <p:cNvSpPr/>
+          <p:nvPr/>
+        </p:nvSpPr>
+        <p:spPr>
+          <a:xfrm>
+            <a:off x="7447135" y="4169664"/>
             <a:ext cx="685800" cy="475488"/>
           </a:xfrm>
           <a:prstGeom prst="rect">
@@ -34774,13 +33979,13 @@
       </p:sp>
       <p:sp>
         <p:nvSpPr>
-          <p:cNvPr id="46" name="Text 44"/>
-          <p:cNvSpPr/>
-          <p:nvPr/>
-        </p:nvSpPr>
-        <p:spPr>
-          <a:xfrm>
-            <a:off x="4850892" y="4169664"/>
+          <p:cNvPr id="47" name="Text 45"/>
+          <p:cNvSpPr/>
+          <p:nvPr/>
+        </p:nvSpPr>
+        <p:spPr>
+          <a:xfrm>
+            <a:off x="7447135" y="4169664"/>
             <a:ext cx="685800" cy="475488"/>
           </a:xfrm>
           <a:prstGeom prst="rect">
@@ -34805,205 +34010,7 @@
                 <a:ea typeface="Trebuchet MS" pitchFamily="34" charset="-122"/>
                 <a:cs typeface="Trebuchet MS" pitchFamily="34" charset="-120"/>
               </a:rPr>
-              <a:t>ur</a:t>
-            </a:r>
-            <a:endParaRPr lang="en-US" sz="900" dirty="0"/>
-          </a:p>
-        </p:txBody>
-      </p:sp>
-      <p:sp>
-        <p:nvSpPr>
-          <p:cNvPr id="47" name="Shape 45"/>
-          <p:cNvSpPr/>
-          <p:nvPr/>
-        </p:nvSpPr>
-        <p:spPr>
-          <a:xfrm>
-            <a:off x="5759577" y="4169664"/>
-            <a:ext cx="685800" cy="475488"/>
-          </a:xfrm>
-          <a:prstGeom prst="rect">
-            <a:avLst>
-              <a:gd name="adj" fmla="val 7692"/>
-            </a:avLst>
-          </a:prstGeom>
-          <a:solidFill>
-            <a:srgbClr val="FFFFFF"/>
-          </a:solidFill>
-          <a:ln w="12700">
-            <a:solidFill>
-              <a:srgbClr val="DB2777"/>
-            </a:solidFill>
-            <a:prstDash val="solid"/>
-          </a:ln>
-        </p:spPr>
-      </p:sp>
-      <p:sp>
-        <p:nvSpPr>
-          <p:cNvPr id="48" name="Text 46"/>
-          <p:cNvSpPr/>
-          <p:nvPr/>
-        </p:nvSpPr>
-        <p:spPr>
-          <a:xfrm>
-            <a:off x="5759577" y="4169664"/>
-            <a:ext cx="685800" cy="475488"/>
-          </a:xfrm>
-          <a:prstGeom prst="rect">
-            <a:avLst/>
-          </a:prstGeom>
-          <a:noFill/>
-          <a:ln/>
-        </p:spPr>
-        <p:txBody>
-          <a:bodyPr wrap="square" lIns="0" tIns="0" rIns="0" bIns="0" rtlCol="0" anchor="ctr"/>
-          <a:lstStyle/>
-          <a:p>
-            <a:pPr algn="ctr" indent="0" marL="0">
-              <a:buNone/>
-            </a:pPr>
-            <a:r>
-              <a:rPr lang="en-US" sz="900" b="1" dirty="0">
-                <a:solidFill>
-                  <a:srgbClr val="9D174D"/>
-                </a:solidFill>
-                <a:latin typeface="Trebuchet MS" pitchFamily="34" charset="0"/>
-                <a:ea typeface="Trebuchet MS" pitchFamily="34" charset="-122"/>
-                <a:cs typeface="Trebuchet MS" pitchFamily="34" charset="-120"/>
-              </a:rPr>
-              <a:t>n</a:t>
-            </a:r>
-            <a:endParaRPr lang="en-US" sz="900" dirty="0"/>
-          </a:p>
-        </p:txBody>
-      </p:sp>
-      <p:sp>
-        <p:nvSpPr>
-          <p:cNvPr id="49" name="Shape 47"/>
-          <p:cNvSpPr/>
-          <p:nvPr/>
-        </p:nvSpPr>
-        <p:spPr>
-          <a:xfrm>
-            <a:off x="6668262" y="4169664"/>
-            <a:ext cx="685800" cy="475488"/>
-          </a:xfrm>
-          <a:prstGeom prst="rect">
-            <a:avLst>
-              <a:gd name="adj" fmla="val 7692"/>
-            </a:avLst>
-          </a:prstGeom>
-          <a:solidFill>
-            <a:srgbClr val="FFFFFF"/>
-          </a:solidFill>
-          <a:ln w="12700">
-            <a:solidFill>
-              <a:srgbClr val="DB2777"/>
-            </a:solidFill>
-            <a:prstDash val="solid"/>
-          </a:ln>
-        </p:spPr>
-      </p:sp>
-      <p:sp>
-        <p:nvSpPr>
-          <p:cNvPr id="50" name="Text 48"/>
-          <p:cNvSpPr/>
-          <p:nvPr/>
-        </p:nvSpPr>
-        <p:spPr>
-          <a:xfrm>
-            <a:off x="6668262" y="4169664"/>
-            <a:ext cx="685800" cy="475488"/>
-          </a:xfrm>
-          <a:prstGeom prst="rect">
-            <a:avLst/>
-          </a:prstGeom>
-          <a:noFill/>
-          <a:ln/>
-        </p:spPr>
-        <p:txBody>
-          <a:bodyPr wrap="square" lIns="0" tIns="0" rIns="0" bIns="0" rtlCol="0" anchor="ctr"/>
-          <a:lstStyle/>
-          <a:p>
-            <a:pPr algn="ctr" indent="0" marL="0">
-              <a:buNone/>
-            </a:pPr>
-            <a:r>
-              <a:rPr lang="en-US" sz="900" b="1" dirty="0">
-                <a:solidFill>
-                  <a:srgbClr val="9D174D"/>
-                </a:solidFill>
-                <a:latin typeface="Trebuchet MS" pitchFamily="34" charset="0"/>
-                <a:ea typeface="Trebuchet MS" pitchFamily="34" charset="-122"/>
-                <a:cs typeface="Trebuchet MS" pitchFamily="34" charset="-120"/>
-              </a:rPr>
-              <a:t>i</a:t>
-            </a:r>
-            <a:endParaRPr lang="en-US" sz="900" dirty="0"/>
-          </a:p>
-        </p:txBody>
-      </p:sp>
-      <p:sp>
-        <p:nvSpPr>
-          <p:cNvPr id="51" name="Shape 49"/>
-          <p:cNvSpPr/>
-          <p:nvPr/>
-        </p:nvSpPr>
-        <p:spPr>
-          <a:xfrm>
-            <a:off x="7576947" y="4169664"/>
-            <a:ext cx="685800" cy="475488"/>
-          </a:xfrm>
-          <a:prstGeom prst="rect">
-            <a:avLst>
-              <a:gd name="adj" fmla="val 7692"/>
-            </a:avLst>
-          </a:prstGeom>
-          <a:solidFill>
-            <a:srgbClr val="FFFFFF"/>
-          </a:solidFill>
-          <a:ln w="12700">
-            <a:solidFill>
-              <a:srgbClr val="DB2777"/>
-            </a:solidFill>
-            <a:prstDash val="solid"/>
-          </a:ln>
-        </p:spPr>
-      </p:sp>
-      <p:sp>
-        <p:nvSpPr>
-          <p:cNvPr id="52" name="Text 50"/>
-          <p:cNvSpPr/>
-          <p:nvPr/>
-        </p:nvSpPr>
-        <p:spPr>
-          <a:xfrm>
-            <a:off x="7576947" y="4169664"/>
-            <a:ext cx="685800" cy="475488"/>
-          </a:xfrm>
-          <a:prstGeom prst="rect">
-            <a:avLst/>
-          </a:prstGeom>
-          <a:noFill/>
-          <a:ln/>
-        </p:spPr>
-        <p:txBody>
-          <a:bodyPr wrap="square" lIns="0" tIns="0" rIns="0" bIns="0" rtlCol="0" anchor="ctr"/>
-          <a:lstStyle/>
-          <a:p>
-            <a:pPr algn="ctr" indent="0" marL="0">
-              <a:buNone/>
-            </a:pPr>
-            <a:r>
-              <a:rPr lang="en-US" sz="900" b="1" dirty="0">
-                <a:solidFill>
-                  <a:srgbClr val="9D174D"/>
-                </a:solidFill>
-                <a:latin typeface="Trebuchet MS" pitchFamily="34" charset="0"/>
-                <a:ea typeface="Trebuchet MS" pitchFamily="34" charset="-122"/>
-                <a:cs typeface="Trebuchet MS" pitchFamily="34" charset="-120"/>
-              </a:rPr>
-              <a:t>ng</a:t>
+              <a:t>s</a:t>
             </a:r>
             <a:endParaRPr lang="en-US" sz="900" dirty="0"/>
           </a:p>
@@ -37416,7 +36423,7 @@
                 <a:ea typeface="Trebuchet MS" pitchFamily="34" charset="-122"/>
                 <a:cs typeface="Trebuchet MS" pitchFamily="34" charset="-120"/>
               </a:rPr>
-              <a:t>pre-</a:t>
+              <a:t>mis-</a:t>
             </a:r>
             <a:endParaRPr lang="en-US" sz="1300" dirty="0"/>
           </a:p>
@@ -39260,7 +38267,7 @@
                 <a:ea typeface="Calibri" pitchFamily="34" charset="-122"/>
                 <a:cs typeface="Calibri" pitchFamily="34" charset="-120"/>
               </a:rPr>
-              <a:t>1.  The word 'returnable' means something is able to be given back.</a:t>
+              <a:t>1.  The root 'return' comes from Latin origins.</a:t>
             </a:r>
             <a:endParaRPr lang="en-US" sz="1300" dirty="0"/>
           </a:p>
@@ -39399,7 +38406,7 @@
                 <a:ea typeface="Calibri" pitchFamily="34" charset="-122"/>
                 <a:cs typeface="Calibri" pitchFamily="34" charset="-120"/>
               </a:rPr>
-              <a:t>2.  The root 'return' comes from the Greek language.</a:t>
+              <a:t>2.  The word 'returnable' means impossible to carry.</a:t>
             </a:r>
             <a:endParaRPr lang="en-US" sz="1300" dirty="0"/>
           </a:p>
@@ -39538,7 +38545,7 @@
                 <a:ea typeface="Calibri" pitchFamily="34" charset="-122"/>
                 <a:cs typeface="Calibri" pitchFamily="34" charset="-120"/>
               </a:rPr>
-              <a:t>3.  Adding the prefix 'non-' to 'returnable' makes a word that means not able to be given back.</a:t>
+              <a:t>3.  Adding '-ed' to 'return' makes a past tense word.</a:t>
             </a:r>
             <a:endParaRPr lang="en-US" sz="1300" dirty="0"/>
           </a:p>
@@ -39677,7 +38684,7 @@
                 <a:ea typeface="Calibri" pitchFamily="34" charset="-122"/>
                 <a:cs typeface="Calibri" pitchFamily="34" charset="-120"/>
               </a:rPr>
-              <a:t>4.  The word 'returning' means someone is in the process of coming back.</a:t>
+              <a:t>4.  The word 'returning' has only one syllable.</a:t>
             </a:r>
             <a:endParaRPr lang="en-US" sz="1300" dirty="0"/>
           </a:p>
@@ -39700,11 +38707,11 @@
             </a:avLst>
           </a:prstGeom>
           <a:solidFill>
-            <a:srgbClr val="DCFCE7"/>
-          </a:solidFill>
-          <a:ln w="12700">
-            <a:solidFill>
-              <a:srgbClr val="16A34A"/>
+            <a:srgbClr val="FEE2E2"/>
+          </a:solidFill>
+          <a:ln w="12700">
+            <a:solidFill>
+              <a:srgbClr val="DC2626"/>
             </a:solidFill>
             <a:prstDash val="solid"/>
           </a:ln>
@@ -39737,13 +38744,13 @@
             <a:r>
               <a:rPr lang="en-US" sz="1100" b="1" dirty="0">
                 <a:solidFill>
-                  <a:srgbClr val="16A34A"/>
+                  <a:srgbClr val="DC2626"/>
                 </a:solidFill>
                 <a:latin typeface="Trebuchet MS" pitchFamily="34" charset="0"/>
                 <a:ea typeface="Trebuchet MS" pitchFamily="34" charset="-122"/>
                 <a:cs typeface="Trebuchet MS" pitchFamily="34" charset="-120"/>
               </a:rPr>
-              <a:t>TRUE</a:t>
+              <a:t>FALSE</a:t>
             </a:r>
             <a:endParaRPr lang="en-US" sz="1100" dirty="0"/>
           </a:p>
@@ -39816,7 +38823,7 @@
                 <a:ea typeface="Calibri" pitchFamily="34" charset="-122"/>
                 <a:cs typeface="Calibri" pitchFamily="34" charset="-120"/>
               </a:rPr>
-              <a:t>5.  The word 'unreturned' means something has already been sent back.</a:t>
+              <a:t>5.  The prefix 'non-' in 'non-returnable' means 'not'.</a:t>
             </a:r>
             <a:endParaRPr lang="en-US" sz="1300" dirty="0"/>
           </a:p>
@@ -39839,11 +38846,11 @@
             </a:avLst>
           </a:prstGeom>
           <a:solidFill>
-            <a:srgbClr val="FEE2E2"/>
-          </a:solidFill>
-          <a:ln w="12700">
-            <a:solidFill>
-              <a:srgbClr val="DC2626"/>
+            <a:srgbClr val="DCFCE7"/>
+          </a:solidFill>
+          <a:ln w="12700">
+            <a:solidFill>
+              <a:srgbClr val="16A34A"/>
             </a:solidFill>
             <a:prstDash val="solid"/>
           </a:ln>
@@ -39876,13 +38883,13 @@
             <a:r>
               <a:rPr lang="en-US" sz="1100" b="1" dirty="0">
                 <a:solidFill>
-                  <a:srgbClr val="DC2626"/>
+                  <a:srgbClr val="16A34A"/>
                 </a:solidFill>
                 <a:latin typeface="Trebuchet MS" pitchFamily="34" charset="0"/>
                 <a:ea typeface="Trebuchet MS" pitchFamily="34" charset="-122"/>
                 <a:cs typeface="Trebuchet MS" pitchFamily="34" charset="-120"/>
               </a:rPr>
-              <a:t>FALSE</a:t>
+              <a:t>TRUE</a:t>
             </a:r>
             <a:endParaRPr lang="en-US" sz="1100" dirty="0"/>
           </a:p>
@@ -42095,7 +41102,7 @@
                 <a:ea typeface="Trebuchet MS" pitchFamily="34" charset="-122"/>
                 <a:cs typeface="Trebuchet MS" pitchFamily="34" charset="-120"/>
               </a:rPr>
-              <a:t>pre-</a:t>
+              <a:t>mis-</a:t>
             </a:r>
             <a:endParaRPr lang="en-US" sz="1300" dirty="0"/>
           </a:p>
@@ -43095,7 +42102,7 @@
                 <a:ea typeface="Calibri" pitchFamily="34" charset="-122"/>
                 <a:cs typeface="Calibri" pitchFamily="34" charset="-120"/>
               </a:rPr>
-              <a:t>Something that is able to be given back or sent back.</a:t>
+              <a:t>Able to be given back or sent back, like a returnable bottle.</a:t>
             </a:r>
             <a:endParaRPr lang="en-US" sz="1200" dirty="0"/>
           </a:p>
@@ -43234,7 +42241,7 @@
                 <a:ea typeface="Calibri" pitchFamily="34" charset="-122"/>
                 <a:cs typeface="Calibri" pitchFamily="34" charset="-120"/>
               </a:rPr>
-              <a:t>Goes back, or more than one act of coming back.</a:t>
+              <a:t>Goes back to a place, or more than one return journey or result.</a:t>
             </a:r>
             <a:endParaRPr lang="en-US" sz="1200" dirty="0"/>
           </a:p>
@@ -43373,7 +42380,7 @@
                 <a:ea typeface="Calibri" pitchFamily="34" charset="-122"/>
                 <a:cs typeface="Calibri" pitchFamily="34" charset="-120"/>
               </a:rPr>
-              <a:t>In the process of going back or coming back right now.</a:t>
+              <a:t>In the process of going back to a place right now.</a:t>
             </a:r>
             <a:endParaRPr lang="en-US" sz="1200" dirty="0"/>
           </a:p>
@@ -43512,7 +42519,7 @@
                 <a:ea typeface="Calibri" pitchFamily="34" charset="-122"/>
                 <a:cs typeface="Calibri" pitchFamily="34" charset="-120"/>
               </a:rPr>
-              <a:t>Something that cannot be given or sent back once you have it.</a:t>
+              <a:t>Cannot be given back or returned, like a non-returnable deposit.</a:t>
             </a:r>
             <a:endParaRPr lang="en-US" sz="1200" dirty="0"/>
           </a:p>
@@ -43651,7 +42658,7 @@
                 <a:ea typeface="Calibri" pitchFamily="34" charset="-122"/>
                 <a:cs typeface="Calibri" pitchFamily="34" charset="-120"/>
               </a:rPr>
-              <a:t>To go back to a place or give something back to where it came from.</a:t>
+              <a:t>To go back to a place you were at before, or to give something back.</a:t>
             </a:r>
             <a:endParaRPr lang="en-US" sz="1200" dirty="0"/>
           </a:p>
@@ -43790,7 +42797,7 @@
                 <a:ea typeface="Calibri" pitchFamily="34" charset="-122"/>
                 <a:cs typeface="Calibri" pitchFamily="34" charset="-120"/>
               </a:rPr>
-              <a:t>A person who comes back, especially after being away for a long time.</a:t>
+              <a:t>A person who comes back, such as someone returning to work after a long break.</a:t>
             </a:r>
             <a:endParaRPr lang="en-US" sz="1200" dirty="0"/>
           </a:p>
@@ -43929,7 +42936,7 @@
                 <a:ea typeface="Calibri" pitchFamily="34" charset="-122"/>
                 <a:cs typeface="Calibri" pitchFamily="34" charset="-120"/>
               </a:rPr>
-              <a:t>Went back to a place or gave something back already.</a:t>
+              <a:t>Went back to a place, or gave something back, in the past.</a:t>
             </a:r>
             <a:endParaRPr lang="en-US" sz="1200" dirty="0"/>
           </a:p>
@@ -44424,7 +43431,7 @@
                 <a:ea typeface="Calibri" pitchFamily="34" charset="-122"/>
                 <a:cs typeface="Calibri" pitchFamily="34" charset="-120"/>
               </a:rPr>
-              <a:t>The library book was returnable, so Mia made sure to bring it back on time.</a:t>
+              <a:t>The library book is returnable, so please bring it back before the due date.</a:t>
             </a:r>
             <a:endParaRPr lang="en-US" sz="1500" dirty="0"/>
           </a:p>
@@ -44588,7 +43595,7 @@
                 <a:ea typeface="Calibri" pitchFamily="34" charset="-122"/>
                 <a:cs typeface="Calibri" pitchFamily="34" charset="-120"/>
               </a:rPr>
-              <a:t>After the holidays, the returning students were excited to see their friends at school.</a:t>
+              <a:t>She was returning home from her holiday when she spotted a kangaroo by the road.</a:t>
             </a:r>
             <a:endParaRPr lang="en-US" sz="1500" dirty="0"/>
           </a:p>
@@ -44752,7 +43759,7 @@
                 <a:ea typeface="Calibri" pitchFamily="34" charset="-122"/>
                 <a:cs typeface="Calibri" pitchFamily="34" charset="-120"/>
               </a:rPr>
-              <a:t>The shop assistant explained that the broken toy was non-returnable without a receipt.</a:t>
+              <a:t>The shop assistant told us that the damaged item was non-returnable after thirty days.</a:t>
             </a:r>
             <a:endParaRPr lang="en-US" sz="1500" dirty="0"/>
           </a:p>
